--- a/docs/webinar-resources/Module3-BMC-American-System-Hamiltonian-Operating-Model.pptx
+++ b/docs/webinar-resources/Module3-BMC-American-System-Hamiltonian-Operating-Model.pptx
@@ -1833,13 +1833,6 @@
 <file path=ppt/slides/slide1.xml><?xml version="1.0" encoding="utf-8"?>
 <p:sld xmlns:a="http://schemas.openxmlformats.org/drawingml/2006/main" xmlns:r="http://schemas.openxmlformats.org/officeDocument/2006/relationships" xmlns:p="http://schemas.openxmlformats.org/presentationml/2006/main">
   <p:cSld name="Slide 1">
-    <p:bg>
-      <p:bgPr>
-        <a:solidFill>
-          <a:srgbClr val="111111"/>
-        </a:solidFill>
-      </p:bgPr>
-    </p:bg>
     <p:spTree>
       <p:nvGrpSpPr>
         <p:cNvPr id="1" name=""/>
@@ -1856,13 +1849,38 @@
       </p:grpSpPr>
       <p:sp>
         <p:nvSpPr>
-          <p:cNvPr id="2" name="Text 0"/>
-          <p:cNvSpPr/>
-          <p:nvPr/>
-        </p:nvSpPr>
-        <p:spPr>
-          <a:xfrm>
-            <a:off x="548640" y="1188720"/>
+          <p:cNvPr id="2" name="Shape 0"/>
+          <p:cNvSpPr/>
+          <p:nvPr/>
+        </p:nvSpPr>
+        <p:spPr>
+          <a:xfrm>
+            <a:off x="0" y="0"/>
+            <a:ext cx="9144000" cy="5143500"/>
+          </a:xfrm>
+          <a:prstGeom prst="rect">
+            <a:avLst/>
+          </a:prstGeom>
+          <a:solidFill>
+            <a:srgbClr val="111111"/>
+          </a:solidFill>
+          <a:ln w="12700">
+            <a:solidFill>
+              <a:srgbClr val="111111"/>
+            </a:solidFill>
+            <a:prstDash val="solid"/>
+          </a:ln>
+        </p:spPr>
+      </p:sp>
+      <p:sp>
+        <p:nvSpPr>
+          <p:cNvPr id="3" name="Text 1"/>
+          <p:cNvSpPr/>
+          <p:nvPr/>
+        </p:nvSpPr>
+        <p:spPr>
+          <a:xfrm>
+            <a:off x="548640" y="1143000"/>
             <a:ext cx="8046720" cy="320040"/>
           </a:xfrm>
           <a:prstGeom prst="rect">
@@ -1879,9 +1897,9 @@
               <a:buNone/>
             </a:pPr>
             <a:r>
-              <a:rPr lang="en-US" sz="1400" spc="300" kern="0" dirty="0">
-                <a:solidFill>
-                  <a:srgbClr val="AAAAAA"/>
+              <a:rPr lang="en-US" sz="1400" b="1" spc="200" kern="0" dirty="0">
+                <a:solidFill>
+                  <a:srgbClr val="C9A227"/>
                 </a:solidFill>
                 <a:latin typeface="Arial" pitchFamily="34" charset="0"/>
                 <a:ea typeface="Arial" pitchFamily="34" charset="-122"/>
@@ -1895,32 +1913,32 @@
       </p:sp>
       <p:sp>
         <p:nvSpPr>
-          <p:cNvPr id="3" name="Text 1"/>
-          <p:cNvSpPr/>
-          <p:nvPr/>
-        </p:nvSpPr>
-        <p:spPr>
-          <a:xfrm>
-            <a:off x="548640" y="1645920"/>
-            <a:ext cx="8046720" cy="1280160"/>
-          </a:xfrm>
-          <a:prstGeom prst="rect">
-            <a:avLst/>
-          </a:prstGeom>
-          <a:noFill/>
-          <a:ln/>
-        </p:spPr>
-        <p:txBody>
-          <a:bodyPr wrap="square" lIns="0" tIns="0" rIns="0" bIns="0" rtlCol="0" anchor="ctr"/>
-          <a:lstStyle/>
-          <a:p>
-            <a:pPr indent="0" marL="0">
-              <a:buNone/>
-            </a:pPr>
-            <a:r>
-              <a:rPr lang="en-US" sz="3000" b="1" dirty="0">
-                <a:solidFill>
-                  <a:srgbClr val="F5F5F5"/>
+          <p:cNvPr id="4" name="Text 2"/>
+          <p:cNvSpPr/>
+          <p:nvPr/>
+        </p:nvSpPr>
+        <p:spPr>
+          <a:xfrm>
+            <a:off x="548640" y="1600200"/>
+            <a:ext cx="8046720" cy="1097280"/>
+          </a:xfrm>
+          <a:prstGeom prst="rect">
+            <a:avLst/>
+          </a:prstGeom>
+          <a:noFill/>
+          <a:ln/>
+        </p:spPr>
+        <p:txBody>
+          <a:bodyPr wrap="square" lIns="0" tIns="0" rIns="0" bIns="0" rtlCol="0" anchor="ctr"/>
+          <a:lstStyle/>
+          <a:p>
+            <a:pPr indent="0" marL="0">
+              <a:buNone/>
+            </a:pPr>
+            <a:r>
+              <a:rPr lang="en-US" sz="2600" b="1" dirty="0">
+                <a:solidFill>
+                  <a:srgbClr val="FFFFFF"/>
                 </a:solidFill>
                 <a:latin typeface="Arial" pitchFamily="34" charset="0"/>
                 <a:ea typeface="Arial" pitchFamily="34" charset="-122"/>
@@ -1928,16 +1946,16 @@
               </a:rPr>
               <a:t>Redesigning Your Operating Model</a:t>
             </a:r>
-            <a:endParaRPr lang="en-US" sz="3000" dirty="0"/>
-          </a:p>
-          <a:p>
-            <a:pPr indent="0" marL="0">
-              <a:buNone/>
-            </a:pPr>
-            <a:r>
-              <a:rPr lang="en-US" sz="3000" b="1" dirty="0">
-                <a:solidFill>
-                  <a:srgbClr val="F5F5F5"/>
+            <a:endParaRPr lang="en-US" sz="2600" dirty="0"/>
+          </a:p>
+          <a:p>
+            <a:pPr indent="0" marL="0">
+              <a:buNone/>
+            </a:pPr>
+            <a:r>
+              <a:rPr lang="en-US" sz="2600" b="1" dirty="0">
+                <a:solidFill>
+                  <a:srgbClr val="FFFFFF"/>
                 </a:solidFill>
                 <a:latin typeface="Arial" pitchFamily="34" charset="0"/>
                 <a:ea typeface="Arial" pitchFamily="34" charset="-122"/>
@@ -1945,38 +1963,63 @@
               </a:rPr>
               <a:t>for the Hamiltonian System</a:t>
             </a:r>
-            <a:endParaRPr lang="en-US" sz="3000" dirty="0"/>
-          </a:p>
-        </p:txBody>
-      </p:sp>
-      <p:sp>
-        <p:nvSpPr>
-          <p:cNvPr id="4" name="Text 2"/>
-          <p:cNvSpPr/>
-          <p:nvPr/>
-        </p:nvSpPr>
-        <p:spPr>
-          <a:xfrm>
-            <a:off x="548640" y="3108960"/>
-            <a:ext cx="8046720" cy="365760"/>
-          </a:xfrm>
-          <a:prstGeom prst="rect">
-            <a:avLst/>
-          </a:prstGeom>
-          <a:noFill/>
-          <a:ln/>
-        </p:spPr>
-        <p:txBody>
-          <a:bodyPr wrap="square" lIns="0" tIns="0" rIns="0" bIns="0" rtlCol="0" anchor="ctr"/>
-          <a:lstStyle/>
-          <a:p>
-            <a:pPr indent="0" marL="0">
-              <a:buNone/>
-            </a:pPr>
-            <a:r>
-              <a:rPr lang="en-US" sz="1800" dirty="0">
-                <a:solidFill>
-                  <a:srgbClr val="CCCCCC"/>
+            <a:endParaRPr lang="en-US" sz="2600" dirty="0"/>
+          </a:p>
+        </p:txBody>
+      </p:sp>
+      <p:sp>
+        <p:nvSpPr>
+          <p:cNvPr id="5" name="Shape 3"/>
+          <p:cNvSpPr/>
+          <p:nvPr/>
+        </p:nvSpPr>
+        <p:spPr>
+          <a:xfrm>
+            <a:off x="548640" y="2834640"/>
+            <a:ext cx="1645920" cy="54864"/>
+          </a:xfrm>
+          <a:prstGeom prst="rect">
+            <a:avLst/>
+          </a:prstGeom>
+          <a:solidFill>
+            <a:srgbClr val="C9A227"/>
+          </a:solidFill>
+          <a:ln w="12700">
+            <a:solidFill>
+              <a:srgbClr val="C9A227"/>
+            </a:solidFill>
+            <a:prstDash val="solid"/>
+          </a:ln>
+        </p:spPr>
+      </p:sp>
+      <p:sp>
+        <p:nvSpPr>
+          <p:cNvPr id="6" name="Text 4"/>
+          <p:cNvSpPr/>
+          <p:nvPr/>
+        </p:nvSpPr>
+        <p:spPr>
+          <a:xfrm>
+            <a:off x="548640" y="3063240"/>
+            <a:ext cx="8046720" cy="320040"/>
+          </a:xfrm>
+          <a:prstGeom prst="rect">
+            <a:avLst/>
+          </a:prstGeom>
+          <a:noFill/>
+          <a:ln/>
+        </p:spPr>
+        <p:txBody>
+          <a:bodyPr wrap="square" lIns="0" tIns="0" rIns="0" bIns="0" rtlCol="0" anchor="ctr"/>
+          <a:lstStyle/>
+          <a:p>
+            <a:pPr indent="0" marL="0">
+              <a:buNone/>
+            </a:pPr>
+            <a:r>
+              <a:rPr lang="en-US" sz="1500" dirty="0">
+                <a:solidFill>
+                  <a:srgbClr val="C8C8C8"/>
                 </a:solidFill>
                 <a:latin typeface="Arial" pitchFamily="34" charset="0"/>
                 <a:ea typeface="Arial" pitchFamily="34" charset="-122"/>
@@ -1984,19 +2027,19 @@
               </a:rPr>
               <a:t>AI-Enabled Work and Sovereign American Capability</a:t>
             </a:r>
-            <a:endParaRPr lang="en-US" sz="1800" dirty="0"/>
-          </a:p>
-        </p:txBody>
-      </p:sp>
-      <p:sp>
-        <p:nvSpPr>
-          <p:cNvPr id="5" name="Text 3"/>
-          <p:cNvSpPr/>
-          <p:nvPr/>
-        </p:nvSpPr>
-        <p:spPr>
-          <a:xfrm>
-            <a:off x="548640" y="4114800"/>
+            <a:endParaRPr lang="en-US" sz="1500" dirty="0"/>
+          </a:p>
+        </p:txBody>
+      </p:sp>
+      <p:sp>
+        <p:nvSpPr>
+          <p:cNvPr id="7" name="Text 5"/>
+          <p:cNvSpPr/>
+          <p:nvPr/>
+        </p:nvSpPr>
+        <p:spPr>
+          <a:xfrm>
+            <a:off x="548640" y="4160520"/>
             <a:ext cx="8046720" cy="274320"/>
           </a:xfrm>
           <a:prstGeom prst="rect">
@@ -2013,9 +2056,9 @@
               <a:buNone/>
             </a:pPr>
             <a:r>
-              <a:rPr lang="en-US" sz="1400" dirty="0">
-                <a:solidFill>
-                  <a:srgbClr val="999999"/>
+              <a:rPr lang="en-US" sz="1300" dirty="0">
+                <a:solidFill>
+                  <a:srgbClr val="A0A0A0"/>
                 </a:solidFill>
                 <a:latin typeface="Arial" pitchFamily="34" charset="0"/>
                 <a:ea typeface="Arial" pitchFamily="34" charset="-122"/>
@@ -2023,7 +2066,7 @@
               </a:rPr>
               <a:t>Joshua Konkle  ·  Chief of Staff Strategist</a:t>
             </a:r>
-            <a:endParaRPr lang="en-US" sz="1400" dirty="0"/>
+            <a:endParaRPr lang="en-US" sz="1300" dirty="0"/>
           </a:p>
         </p:txBody>
       </p:sp>
@@ -2038,13 +2081,6 @@
 <file path=ppt/slides/slide10.xml><?xml version="1.0" encoding="utf-8"?>
 <p:sld xmlns:a="http://schemas.openxmlformats.org/drawingml/2006/main" xmlns:r="http://schemas.openxmlformats.org/officeDocument/2006/relationships" xmlns:p="http://schemas.openxmlformats.org/presentationml/2006/main">
   <p:cSld name="Slide 10">
-    <p:bg>
-      <p:bgPr>
-        <a:solidFill>
-          <a:srgbClr val="FFFFFF"/>
-        </a:solidFill>
-      </p:bgPr>
-    </p:bg>
     <p:spTree>
       <p:nvGrpSpPr>
         <p:cNvPr id="1" name=""/>
@@ -2061,32 +2097,57 @@
       </p:grpSpPr>
       <p:sp>
         <p:nvSpPr>
-          <p:cNvPr id="2" name="Text 0"/>
+          <p:cNvPr id="2" name="Shape 0"/>
+          <p:cNvSpPr/>
+          <p:nvPr/>
+        </p:nvSpPr>
+        <p:spPr>
+          <a:xfrm>
+            <a:off x="0" y="0"/>
+            <a:ext cx="9144000" cy="5143500"/>
+          </a:xfrm>
+          <a:prstGeom prst="rect">
+            <a:avLst/>
+          </a:prstGeom>
+          <a:solidFill>
+            <a:srgbClr val="FFFFFF"/>
+          </a:solidFill>
+          <a:ln w="12700">
+            <a:solidFill>
+              <a:srgbClr val="FFFFFF"/>
+            </a:solidFill>
+            <a:prstDash val="solid"/>
+          </a:ln>
+        </p:spPr>
+      </p:sp>
+      <p:sp>
+        <p:nvSpPr>
+          <p:cNvPr id="3" name="Text 1"/>
           <p:cNvSpPr/>
           <p:nvPr/>
         </p:nvSpPr>
         <p:spPr>
           <a:xfrm>
             <a:off x="457200" y="320040"/>
-            <a:ext cx="8229600" cy="457200"/>
-          </a:xfrm>
-          <a:prstGeom prst="rect">
-            <a:avLst/>
-          </a:prstGeom>
-          <a:noFill/>
-          <a:ln/>
-        </p:spPr>
-        <p:txBody>
-          <a:bodyPr wrap="square" lIns="0" tIns="0" rIns="0" bIns="0" rtlCol="0" anchor="ctr"/>
-          <a:lstStyle/>
-          <a:p>
-            <a:pPr indent="0" marL="0">
-              <a:buNone/>
-            </a:pPr>
-            <a:r>
-              <a:rPr lang="en-US" sz="2800" b="1" dirty="0">
-                <a:solidFill>
-                  <a:srgbClr val="1A1A1A"/>
+            <a:ext cx="8229600" cy="365760"/>
+          </a:xfrm>
+          <a:prstGeom prst="rect">
+            <a:avLst/>
+          </a:prstGeom>
+          <a:noFill/>
+          <a:ln/>
+        </p:spPr>
+        <p:txBody>
+          <a:bodyPr wrap="square" lIns="0" tIns="0" rIns="0" bIns="0" rtlCol="0" anchor="ctr"/>
+          <a:lstStyle/>
+          <a:p>
+            <a:pPr indent="0" marL="0">
+              <a:buNone/>
+            </a:pPr>
+            <a:r>
+              <a:rPr lang="en-US" sz="2400" b="1" dirty="0">
+                <a:solidFill>
+                  <a:srgbClr val="1B2A4A"/>
                 </a:solidFill>
                 <a:latin typeface="Arial" pitchFamily="34" charset="0"/>
                 <a:ea typeface="Arial" pitchFamily="34" charset="-122"/>
@@ -2094,79 +2155,103 @@
               </a:rPr>
               <a:t>Exercise</a:t>
             </a:r>
-            <a:endParaRPr lang="en-US" sz="2800" dirty="0"/>
-          </a:p>
-        </p:txBody>
-      </p:sp>
-      <p:sp>
-        <p:nvSpPr>
-          <p:cNvPr id="3" name="Shape 1"/>
-          <p:cNvSpPr/>
-          <p:nvPr/>
-        </p:nvSpPr>
-        <p:spPr>
-          <a:xfrm>
-            <a:off x="457200" y="1097280"/>
-            <a:ext cx="8229600" cy="3017520"/>
-          </a:xfrm>
-          <a:prstGeom prst="rect">
-            <a:avLst/>
+            <a:endParaRPr lang="en-US" sz="2400" dirty="0"/>
+          </a:p>
+        </p:txBody>
+      </p:sp>
+      <p:sp>
+        <p:nvSpPr>
+          <p:cNvPr id="4" name="Text 2"/>
+          <p:cNvSpPr/>
+          <p:nvPr/>
+        </p:nvSpPr>
+        <p:spPr>
+          <a:xfrm>
+            <a:off x="457200" y="1005840"/>
+            <a:ext cx="8229600" cy="1280160"/>
+          </a:xfrm>
+          <a:prstGeom prst="rect">
+            <a:avLst/>
+          </a:prstGeom>
+          <a:noFill/>
+          <a:ln/>
+        </p:spPr>
+        <p:txBody>
+          <a:bodyPr wrap="square" lIns="0" tIns="0" rIns="0" bIns="0" rtlCol="0" anchor="ctr"/>
+          <a:lstStyle/>
+          <a:p>
+            <a:pPr indent="0" marL="0">
+              <a:buNone/>
+            </a:pPr>
+            <a:r>
+              <a:rPr lang="en-US" sz="1600" dirty="0">
+                <a:solidFill>
+                  <a:srgbClr val="2A2A2A"/>
+                </a:solidFill>
+                <a:latin typeface="Arial" pitchFamily="34" charset="0"/>
+                <a:ea typeface="Arial" pitchFamily="34" charset="-122"/>
+                <a:cs typeface="Arial" pitchFamily="34" charset="-120"/>
+              </a:rPr>
+              <a:t>Identify one major workflow or function in your organization.</a:t>
+            </a:r>
+            <a:endParaRPr lang="en-US" sz="1600" dirty="0"/>
+          </a:p>
+          <a:p>
+            <a:pPr indent="0" marL="0">
+              <a:buNone/>
+            </a:pPr>
+            <a:r>
+              <a:rPr lang="en-US" sz="1600" dirty="0">
+                <a:solidFill>
+                  <a:srgbClr val="2A2A2A"/>
+                </a:solidFill>
+                <a:latin typeface="Arial" pitchFamily="34" charset="0"/>
+                <a:ea typeface="Arial" pitchFamily="34" charset="-122"/>
+                <a:cs typeface="Arial" pitchFamily="34" charset="-120"/>
+              </a:rPr>
+              <a:t>Sketch how the operating model around it could be redesigned so that AI and automation increase sovereign American capability instead of simply reducing headcount.</a:t>
+            </a:r>
+            <a:endParaRPr lang="en-US" sz="1600" dirty="0"/>
+          </a:p>
+        </p:txBody>
+      </p:sp>
+      <p:sp>
+        <p:nvSpPr>
+          <p:cNvPr id="5" name="Shape 3"/>
+          <p:cNvSpPr/>
+          <p:nvPr/>
+        </p:nvSpPr>
+        <p:spPr>
+          <a:xfrm>
+            <a:off x="457200" y="2560320"/>
+            <a:ext cx="8229600" cy="1463040"/>
+          </a:xfrm>
+          <a:prstGeom prst="roundRect">
+            <a:avLst>
+              <a:gd name="adj" fmla="val 5000"/>
+            </a:avLst>
           </a:prstGeom>
           <a:solidFill>
-            <a:srgbClr val="F7F7F7"/>
+            <a:srgbClr val="1B2A4A"/>
           </a:solidFill>
-          <a:ln/>
-        </p:spPr>
-      </p:sp>
-      <p:sp>
-        <p:nvSpPr>
-          <p:cNvPr id="4" name="Text 2"/>
-          <p:cNvSpPr/>
-          <p:nvPr/>
-        </p:nvSpPr>
-        <p:spPr>
-          <a:xfrm>
-            <a:off x="731520" y="1371600"/>
-            <a:ext cx="7680960" cy="457200"/>
-          </a:xfrm>
-          <a:prstGeom prst="rect">
-            <a:avLst/>
-          </a:prstGeom>
-          <a:noFill/>
-          <a:ln/>
-        </p:spPr>
-        <p:txBody>
-          <a:bodyPr wrap="square" lIns="0" tIns="0" rIns="0" bIns="0" rtlCol="0" anchor="ctr"/>
-          <a:lstStyle/>
-          <a:p>
-            <a:pPr indent="0" marL="0">
-              <a:buNone/>
-            </a:pPr>
-            <a:r>
-              <a:rPr lang="en-US" sz="1700" b="1" dirty="0">
-                <a:solidFill>
-                  <a:srgbClr val="1A1A1A"/>
-                </a:solidFill>
-                <a:latin typeface="Arial" pitchFamily="34" charset="0"/>
-                <a:ea typeface="Arial" pitchFamily="34" charset="-122"/>
-                <a:cs typeface="Arial" pitchFamily="34" charset="-120"/>
-              </a:rPr>
-              <a:t>Identify one major workflow or function in your organization.</a:t>
-            </a:r>
-            <a:endParaRPr lang="en-US" sz="1700" dirty="0"/>
-          </a:p>
-        </p:txBody>
-      </p:sp>
-      <p:sp>
-        <p:nvSpPr>
-          <p:cNvPr id="5" name="Text 3"/>
-          <p:cNvSpPr/>
-          <p:nvPr/>
-        </p:nvSpPr>
-        <p:spPr>
-          <a:xfrm>
-            <a:off x="731520" y="2011680"/>
-            <a:ext cx="7680960" cy="822960"/>
+          <a:ln w="12700">
+            <a:solidFill>
+              <a:srgbClr val="1B2A4A"/>
+            </a:solidFill>
+            <a:prstDash val="solid"/>
+          </a:ln>
+        </p:spPr>
+      </p:sp>
+      <p:sp>
+        <p:nvSpPr>
+          <p:cNvPr id="6" name="Text 4"/>
+          <p:cNvSpPr/>
+          <p:nvPr/>
+        </p:nvSpPr>
+        <p:spPr>
+          <a:xfrm>
+            <a:off x="731520" y="2926080"/>
+            <a:ext cx="7680960" cy="914400"/>
           </a:xfrm>
           <a:prstGeom prst="rect">
             <a:avLst/>
@@ -2184,13 +2269,13 @@
             <a:r>
               <a:rPr lang="en-US" sz="1600" dirty="0">
                 <a:solidFill>
-                  <a:srgbClr val="1A1A1A"/>
-                </a:solidFill>
-                <a:latin typeface="Arial" pitchFamily="34" charset="0"/>
-                <a:ea typeface="Arial" pitchFamily="34" charset="-122"/>
-                <a:cs typeface="Arial" pitchFamily="34" charset="-120"/>
-              </a:rPr>
-              <a:t>Sketch how the operating model around it could be redesigned so that AI and automation increase sovereign American capability instead of simply reducing headcount.</a:t>
+                  <a:srgbClr val="FFFFFF"/>
+                </a:solidFill>
+                <a:latin typeface="Arial" pitchFamily="34" charset="0"/>
+                <a:ea typeface="Arial" pitchFamily="34" charset="-122"/>
+                <a:cs typeface="Arial" pitchFamily="34" charset="-120"/>
+              </a:rPr>
+              <a:t>Ask: Does the redesigned work expand higher-skill American roles, or does it primarily eliminate hours?</a:t>
             </a:r>
             <a:endParaRPr lang="en-US" sz="1600" dirty="0"/>
           </a:p>
@@ -2198,45 +2283,6 @@
       </p:sp>
       <p:sp>
         <p:nvSpPr>
-          <p:cNvPr id="6" name="Text 4"/>
-          <p:cNvSpPr/>
-          <p:nvPr/>
-        </p:nvSpPr>
-        <p:spPr>
-          <a:xfrm>
-            <a:off x="731520" y="3108960"/>
-            <a:ext cx="7680960" cy="640080"/>
-          </a:xfrm>
-          <a:prstGeom prst="rect">
-            <a:avLst/>
-          </a:prstGeom>
-          <a:noFill/>
-          <a:ln/>
-        </p:spPr>
-        <p:txBody>
-          <a:bodyPr wrap="square" lIns="0" tIns="0" rIns="0" bIns="0" rtlCol="0" anchor="ctr"/>
-          <a:lstStyle/>
-          <a:p>
-            <a:pPr indent="0" marL="0">
-              <a:buNone/>
-            </a:pPr>
-            <a:r>
-              <a:rPr lang="en-US" sz="1500" dirty="0">
-                <a:solidFill>
-                  <a:srgbClr val="555555"/>
-                </a:solidFill>
-                <a:latin typeface="Arial" pitchFamily="34" charset="0"/>
-                <a:ea typeface="Arial" pitchFamily="34" charset="-122"/>
-                <a:cs typeface="Arial" pitchFamily="34" charset="-120"/>
-              </a:rPr>
-              <a:t>Ask: Does the redesigned work expand higher-skill American roles, or does it primarily eliminate hours?</a:t>
-            </a:r>
-            <a:endParaRPr lang="en-US" sz="1500" dirty="0"/>
-          </a:p>
-        </p:txBody>
-      </p:sp>
-      <p:sp>
-        <p:nvSpPr>
           <p:cNvPr id="7" name="Text 5"/>
           <p:cNvSpPr/>
           <p:nvPr/>
@@ -2244,25 +2290,25 @@
         <p:spPr>
           <a:xfrm>
             <a:off x="457200" y="4800600"/>
-            <a:ext cx="5943600" cy="228600"/>
-          </a:xfrm>
-          <a:prstGeom prst="rect">
-            <a:avLst/>
-          </a:prstGeom>
-          <a:noFill/>
-          <a:ln/>
-        </p:spPr>
-        <p:txBody>
-          <a:bodyPr wrap="square" lIns="0" tIns="0" rIns="0" bIns="0" rtlCol="0" anchor="ctr"/>
-          <a:lstStyle/>
-          <a:p>
-            <a:pPr indent="0" marL="0">
-              <a:buNone/>
-            </a:pPr>
-            <a:r>
-              <a:rPr lang="en-US" sz="1000" dirty="0">
-                <a:solidFill>
-                  <a:srgbClr val="555555"/>
+            <a:ext cx="5943600" cy="256032"/>
+          </a:xfrm>
+          <a:prstGeom prst="rect">
+            <a:avLst/>
+          </a:prstGeom>
+          <a:noFill/>
+          <a:ln/>
+        </p:spPr>
+        <p:txBody>
+          <a:bodyPr wrap="square" lIns="0" tIns="0" rIns="0" bIns="0" rtlCol="0" anchor="ctr"/>
+          <a:lstStyle/>
+          <a:p>
+            <a:pPr indent="0" marL="0">
+              <a:buNone/>
+            </a:pPr>
+            <a:r>
+              <a:rPr lang="en-US" sz="1100" dirty="0">
+                <a:solidFill>
+                  <a:srgbClr val="6A6A6A"/>
                 </a:solidFill>
                 <a:latin typeface="Arial" pitchFamily="34" charset="0"/>
                 <a:ea typeface="Arial" pitchFamily="34" charset="-122"/>
@@ -2270,7 +2316,7 @@
               </a:rPr>
               <a:t>Joshua Konkle  |  Chief of Staff Strategist</a:t>
             </a:r>
-            <a:endParaRPr lang="en-US" sz="1000" dirty="0"/>
+            <a:endParaRPr lang="en-US" sz="1100" dirty="0"/>
           </a:p>
         </p:txBody>
       </p:sp>
@@ -2282,8 +2328,8 @@
         </p:nvSpPr>
         <p:spPr>
           <a:xfrm>
-            <a:off x="7772400" y="4800600"/>
-            <a:ext cx="914400" cy="228600"/>
+            <a:off x="7498080" y="4800600"/>
+            <a:ext cx="1188720" cy="256032"/>
           </a:xfrm>
           <a:prstGeom prst="rect">
             <a:avLst/>
@@ -2299,9 +2345,9 @@
               <a:buNone/>
             </a:pPr>
             <a:r>
-              <a:rPr lang="en-US" sz="1000" dirty="0">
-                <a:solidFill>
-                  <a:srgbClr val="555555"/>
+              <a:rPr lang="en-US" sz="1100" dirty="0">
+                <a:solidFill>
+                  <a:srgbClr val="6A6A6A"/>
                 </a:solidFill>
                 <a:latin typeface="Arial" pitchFamily="34" charset="0"/>
                 <a:ea typeface="Arial" pitchFamily="34" charset="-122"/>
@@ -2309,7 +2355,7 @@
               </a:rPr>
               <a:t>10 / 12</a:t>
             </a:r>
-            <a:endParaRPr lang="en-US" sz="1000" dirty="0"/>
+            <a:endParaRPr lang="en-US" sz="1100" dirty="0"/>
           </a:p>
         </p:txBody>
       </p:sp>
@@ -2324,13 +2370,6 @@
 <file path=ppt/slides/slide11.xml><?xml version="1.0" encoding="utf-8"?>
 <p:sld xmlns:a="http://schemas.openxmlformats.org/drawingml/2006/main" xmlns:r="http://schemas.openxmlformats.org/officeDocument/2006/relationships" xmlns:p="http://schemas.openxmlformats.org/presentationml/2006/main">
   <p:cSld name="Slide 11">
-    <p:bg>
-      <p:bgPr>
-        <a:solidFill>
-          <a:srgbClr val="FFFFFF"/>
-        </a:solidFill>
-      </p:bgPr>
-    </p:bg>
     <p:spTree>
       <p:nvGrpSpPr>
         <p:cNvPr id="1" name=""/>
@@ -2347,32 +2386,57 @@
       </p:grpSpPr>
       <p:sp>
         <p:nvSpPr>
-          <p:cNvPr id="2" name="Text 0"/>
-          <p:cNvSpPr/>
-          <p:nvPr/>
-        </p:nvSpPr>
-        <p:spPr>
-          <a:xfrm>
-            <a:off x="457200" y="320040"/>
-            <a:ext cx="8229600" cy="457200"/>
-          </a:xfrm>
-          <a:prstGeom prst="rect">
-            <a:avLst/>
-          </a:prstGeom>
-          <a:noFill/>
-          <a:ln/>
-        </p:spPr>
-        <p:txBody>
-          <a:bodyPr wrap="square" lIns="0" tIns="0" rIns="0" bIns="0" rtlCol="0" anchor="ctr"/>
-          <a:lstStyle/>
-          <a:p>
-            <a:pPr indent="0" marL="0">
-              <a:buNone/>
-            </a:pPr>
-            <a:r>
-              <a:rPr lang="en-US" sz="2600" b="1" dirty="0">
-                <a:solidFill>
-                  <a:srgbClr val="1A1A1A"/>
+          <p:cNvPr id="2" name="Shape 0"/>
+          <p:cNvSpPr/>
+          <p:nvPr/>
+        </p:nvSpPr>
+        <p:spPr>
+          <a:xfrm>
+            <a:off x="0" y="0"/>
+            <a:ext cx="9144000" cy="5143500"/>
+          </a:xfrm>
+          <a:prstGeom prst="rect">
+            <a:avLst/>
+          </a:prstGeom>
+          <a:solidFill>
+            <a:srgbClr val="FFFFFF"/>
+          </a:solidFill>
+          <a:ln w="12700">
+            <a:solidFill>
+              <a:srgbClr val="FFFFFF"/>
+            </a:solidFill>
+            <a:prstDash val="solid"/>
+          </a:ln>
+        </p:spPr>
+      </p:sp>
+      <p:sp>
+        <p:nvSpPr>
+          <p:cNvPr id="3" name="Text 1"/>
+          <p:cNvSpPr/>
+          <p:nvPr/>
+        </p:nvSpPr>
+        <p:spPr>
+          <a:xfrm>
+            <a:off x="457200" y="256032"/>
+            <a:ext cx="8229600" cy="365760"/>
+          </a:xfrm>
+          <a:prstGeom prst="rect">
+            <a:avLst/>
+          </a:prstGeom>
+          <a:noFill/>
+          <a:ln/>
+        </p:spPr>
+        <p:txBody>
+          <a:bodyPr wrap="square" lIns="0" tIns="0" rIns="0" bIns="0" rtlCol="0" anchor="ctr"/>
+          <a:lstStyle/>
+          <a:p>
+            <a:pPr indent="0" marL="0">
+              <a:buNone/>
+            </a:pPr>
+            <a:r>
+              <a:rPr lang="en-US" sz="2400" b="1" dirty="0">
+                <a:solidFill>
+                  <a:srgbClr val="1B2A4A"/>
                 </a:solidFill>
                 <a:latin typeface="Arial" pitchFamily="34" charset="0"/>
                 <a:ea typeface="Arial" pitchFamily="34" charset="-122"/>
@@ -2380,58 +2444,65 @@
               </a:rPr>
               <a:t>Three Highest-Leverage Moves</a:t>
             </a:r>
-            <a:endParaRPr lang="en-US" sz="2600" dirty="0"/>
-          </a:p>
-        </p:txBody>
-      </p:sp>
-      <p:sp>
-        <p:nvSpPr>
-          <p:cNvPr id="3" name="Shape 1"/>
-          <p:cNvSpPr/>
-          <p:nvPr/>
-        </p:nvSpPr>
-        <p:spPr>
-          <a:xfrm>
-            <a:off x="457200" y="1051560"/>
-            <a:ext cx="640080" cy="640080"/>
-          </a:xfrm>
-          <a:prstGeom prst="ellipse">
-            <a:avLst/>
+            <a:endParaRPr lang="en-US" sz="2400" dirty="0"/>
+          </a:p>
+        </p:txBody>
+      </p:sp>
+      <p:sp>
+        <p:nvSpPr>
+          <p:cNvPr id="4" name="Shape 2"/>
+          <p:cNvSpPr/>
+          <p:nvPr/>
+        </p:nvSpPr>
+        <p:spPr>
+          <a:xfrm>
+            <a:off x="457200" y="868680"/>
+            <a:ext cx="8229600" cy="960120"/>
+          </a:xfrm>
+          <a:prstGeom prst="roundRect">
+            <a:avLst>
+              <a:gd name="adj" fmla="val 7619"/>
+            </a:avLst>
           </a:prstGeom>
           <a:solidFill>
-            <a:srgbClr val="1A1A1A"/>
+            <a:srgbClr val="1B2A4A"/>
           </a:solidFill>
-          <a:ln/>
-        </p:spPr>
-      </p:sp>
-      <p:sp>
-        <p:nvSpPr>
-          <p:cNvPr id="4" name="Text 2"/>
-          <p:cNvSpPr/>
-          <p:nvPr/>
-        </p:nvSpPr>
-        <p:spPr>
-          <a:xfrm>
-            <a:off x="457200" y="1051560"/>
-            <a:ext cx="640080" cy="640080"/>
-          </a:xfrm>
-          <a:prstGeom prst="rect">
-            <a:avLst/>
-          </a:prstGeom>
-          <a:noFill/>
-          <a:ln/>
-        </p:spPr>
-        <p:txBody>
-          <a:bodyPr wrap="square" lIns="0" tIns="0" rIns="0" bIns="0" rtlCol="0" anchor="ctr"/>
-          <a:lstStyle/>
-          <a:p>
-            <a:pPr algn="ctr" indent="0" marL="0">
+          <a:ln w="12700">
+            <a:solidFill>
+              <a:srgbClr val="1B2A4A"/>
+            </a:solidFill>
+            <a:prstDash val="solid"/>
+          </a:ln>
+        </p:spPr>
+      </p:sp>
+      <p:sp>
+        <p:nvSpPr>
+          <p:cNvPr id="5" name="Text 3"/>
+          <p:cNvSpPr/>
+          <p:nvPr/>
+        </p:nvSpPr>
+        <p:spPr>
+          <a:xfrm>
+            <a:off x="640080" y="1124712"/>
+            <a:ext cx="457200" cy="411480"/>
+          </a:xfrm>
+          <a:prstGeom prst="rect">
+            <a:avLst/>
+          </a:prstGeom>
+          <a:noFill/>
+          <a:ln/>
+        </p:spPr>
+        <p:txBody>
+          <a:bodyPr wrap="square" lIns="0" tIns="0" rIns="0" bIns="0" rtlCol="0" anchor="ctr"/>
+          <a:lstStyle/>
+          <a:p>
+            <a:pPr indent="0" marL="0">
               <a:buNone/>
             </a:pPr>
             <a:r>
               <a:rPr lang="en-US" sz="2200" b="1" dirty="0">
                 <a:solidFill>
-                  <a:srgbClr val="F5F5F5"/>
+                  <a:srgbClr val="C9A227"/>
                 </a:solidFill>
                 <a:latin typeface="Arial" pitchFamily="34" charset="0"/>
                 <a:ea typeface="Arial" pitchFamily="34" charset="-122"/>
@@ -2445,32 +2516,32 @@
       </p:sp>
       <p:sp>
         <p:nvSpPr>
-          <p:cNvPr id="5" name="Text 3"/>
-          <p:cNvSpPr/>
-          <p:nvPr/>
-        </p:nvSpPr>
-        <p:spPr>
-          <a:xfrm>
-            <a:off x="1371600" y="1051560"/>
-            <a:ext cx="7132320" cy="822960"/>
-          </a:xfrm>
-          <a:prstGeom prst="rect">
-            <a:avLst/>
-          </a:prstGeom>
-          <a:noFill/>
-          <a:ln/>
-        </p:spPr>
-        <p:txBody>
-          <a:bodyPr wrap="square" lIns="0" tIns="0" rIns="0" bIns="0" rtlCol="0" anchor="ctr"/>
-          <a:lstStyle/>
-          <a:p>
-            <a:pPr indent="0" marL="0">
-              <a:buNone/>
-            </a:pPr>
-            <a:r>
-              <a:rPr lang="en-US" sz="1500" dirty="0">
-                <a:solidFill>
-                  <a:srgbClr val="1A1A1A"/>
+          <p:cNvPr id="6" name="Text 4"/>
+          <p:cNvSpPr/>
+          <p:nvPr/>
+        </p:nvSpPr>
+        <p:spPr>
+          <a:xfrm>
+            <a:off x="1280160" y="1051560"/>
+            <a:ext cx="7132320" cy="640080"/>
+          </a:xfrm>
+          <a:prstGeom prst="rect">
+            <a:avLst/>
+          </a:prstGeom>
+          <a:noFill/>
+          <a:ln/>
+        </p:spPr>
+        <p:txBody>
+          <a:bodyPr wrap="square" lIns="0" tIns="0" rIns="0" bIns="0" rtlCol="0" anchor="ctr"/>
+          <a:lstStyle/>
+          <a:p>
+            <a:pPr indent="0" marL="0">
+              <a:buNone/>
+            </a:pPr>
+            <a:r>
+              <a:rPr lang="en-US" sz="1400" dirty="0">
+                <a:solidFill>
+                  <a:srgbClr val="FFFFFF"/>
                 </a:solidFill>
                 <a:latin typeface="Arial" pitchFamily="34" charset="0"/>
                 <a:ea typeface="Arial" pitchFamily="34" charset="-122"/>
@@ -2478,58 +2549,65 @@
               </a:rPr>
               <a:t>Map one critical workflow and identify where the current operating model still depends on short-cycle non-sovereign labor or pure cost arbitrage.</a:t>
             </a:r>
-            <a:endParaRPr lang="en-US" sz="1500" dirty="0"/>
-          </a:p>
-        </p:txBody>
-      </p:sp>
-      <p:sp>
-        <p:nvSpPr>
-          <p:cNvPr id="6" name="Shape 4"/>
-          <p:cNvSpPr/>
-          <p:nvPr/>
-        </p:nvSpPr>
-        <p:spPr>
-          <a:xfrm>
-            <a:off x="457200" y="2103120"/>
-            <a:ext cx="640080" cy="640080"/>
-          </a:xfrm>
-          <a:prstGeom prst="ellipse">
-            <a:avLst/>
+            <a:endParaRPr lang="en-US" sz="1400" dirty="0"/>
+          </a:p>
+        </p:txBody>
+      </p:sp>
+      <p:sp>
+        <p:nvSpPr>
+          <p:cNvPr id="7" name="Shape 5"/>
+          <p:cNvSpPr/>
+          <p:nvPr/>
+        </p:nvSpPr>
+        <p:spPr>
+          <a:xfrm>
+            <a:off x="457200" y="1965960"/>
+            <a:ext cx="8229600" cy="960120"/>
+          </a:xfrm>
+          <a:prstGeom prst="roundRect">
+            <a:avLst>
+              <a:gd name="adj" fmla="val 7619"/>
+            </a:avLst>
           </a:prstGeom>
           <a:solidFill>
-            <a:srgbClr val="1A1A1A"/>
+            <a:srgbClr val="1B2A4A"/>
           </a:solidFill>
-          <a:ln/>
-        </p:spPr>
-      </p:sp>
-      <p:sp>
-        <p:nvSpPr>
-          <p:cNvPr id="7" name="Text 5"/>
-          <p:cNvSpPr/>
-          <p:nvPr/>
-        </p:nvSpPr>
-        <p:spPr>
-          <a:xfrm>
-            <a:off x="457200" y="2103120"/>
-            <a:ext cx="640080" cy="640080"/>
-          </a:xfrm>
-          <a:prstGeom prst="rect">
-            <a:avLst/>
-          </a:prstGeom>
-          <a:noFill/>
-          <a:ln/>
-        </p:spPr>
-        <p:txBody>
-          <a:bodyPr wrap="square" lIns="0" tIns="0" rIns="0" bIns="0" rtlCol="0" anchor="ctr"/>
-          <a:lstStyle/>
-          <a:p>
-            <a:pPr algn="ctr" indent="0" marL="0">
+          <a:ln w="12700">
+            <a:solidFill>
+              <a:srgbClr val="1B2A4A"/>
+            </a:solidFill>
+            <a:prstDash val="solid"/>
+          </a:ln>
+        </p:spPr>
+      </p:sp>
+      <p:sp>
+        <p:nvSpPr>
+          <p:cNvPr id="8" name="Text 6"/>
+          <p:cNvSpPr/>
+          <p:nvPr/>
+        </p:nvSpPr>
+        <p:spPr>
+          <a:xfrm>
+            <a:off x="640080" y="2221992"/>
+            <a:ext cx="457200" cy="411480"/>
+          </a:xfrm>
+          <a:prstGeom prst="rect">
+            <a:avLst/>
+          </a:prstGeom>
+          <a:noFill/>
+          <a:ln/>
+        </p:spPr>
+        <p:txBody>
+          <a:bodyPr wrap="square" lIns="0" tIns="0" rIns="0" bIns="0" rtlCol="0" anchor="ctr"/>
+          <a:lstStyle/>
+          <a:p>
+            <a:pPr indent="0" marL="0">
               <a:buNone/>
             </a:pPr>
             <a:r>
               <a:rPr lang="en-US" sz="2200" b="1" dirty="0">
                 <a:solidFill>
-                  <a:srgbClr val="F5F5F5"/>
+                  <a:srgbClr val="C9A227"/>
                 </a:solidFill>
                 <a:latin typeface="Arial" pitchFamily="34" charset="0"/>
                 <a:ea typeface="Arial" pitchFamily="34" charset="-122"/>
@@ -2543,32 +2621,32 @@
       </p:sp>
       <p:sp>
         <p:nvSpPr>
-          <p:cNvPr id="8" name="Text 6"/>
-          <p:cNvSpPr/>
-          <p:nvPr/>
-        </p:nvSpPr>
-        <p:spPr>
-          <a:xfrm>
-            <a:off x="1371600" y="2103120"/>
-            <a:ext cx="7132320" cy="822960"/>
-          </a:xfrm>
-          <a:prstGeom prst="rect">
-            <a:avLst/>
-          </a:prstGeom>
-          <a:noFill/>
-          <a:ln/>
-        </p:spPr>
-        <p:txBody>
-          <a:bodyPr wrap="square" lIns="0" tIns="0" rIns="0" bIns="0" rtlCol="0" anchor="ctr"/>
-          <a:lstStyle/>
-          <a:p>
-            <a:pPr indent="0" marL="0">
-              <a:buNone/>
-            </a:pPr>
-            <a:r>
-              <a:rPr lang="en-US" sz="1500" dirty="0">
-                <a:solidFill>
-                  <a:srgbClr val="1A1A1A"/>
+          <p:cNvPr id="9" name="Text 7"/>
+          <p:cNvSpPr/>
+          <p:nvPr/>
+        </p:nvSpPr>
+        <p:spPr>
+          <a:xfrm>
+            <a:off x="1280160" y="2148840"/>
+            <a:ext cx="7132320" cy="640080"/>
+          </a:xfrm>
+          <a:prstGeom prst="rect">
+            <a:avLst/>
+          </a:prstGeom>
+          <a:noFill/>
+          <a:ln/>
+        </p:spPr>
+        <p:txBody>
+          <a:bodyPr wrap="square" lIns="0" tIns="0" rIns="0" bIns="0" rtlCol="0" anchor="ctr"/>
+          <a:lstStyle/>
+          <a:p>
+            <a:pPr indent="0" marL="0">
+              <a:buNone/>
+            </a:pPr>
+            <a:r>
+              <a:rPr lang="en-US" sz="1400" dirty="0">
+                <a:solidFill>
+                  <a:srgbClr val="FFFFFF"/>
                 </a:solidFill>
                 <a:latin typeface="Arial" pitchFamily="34" charset="0"/>
                 <a:ea typeface="Arial" pitchFamily="34" charset="-122"/>
@@ -2576,58 +2654,65 @@
               </a:rPr>
               <a:t>Redefine success metrics for that workflow so they reward capability growth and domestic productive strength.</a:t>
             </a:r>
-            <a:endParaRPr lang="en-US" sz="1500" dirty="0"/>
-          </a:p>
-        </p:txBody>
-      </p:sp>
-      <p:sp>
-        <p:nvSpPr>
-          <p:cNvPr id="9" name="Shape 7"/>
-          <p:cNvSpPr/>
-          <p:nvPr/>
-        </p:nvSpPr>
-        <p:spPr>
-          <a:xfrm>
-            <a:off x="457200" y="3154680"/>
-            <a:ext cx="640080" cy="640080"/>
-          </a:xfrm>
-          <a:prstGeom prst="ellipse">
-            <a:avLst/>
+            <a:endParaRPr lang="en-US" sz="1400" dirty="0"/>
+          </a:p>
+        </p:txBody>
+      </p:sp>
+      <p:sp>
+        <p:nvSpPr>
+          <p:cNvPr id="10" name="Shape 8"/>
+          <p:cNvSpPr/>
+          <p:nvPr/>
+        </p:nvSpPr>
+        <p:spPr>
+          <a:xfrm>
+            <a:off x="457200" y="3063240"/>
+            <a:ext cx="8229600" cy="960120"/>
+          </a:xfrm>
+          <a:prstGeom prst="roundRect">
+            <a:avLst>
+              <a:gd name="adj" fmla="val 7619"/>
+            </a:avLst>
           </a:prstGeom>
           <a:solidFill>
-            <a:srgbClr val="1A1A1A"/>
+            <a:srgbClr val="1B2A4A"/>
           </a:solidFill>
-          <a:ln/>
-        </p:spPr>
-      </p:sp>
-      <p:sp>
-        <p:nvSpPr>
-          <p:cNvPr id="10" name="Text 8"/>
-          <p:cNvSpPr/>
-          <p:nvPr/>
-        </p:nvSpPr>
-        <p:spPr>
-          <a:xfrm>
-            <a:off x="457200" y="3154680"/>
-            <a:ext cx="640080" cy="640080"/>
-          </a:xfrm>
-          <a:prstGeom prst="rect">
-            <a:avLst/>
-          </a:prstGeom>
-          <a:noFill/>
-          <a:ln/>
-        </p:spPr>
-        <p:txBody>
-          <a:bodyPr wrap="square" lIns="0" tIns="0" rIns="0" bIns="0" rtlCol="0" anchor="ctr"/>
-          <a:lstStyle/>
-          <a:p>
-            <a:pPr algn="ctr" indent="0" marL="0">
+          <a:ln w="12700">
+            <a:solidFill>
+              <a:srgbClr val="1B2A4A"/>
+            </a:solidFill>
+            <a:prstDash val="solid"/>
+          </a:ln>
+        </p:spPr>
+      </p:sp>
+      <p:sp>
+        <p:nvSpPr>
+          <p:cNvPr id="11" name="Text 9"/>
+          <p:cNvSpPr/>
+          <p:nvPr/>
+        </p:nvSpPr>
+        <p:spPr>
+          <a:xfrm>
+            <a:off x="640080" y="3319272"/>
+            <a:ext cx="457200" cy="411480"/>
+          </a:xfrm>
+          <a:prstGeom prst="rect">
+            <a:avLst/>
+          </a:prstGeom>
+          <a:noFill/>
+          <a:ln/>
+        </p:spPr>
+        <p:txBody>
+          <a:bodyPr wrap="square" lIns="0" tIns="0" rIns="0" bIns="0" rtlCol="0" anchor="ctr"/>
+          <a:lstStyle/>
+          <a:p>
+            <a:pPr indent="0" marL="0">
               <a:buNone/>
             </a:pPr>
             <a:r>
               <a:rPr lang="en-US" sz="2200" b="1" dirty="0">
                 <a:solidFill>
-                  <a:srgbClr val="F5F5F5"/>
+                  <a:srgbClr val="C9A227"/>
                 </a:solidFill>
                 <a:latin typeface="Arial" pitchFamily="34" charset="0"/>
                 <a:ea typeface="Arial" pitchFamily="34" charset="-122"/>
@@ -2641,32 +2726,32 @@
       </p:sp>
       <p:sp>
         <p:nvSpPr>
-          <p:cNvPr id="11" name="Text 9"/>
-          <p:cNvSpPr/>
-          <p:nvPr/>
-        </p:nvSpPr>
-        <p:spPr>
-          <a:xfrm>
-            <a:off x="1371600" y="3154680"/>
-            <a:ext cx="7132320" cy="822960"/>
-          </a:xfrm>
-          <a:prstGeom prst="rect">
-            <a:avLst/>
-          </a:prstGeom>
-          <a:noFill/>
-          <a:ln/>
-        </p:spPr>
-        <p:txBody>
-          <a:bodyPr wrap="square" lIns="0" tIns="0" rIns="0" bIns="0" rtlCol="0" anchor="ctr"/>
-          <a:lstStyle/>
-          <a:p>
-            <a:pPr indent="0" marL="0">
-              <a:buNone/>
-            </a:pPr>
-            <a:r>
-              <a:rPr lang="en-US" sz="1500" dirty="0">
-                <a:solidFill>
-                  <a:srgbClr val="1A1A1A"/>
+          <p:cNvPr id="12" name="Text 10"/>
+          <p:cNvSpPr/>
+          <p:nvPr/>
+        </p:nvSpPr>
+        <p:spPr>
+          <a:xfrm>
+            <a:off x="1280160" y="3246120"/>
+            <a:ext cx="7132320" cy="640080"/>
+          </a:xfrm>
+          <a:prstGeom prst="rect">
+            <a:avLst/>
+          </a:prstGeom>
+          <a:noFill/>
+          <a:ln/>
+        </p:spPr>
+        <p:txBody>
+          <a:bodyPr wrap="square" lIns="0" tIns="0" rIns="0" bIns="0" rtlCol="0" anchor="ctr"/>
+          <a:lstStyle/>
+          <a:p>
+            <a:pPr indent="0" marL="0">
+              <a:buNone/>
+            </a:pPr>
+            <a:r>
+              <a:rPr lang="en-US" sz="1400" dirty="0">
+                <a:solidFill>
+                  <a:srgbClr val="FFFFFF"/>
                 </a:solidFill>
                 <a:latin typeface="Arial" pitchFamily="34" charset="0"/>
                 <a:ea typeface="Arial" pitchFamily="34" charset="-122"/>
@@ -2674,38 +2759,38 @@
               </a:rPr>
               <a:t>Align the redesigned operating model with the Business Model Canvas (Module 1) and OKR system (Module 2).</a:t>
             </a:r>
-            <a:endParaRPr lang="en-US" sz="1500" dirty="0"/>
-          </a:p>
-        </p:txBody>
-      </p:sp>
-      <p:sp>
-        <p:nvSpPr>
-          <p:cNvPr id="12" name="Text 10"/>
+            <a:endParaRPr lang="en-US" sz="1400" dirty="0"/>
+          </a:p>
+        </p:txBody>
+      </p:sp>
+      <p:sp>
+        <p:nvSpPr>
+          <p:cNvPr id="13" name="Text 11"/>
           <p:cNvSpPr/>
           <p:nvPr/>
         </p:nvSpPr>
         <p:spPr>
           <a:xfrm>
             <a:off x="457200" y="4800600"/>
-            <a:ext cx="5943600" cy="228600"/>
-          </a:xfrm>
-          <a:prstGeom prst="rect">
-            <a:avLst/>
-          </a:prstGeom>
-          <a:noFill/>
-          <a:ln/>
-        </p:spPr>
-        <p:txBody>
-          <a:bodyPr wrap="square" lIns="0" tIns="0" rIns="0" bIns="0" rtlCol="0" anchor="ctr"/>
-          <a:lstStyle/>
-          <a:p>
-            <a:pPr indent="0" marL="0">
-              <a:buNone/>
-            </a:pPr>
-            <a:r>
-              <a:rPr lang="en-US" sz="1000" dirty="0">
-                <a:solidFill>
-                  <a:srgbClr val="555555"/>
+            <a:ext cx="5943600" cy="256032"/>
+          </a:xfrm>
+          <a:prstGeom prst="rect">
+            <a:avLst/>
+          </a:prstGeom>
+          <a:noFill/>
+          <a:ln/>
+        </p:spPr>
+        <p:txBody>
+          <a:bodyPr wrap="square" lIns="0" tIns="0" rIns="0" bIns="0" rtlCol="0" anchor="ctr"/>
+          <a:lstStyle/>
+          <a:p>
+            <a:pPr indent="0" marL="0">
+              <a:buNone/>
+            </a:pPr>
+            <a:r>
+              <a:rPr lang="en-US" sz="1100" dirty="0">
+                <a:solidFill>
+                  <a:srgbClr val="6A6A6A"/>
                 </a:solidFill>
                 <a:latin typeface="Arial" pitchFamily="34" charset="0"/>
                 <a:ea typeface="Arial" pitchFamily="34" charset="-122"/>
@@ -2713,20 +2798,20 @@
               </a:rPr>
               <a:t>Joshua Konkle  |  Chief of Staff Strategist</a:t>
             </a:r>
-            <a:endParaRPr lang="en-US" sz="1000" dirty="0"/>
-          </a:p>
-        </p:txBody>
-      </p:sp>
-      <p:sp>
-        <p:nvSpPr>
-          <p:cNvPr id="13" name="Text 11"/>
-          <p:cNvSpPr/>
-          <p:nvPr/>
-        </p:nvSpPr>
-        <p:spPr>
-          <a:xfrm>
-            <a:off x="7772400" y="4800600"/>
-            <a:ext cx="914400" cy="228600"/>
+            <a:endParaRPr lang="en-US" sz="1100" dirty="0"/>
+          </a:p>
+        </p:txBody>
+      </p:sp>
+      <p:sp>
+        <p:nvSpPr>
+          <p:cNvPr id="14" name="Text 12"/>
+          <p:cNvSpPr/>
+          <p:nvPr/>
+        </p:nvSpPr>
+        <p:spPr>
+          <a:xfrm>
+            <a:off x="7498080" y="4800600"/>
+            <a:ext cx="1188720" cy="256032"/>
           </a:xfrm>
           <a:prstGeom prst="rect">
             <a:avLst/>
@@ -2742,9 +2827,9 @@
               <a:buNone/>
             </a:pPr>
             <a:r>
-              <a:rPr lang="en-US" sz="1000" dirty="0">
-                <a:solidFill>
-                  <a:srgbClr val="555555"/>
+              <a:rPr lang="en-US" sz="1100" dirty="0">
+                <a:solidFill>
+                  <a:srgbClr val="6A6A6A"/>
                 </a:solidFill>
                 <a:latin typeface="Arial" pitchFamily="34" charset="0"/>
                 <a:ea typeface="Arial" pitchFamily="34" charset="-122"/>
@@ -2752,7 +2837,7 @@
               </a:rPr>
               <a:t>11 / 12</a:t>
             </a:r>
-            <a:endParaRPr lang="en-US" sz="1000" dirty="0"/>
+            <a:endParaRPr lang="en-US" sz="1100" dirty="0"/>
           </a:p>
         </p:txBody>
       </p:sp>
@@ -2767,13 +2852,6 @@
 <file path=ppt/slides/slide12.xml><?xml version="1.0" encoding="utf-8"?>
 <p:sld xmlns:a="http://schemas.openxmlformats.org/drawingml/2006/main" xmlns:r="http://schemas.openxmlformats.org/officeDocument/2006/relationships" xmlns:p="http://schemas.openxmlformats.org/presentationml/2006/main">
   <p:cSld name="Slide 12">
-    <p:bg>
-      <p:bgPr>
-        <a:solidFill>
-          <a:srgbClr val="111111"/>
-        </a:solidFill>
-      </p:bgPr>
-    </p:bg>
     <p:spTree>
       <p:nvGrpSpPr>
         <p:cNvPr id="1" name=""/>
@@ -2790,13 +2868,38 @@
       </p:grpSpPr>
       <p:sp>
         <p:nvSpPr>
-          <p:cNvPr id="2" name="Text 0"/>
-          <p:cNvSpPr/>
-          <p:nvPr/>
-        </p:nvSpPr>
-        <p:spPr>
-          <a:xfrm>
-            <a:off x="548640" y="731520"/>
+          <p:cNvPr id="2" name="Shape 0"/>
+          <p:cNvSpPr/>
+          <p:nvPr/>
+        </p:nvSpPr>
+        <p:spPr>
+          <a:xfrm>
+            <a:off x="0" y="0"/>
+            <a:ext cx="9144000" cy="5143500"/>
+          </a:xfrm>
+          <a:prstGeom prst="rect">
+            <a:avLst/>
+          </a:prstGeom>
+          <a:solidFill>
+            <a:srgbClr val="111111"/>
+          </a:solidFill>
+          <a:ln w="12700">
+            <a:solidFill>
+              <a:srgbClr val="111111"/>
+            </a:solidFill>
+            <a:prstDash val="solid"/>
+          </a:ln>
+        </p:spPr>
+      </p:sp>
+      <p:sp>
+        <p:nvSpPr>
+          <p:cNvPr id="3" name="Text 1"/>
+          <p:cNvSpPr/>
+          <p:nvPr/>
+        </p:nvSpPr>
+        <p:spPr>
+          <a:xfrm>
+            <a:off x="548640" y="822960"/>
             <a:ext cx="8046720" cy="365760"/>
           </a:xfrm>
           <a:prstGeom prst="rect">
@@ -2813,15 +2916,174 @@
               <a:buNone/>
             </a:pPr>
             <a:r>
-              <a:rPr lang="en-US" sz="1600" dirty="0">
-                <a:solidFill>
-                  <a:srgbClr val="AAAAAA"/>
-                </a:solidFill>
-                <a:latin typeface="Arial" pitchFamily="34" charset="0"/>
-                <a:ea typeface="Arial" pitchFamily="34" charset="-122"/>
-                <a:cs typeface="Arial" pitchFamily="34" charset="-120"/>
-              </a:rPr>
-              <a:t>The Series Arc</a:t>
+              <a:rPr lang="en-US" sz="2400" b="1" dirty="0">
+                <a:solidFill>
+                  <a:srgbClr val="FFFFFF"/>
+                </a:solidFill>
+                <a:latin typeface="Arial" pitchFamily="34" charset="0"/>
+                <a:ea typeface="Arial" pitchFamily="34" charset="-122"/>
+                <a:cs typeface="Arial" pitchFamily="34" charset="-120"/>
+              </a:rPr>
+              <a:t>Next Steps</a:t>
+            </a:r>
+            <a:endParaRPr lang="en-US" sz="2400" dirty="0"/>
+          </a:p>
+        </p:txBody>
+      </p:sp>
+      <p:sp>
+        <p:nvSpPr>
+          <p:cNvPr id="4" name="Shape 2"/>
+          <p:cNvSpPr/>
+          <p:nvPr/>
+        </p:nvSpPr>
+        <p:spPr>
+          <a:xfrm>
+            <a:off x="548640" y="1280160"/>
+            <a:ext cx="1371600" cy="54864"/>
+          </a:xfrm>
+          <a:prstGeom prst="rect">
+            <a:avLst/>
+          </a:prstGeom>
+          <a:solidFill>
+            <a:srgbClr val="C9A227"/>
+          </a:solidFill>
+          <a:ln w="12700">
+            <a:solidFill>
+              <a:srgbClr val="C9A227"/>
+            </a:solidFill>
+            <a:prstDash val="solid"/>
+          </a:ln>
+        </p:spPr>
+      </p:sp>
+      <p:sp>
+        <p:nvSpPr>
+          <p:cNvPr id="5" name="Text 3"/>
+          <p:cNvSpPr/>
+          <p:nvPr/>
+        </p:nvSpPr>
+        <p:spPr>
+          <a:xfrm>
+            <a:off x="548640" y="1508760"/>
+            <a:ext cx="8046720" cy="320040"/>
+          </a:xfrm>
+          <a:prstGeom prst="rect">
+            <a:avLst/>
+          </a:prstGeom>
+          <a:noFill/>
+          <a:ln/>
+        </p:spPr>
+        <p:txBody>
+          <a:bodyPr wrap="square" lIns="0" tIns="0" rIns="0" bIns="0" rtlCol="0" anchor="ctr"/>
+          <a:lstStyle/>
+          <a:p>
+            <a:pPr indent="0" marL="0">
+              <a:buNone/>
+            </a:pPr>
+            <a:r>
+              <a:rPr lang="en-US" sz="1300" dirty="0">
+                <a:solidFill>
+                  <a:srgbClr val="C9A227"/>
+                </a:solidFill>
+                <a:latin typeface="Arial" pitchFamily="34" charset="0"/>
+                <a:ea typeface="Arial" pitchFamily="34" charset="-122"/>
+                <a:cs typeface="Arial" pitchFamily="34" charset="-120"/>
+              </a:rPr>
+              <a:t>Canvas  →  OKRs  →  Operating Model  →  Value Streams  →  Workforce Strategy</a:t>
+            </a:r>
+            <a:endParaRPr lang="en-US" sz="1300" dirty="0"/>
+          </a:p>
+        </p:txBody>
+      </p:sp>
+      <p:sp>
+        <p:nvSpPr>
+          <p:cNvPr id="6" name="Text 4"/>
+          <p:cNvSpPr/>
+          <p:nvPr/>
+        </p:nvSpPr>
+        <p:spPr>
+          <a:xfrm>
+            <a:off x="548640" y="2011680"/>
+            <a:ext cx="8046720" cy="822960"/>
+          </a:xfrm>
+          <a:prstGeom prst="rect">
+            <a:avLst/>
+          </a:prstGeom>
+          <a:noFill/>
+          <a:ln/>
+        </p:spPr>
+        <p:txBody>
+          <a:bodyPr wrap="square" lIns="0" tIns="0" rIns="0" bIns="0" rtlCol="0" anchor="ctr"/>
+          <a:lstStyle/>
+          <a:p>
+            <a:pPr indent="0" marL="0">
+              <a:buNone/>
+            </a:pPr>
+            <a:r>
+              <a:rPr lang="en-US" sz="1500" dirty="0">
+                <a:solidFill>
+                  <a:srgbClr val="C8C8C8"/>
+                </a:solidFill>
+                <a:latin typeface="Arial" pitchFamily="34" charset="0"/>
+                <a:ea typeface="Arial" pitchFamily="34" charset="-122"/>
+                <a:cs typeface="Arial" pitchFamily="34" charset="-120"/>
+              </a:rPr>
+              <a:t>If you would like support turning these ideas into a concrete 90-day plan</a:t>
+            </a:r>
+            <a:endParaRPr lang="en-US" sz="1500" dirty="0"/>
+          </a:p>
+          <a:p>
+            <a:pPr indent="0" marL="0">
+              <a:buNone/>
+            </a:pPr>
+            <a:r>
+              <a:rPr lang="en-US" sz="1500" dirty="0">
+                <a:solidFill>
+                  <a:srgbClr val="C8C8C8"/>
+                </a:solidFill>
+                <a:latin typeface="Arial" pitchFamily="34" charset="0"/>
+                <a:ea typeface="Arial" pitchFamily="34" charset="-122"/>
+                <a:cs typeface="Arial" pitchFamily="34" charset="-120"/>
+              </a:rPr>
+              <a:t>or ongoing Chief of Staff-style implementation help, reach out directly.</a:t>
+            </a:r>
+            <a:endParaRPr lang="en-US" sz="1500" dirty="0"/>
+          </a:p>
+        </p:txBody>
+      </p:sp>
+      <p:sp>
+        <p:nvSpPr>
+          <p:cNvPr id="7" name="Text 5"/>
+          <p:cNvSpPr/>
+          <p:nvPr/>
+        </p:nvSpPr>
+        <p:spPr>
+          <a:xfrm>
+            <a:off x="548640" y="3108960"/>
+            <a:ext cx="8046720" cy="320040"/>
+          </a:xfrm>
+          <a:prstGeom prst="rect">
+            <a:avLst/>
+          </a:prstGeom>
+          <a:noFill/>
+          <a:ln/>
+        </p:spPr>
+        <p:txBody>
+          <a:bodyPr wrap="square" lIns="0" tIns="0" rIns="0" bIns="0" rtlCol="0" anchor="ctr"/>
+          <a:lstStyle/>
+          <a:p>
+            <a:pPr indent="0" marL="0">
+              <a:buNone/>
+            </a:pPr>
+            <a:r>
+              <a:rPr lang="en-US" sz="1600" b="1" dirty="0">
+                <a:solidFill>
+                  <a:srgbClr val="FFFFFF"/>
+                </a:solidFill>
+                <a:latin typeface="Arial" pitchFamily="34" charset="0"/>
+                <a:ea typeface="Arial" pitchFamily="34" charset="-122"/>
+                <a:cs typeface="Arial" pitchFamily="34" charset="-120"/>
+              </a:rPr>
+              <a:t>Joshua Konkle</a:t>
             </a:r>
             <a:endParaRPr lang="en-US" sz="1600" dirty="0"/>
           </a:p>
@@ -2829,183 +3091,32 @@
       </p:sp>
       <p:sp>
         <p:nvSpPr>
-          <p:cNvPr id="3" name="Text 1"/>
-          <p:cNvSpPr/>
-          <p:nvPr/>
-        </p:nvSpPr>
-        <p:spPr>
-          <a:xfrm>
-            <a:off x="548640" y="1188720"/>
-            <a:ext cx="8046720" cy="457200"/>
-          </a:xfrm>
-          <a:prstGeom prst="rect">
-            <a:avLst/>
-          </a:prstGeom>
-          <a:noFill/>
-          <a:ln/>
-        </p:spPr>
-        <p:txBody>
-          <a:bodyPr wrap="square" lIns="0" tIns="0" rIns="0" bIns="0" rtlCol="0" anchor="ctr"/>
-          <a:lstStyle/>
-          <a:p>
-            <a:pPr indent="0" marL="0">
-              <a:buNone/>
-            </a:pPr>
-            <a:r>
-              <a:rPr lang="en-US" sz="1500" b="1" dirty="0">
-                <a:solidFill>
-                  <a:srgbClr val="F5F5F5"/>
-                </a:solidFill>
-                <a:latin typeface="Arial" pitchFamily="34" charset="0"/>
-                <a:ea typeface="Arial" pitchFamily="34" charset="-122"/>
-                <a:cs typeface="Arial" pitchFamily="34" charset="-120"/>
-              </a:rPr>
-              <a:t>Canvas  →  OKRs  →  Operating Model  →  Value Streams  →  Workforce Strategy</a:t>
-            </a:r>
-            <a:endParaRPr lang="en-US" sz="1500" dirty="0"/>
-          </a:p>
-        </p:txBody>
-      </p:sp>
-      <p:sp>
-        <p:nvSpPr>
-          <p:cNvPr id="4" name="Text 2"/>
-          <p:cNvSpPr/>
-          <p:nvPr/>
-        </p:nvSpPr>
-        <p:spPr>
-          <a:xfrm>
-            <a:off x="548640" y="2011680"/>
-            <a:ext cx="8046720" cy="365760"/>
-          </a:xfrm>
-          <a:prstGeom prst="rect">
-            <a:avLst/>
-          </a:prstGeom>
-          <a:noFill/>
-          <a:ln/>
-        </p:spPr>
-        <p:txBody>
-          <a:bodyPr wrap="square" lIns="0" tIns="0" rIns="0" bIns="0" rtlCol="0" anchor="ctr"/>
-          <a:lstStyle/>
-          <a:p>
-            <a:pPr indent="0" marL="0">
-              <a:buNone/>
-            </a:pPr>
-            <a:r>
-              <a:rPr lang="en-US" sz="2200" b="1" dirty="0">
-                <a:solidFill>
-                  <a:srgbClr val="F5F5F5"/>
-                </a:solidFill>
-                <a:latin typeface="Arial" pitchFamily="34" charset="0"/>
-                <a:ea typeface="Arial" pitchFamily="34" charset="-122"/>
-                <a:cs typeface="Arial" pitchFamily="34" charset="-120"/>
-              </a:rPr>
-              <a:t>Next Steps</a:t>
-            </a:r>
-            <a:endParaRPr lang="en-US" sz="2200" dirty="0"/>
-          </a:p>
-        </p:txBody>
-      </p:sp>
-      <p:sp>
-        <p:nvSpPr>
-          <p:cNvPr id="5" name="Text 3"/>
-          <p:cNvSpPr/>
-          <p:nvPr/>
-        </p:nvSpPr>
-        <p:spPr>
-          <a:xfrm>
-            <a:off x="548640" y="2468880"/>
-            <a:ext cx="8046720" cy="731520"/>
-          </a:xfrm>
-          <a:prstGeom prst="rect">
-            <a:avLst/>
-          </a:prstGeom>
-          <a:noFill/>
-          <a:ln/>
-        </p:spPr>
-        <p:txBody>
-          <a:bodyPr wrap="square" lIns="0" tIns="0" rIns="0" bIns="0" rtlCol="0" anchor="ctr"/>
-          <a:lstStyle/>
-          <a:p>
-            <a:pPr indent="0" marL="0">
-              <a:buNone/>
-            </a:pPr>
-            <a:r>
-              <a:rPr lang="en-US" sz="1500" dirty="0">
-                <a:solidFill>
-                  <a:srgbClr val="CCCCCC"/>
-                </a:solidFill>
-                <a:latin typeface="Arial" pitchFamily="34" charset="0"/>
-                <a:ea typeface="Arial" pitchFamily="34" charset="-122"/>
-                <a:cs typeface="Arial" pitchFamily="34" charset="-120"/>
-              </a:rPr>
-              <a:t>If you would like support turning these ideas into a concrete 90-day execution plan</a:t>
-            </a:r>
-            <a:endParaRPr lang="en-US" sz="1500" dirty="0"/>
-          </a:p>
-          <a:p>
-            <a:pPr indent="0" marL="0">
-              <a:buNone/>
-            </a:pPr>
-            <a:r>
-              <a:rPr lang="en-US" sz="1500" dirty="0">
-                <a:solidFill>
-                  <a:srgbClr val="CCCCCC"/>
-                </a:solidFill>
-                <a:latin typeface="Arial" pitchFamily="34" charset="0"/>
-                <a:ea typeface="Arial" pitchFamily="34" charset="-122"/>
-                <a:cs typeface="Arial" pitchFamily="34" charset="-120"/>
-              </a:rPr>
-              <a:t>or ongoing Chief of Staff-style implementation help, reach out directly.</a:t>
-            </a:r>
-            <a:endParaRPr lang="en-US" sz="1500" dirty="0"/>
-          </a:p>
-        </p:txBody>
-      </p:sp>
-      <p:sp>
-        <p:nvSpPr>
-          <p:cNvPr id="6" name="Text 4"/>
+          <p:cNvPr id="8" name="Text 6"/>
           <p:cNvSpPr/>
           <p:nvPr/>
         </p:nvSpPr>
         <p:spPr>
           <a:xfrm>
             <a:off x="548640" y="3474720"/>
-            <a:ext cx="8046720" cy="731520"/>
-          </a:xfrm>
-          <a:prstGeom prst="rect">
-            <a:avLst/>
-          </a:prstGeom>
-          <a:noFill/>
-          <a:ln/>
-        </p:spPr>
-        <p:txBody>
-          <a:bodyPr wrap="square" lIns="0" tIns="0" rIns="0" bIns="0" rtlCol="0" anchor="ctr"/>
-          <a:lstStyle/>
-          <a:p>
-            <a:pPr indent="0" marL="0">
-              <a:buNone/>
-            </a:pPr>
-            <a:r>
-              <a:rPr lang="en-US" sz="1500" dirty="0">
-                <a:solidFill>
-                  <a:srgbClr val="F5F5F5"/>
-                </a:solidFill>
-                <a:latin typeface="Arial" pitchFamily="34" charset="0"/>
-                <a:ea typeface="Arial" pitchFamily="34" charset="-122"/>
-                <a:cs typeface="Arial" pitchFamily="34" charset="-120"/>
-              </a:rPr>
-              <a:t>Joshua Konkle</a:t>
-            </a:r>
-            <a:endParaRPr lang="en-US" sz="1500" dirty="0"/>
-          </a:p>
-          <a:p>
-            <a:pPr indent="0" marL="0">
-              <a:buNone/>
-            </a:pPr>
-            <a:r>
-              <a:rPr lang="en-US" sz="1500" dirty="0">
-                <a:solidFill>
-                  <a:srgbClr val="F5F5F5"/>
+            <a:ext cx="8046720" cy="274320"/>
+          </a:xfrm>
+          <a:prstGeom prst="rect">
+            <a:avLst/>
+          </a:prstGeom>
+          <a:noFill/>
+          <a:ln/>
+        </p:spPr>
+        <p:txBody>
+          <a:bodyPr wrap="square" lIns="0" tIns="0" rIns="0" bIns="0" rtlCol="0" anchor="ctr"/>
+          <a:lstStyle/>
+          <a:p>
+            <a:pPr indent="0" marL="0">
+              <a:buNone/>
+            </a:pPr>
+            <a:r>
+              <a:rPr lang="en-US" sz="1300" dirty="0">
+                <a:solidFill>
+                  <a:srgbClr val="C9A227"/>
                 </a:solidFill>
                 <a:latin typeface="Arial" pitchFamily="34" charset="0"/>
                 <a:ea typeface="Arial" pitchFamily="34" charset="-122"/>
@@ -3013,7 +3124,46 @@
               </a:rPr>
               <a:t>@7SwanSwimming  ·  512-423-5448  ·  joshua@digitalknowledge.net</a:t>
             </a:r>
-            <a:endParaRPr lang="en-US" sz="1500" dirty="0"/>
+            <a:endParaRPr lang="en-US" sz="1300" dirty="0"/>
+          </a:p>
+        </p:txBody>
+      </p:sp>
+      <p:sp>
+        <p:nvSpPr>
+          <p:cNvPr id="9" name="Text 7"/>
+          <p:cNvSpPr/>
+          <p:nvPr/>
+        </p:nvSpPr>
+        <p:spPr>
+          <a:xfrm>
+            <a:off x="548640" y="4663440"/>
+            <a:ext cx="8046720" cy="228600"/>
+          </a:xfrm>
+          <a:prstGeom prst="rect">
+            <a:avLst/>
+          </a:prstGeom>
+          <a:noFill/>
+          <a:ln/>
+        </p:spPr>
+        <p:txBody>
+          <a:bodyPr wrap="square" lIns="0" tIns="0" rIns="0" bIns="0" rtlCol="0" anchor="ctr"/>
+          <a:lstStyle/>
+          <a:p>
+            <a:pPr indent="0" marL="0">
+              <a:buNone/>
+            </a:pPr>
+            <a:r>
+              <a:rPr lang="en-US" sz="1100" dirty="0">
+                <a:solidFill>
+                  <a:srgbClr val="707070"/>
+                </a:solidFill>
+                <a:latin typeface="Arial" pitchFamily="34" charset="0"/>
+                <a:ea typeface="Arial" pitchFamily="34" charset="-122"/>
+                <a:cs typeface="Arial" pitchFamily="34" charset="-120"/>
+              </a:rPr>
+              <a:t>Copyright © 2026 Digital Knowledge / Patriots Locked In and In Control.</a:t>
+            </a:r>
+            <a:endParaRPr lang="en-US" sz="1100" dirty="0"/>
           </a:p>
         </p:txBody>
       </p:sp>
@@ -3028,13 +3178,6 @@
 <file path=ppt/slides/slide2.xml><?xml version="1.0" encoding="utf-8"?>
 <p:sld xmlns:a="http://schemas.openxmlformats.org/drawingml/2006/main" xmlns:r="http://schemas.openxmlformats.org/officeDocument/2006/relationships" xmlns:p="http://schemas.openxmlformats.org/presentationml/2006/main">
   <p:cSld name="Slide 2">
-    <p:bg>
-      <p:bgPr>
-        <a:solidFill>
-          <a:srgbClr val="FFFFFF"/>
-        </a:solidFill>
-      </p:bgPr>
-    </p:bg>
     <p:spTree>
       <p:nvGrpSpPr>
         <p:cNvPr id="1" name=""/>
@@ -3051,32 +3194,57 @@
       </p:grpSpPr>
       <p:sp>
         <p:nvSpPr>
-          <p:cNvPr id="2" name="Text 0"/>
-          <p:cNvSpPr/>
-          <p:nvPr/>
-        </p:nvSpPr>
-        <p:spPr>
-          <a:xfrm>
-            <a:off x="457200" y="320040"/>
-            <a:ext cx="8229600" cy="457200"/>
-          </a:xfrm>
-          <a:prstGeom prst="rect">
-            <a:avLst/>
-          </a:prstGeom>
-          <a:noFill/>
-          <a:ln/>
-        </p:spPr>
-        <p:txBody>
-          <a:bodyPr wrap="square" lIns="0" tIns="0" rIns="0" bIns="0" rtlCol="0" anchor="ctr"/>
-          <a:lstStyle/>
-          <a:p>
-            <a:pPr indent="0" marL="0">
-              <a:buNone/>
-            </a:pPr>
-            <a:r>
-              <a:rPr lang="en-US" sz="2800" b="1" dirty="0">
-                <a:solidFill>
-                  <a:srgbClr val="1A1A1A"/>
+          <p:cNvPr id="2" name="Shape 0"/>
+          <p:cNvSpPr/>
+          <p:nvPr/>
+        </p:nvSpPr>
+        <p:spPr>
+          <a:xfrm>
+            <a:off x="0" y="0"/>
+            <a:ext cx="9144000" cy="5143500"/>
+          </a:xfrm>
+          <a:prstGeom prst="rect">
+            <a:avLst/>
+          </a:prstGeom>
+          <a:solidFill>
+            <a:srgbClr val="FFFFFF"/>
+          </a:solidFill>
+          <a:ln w="12700">
+            <a:solidFill>
+              <a:srgbClr val="FFFFFF"/>
+            </a:solidFill>
+            <a:prstDash val="solid"/>
+          </a:ln>
+        </p:spPr>
+      </p:sp>
+      <p:sp>
+        <p:nvSpPr>
+          <p:cNvPr id="3" name="Text 1"/>
+          <p:cNvSpPr/>
+          <p:nvPr/>
+        </p:nvSpPr>
+        <p:spPr>
+          <a:xfrm>
+            <a:off x="457200" y="274320"/>
+            <a:ext cx="8229600" cy="365760"/>
+          </a:xfrm>
+          <a:prstGeom prst="rect">
+            <a:avLst/>
+          </a:prstGeom>
+          <a:noFill/>
+          <a:ln/>
+        </p:spPr>
+        <p:txBody>
+          <a:bodyPr wrap="square" lIns="0" tIns="0" rIns="0" bIns="0" rtlCol="0" anchor="ctr"/>
+          <a:lstStyle/>
+          <a:p>
+            <a:pPr indent="0" marL="0">
+              <a:buNone/>
+            </a:pPr>
+            <a:r>
+              <a:rPr lang="en-US" sz="2400" b="1" dirty="0">
+                <a:solidFill>
+                  <a:srgbClr val="1B2A4A"/>
                 </a:solidFill>
                 <a:latin typeface="Arial" pitchFamily="34" charset="0"/>
                 <a:ea typeface="Arial" pitchFamily="34" charset="-122"/>
@@ -3084,58 +3252,90 @@
               </a:rPr>
               <a:t>What You Will Leave With</a:t>
             </a:r>
-            <a:endParaRPr lang="en-US" sz="2800" dirty="0"/>
-          </a:p>
-        </p:txBody>
-      </p:sp>
-      <p:sp>
-        <p:nvSpPr>
-          <p:cNvPr id="3" name="Shape 1"/>
-          <p:cNvSpPr/>
-          <p:nvPr/>
-        </p:nvSpPr>
-        <p:spPr>
-          <a:xfrm>
-            <a:off x="457200" y="1051560"/>
-            <a:ext cx="73152" cy="548640"/>
-          </a:xfrm>
-          <a:prstGeom prst="rect">
-            <a:avLst/>
+            <a:endParaRPr lang="en-US" sz="2400" dirty="0"/>
+          </a:p>
+        </p:txBody>
+      </p:sp>
+      <p:sp>
+        <p:nvSpPr>
+          <p:cNvPr id="4" name="Shape 2"/>
+          <p:cNvSpPr/>
+          <p:nvPr/>
+        </p:nvSpPr>
+        <p:spPr>
+          <a:xfrm>
+            <a:off x="457200" y="868680"/>
+            <a:ext cx="8229600" cy="685800"/>
+          </a:xfrm>
+          <a:prstGeom prst="roundRect">
+            <a:avLst>
+              <a:gd name="adj" fmla="val 8000"/>
+            </a:avLst>
           </a:prstGeom>
           <a:solidFill>
-            <a:srgbClr val="1A1A1A"/>
+            <a:srgbClr val="F7F5F0"/>
           </a:solidFill>
-          <a:ln/>
-        </p:spPr>
-      </p:sp>
-      <p:sp>
-        <p:nvSpPr>
-          <p:cNvPr id="4" name="Text 2"/>
-          <p:cNvSpPr/>
-          <p:nvPr/>
-        </p:nvSpPr>
-        <p:spPr>
-          <a:xfrm>
-            <a:off x="777240" y="1051560"/>
-            <a:ext cx="7772400" cy="548640"/>
-          </a:xfrm>
-          <a:prstGeom prst="rect">
-            <a:avLst/>
-          </a:prstGeom>
-          <a:noFill/>
-          <a:ln/>
-        </p:spPr>
-        <p:txBody>
-          <a:bodyPr wrap="square" lIns="0" tIns="0" rIns="0" bIns="0" rtlCol="0" anchor="ctr"/>
-          <a:lstStyle/>
-          <a:p>
-            <a:pPr indent="0" marL="0">
-              <a:buNone/>
-            </a:pPr>
-            <a:r>
-              <a:rPr lang="en-US" sz="1600" dirty="0">
-                <a:solidFill>
-                  <a:srgbClr val="1A1A1A"/>
+          <a:ln w="12700">
+            <a:solidFill>
+              <a:srgbClr val="F7F5F0"/>
+            </a:solidFill>
+            <a:prstDash val="solid"/>
+          </a:ln>
+        </p:spPr>
+      </p:sp>
+      <p:sp>
+        <p:nvSpPr>
+          <p:cNvPr id="5" name="Shape 3"/>
+          <p:cNvSpPr/>
+          <p:nvPr/>
+        </p:nvSpPr>
+        <p:spPr>
+          <a:xfrm>
+            <a:off x="457200" y="868680"/>
+            <a:ext cx="73152" cy="685800"/>
+          </a:xfrm>
+          <a:prstGeom prst="rect">
+            <a:avLst/>
+          </a:prstGeom>
+          <a:solidFill>
+            <a:srgbClr val="C9A227"/>
+          </a:solidFill>
+          <a:ln w="12700">
+            <a:solidFill>
+              <a:srgbClr val="C9A227"/>
+            </a:solidFill>
+            <a:prstDash val="solid"/>
+          </a:ln>
+        </p:spPr>
+      </p:sp>
+      <p:sp>
+        <p:nvSpPr>
+          <p:cNvPr id="6" name="Text 4"/>
+          <p:cNvSpPr/>
+          <p:nvPr/>
+        </p:nvSpPr>
+        <p:spPr>
+          <a:xfrm>
+            <a:off x="731520" y="1033272"/>
+            <a:ext cx="7772400" cy="411480"/>
+          </a:xfrm>
+          <a:prstGeom prst="rect">
+            <a:avLst/>
+          </a:prstGeom>
+          <a:noFill/>
+          <a:ln/>
+        </p:spPr>
+        <p:txBody>
+          <a:bodyPr wrap="square" lIns="0" tIns="0" rIns="0" bIns="0" rtlCol="0" anchor="ctr"/>
+          <a:lstStyle/>
+          <a:p>
+            <a:pPr indent="0" marL="0">
+              <a:buNone/>
+            </a:pPr>
+            <a:r>
+              <a:rPr lang="en-US" sz="1400" dirty="0">
+                <a:solidFill>
+                  <a:srgbClr val="2A2A2A"/>
                 </a:solidFill>
                 <a:latin typeface="Arial" pitchFamily="34" charset="0"/>
                 <a:ea typeface="Arial" pitchFamily="34" charset="-122"/>
@@ -3143,58 +3343,90 @@
               </a:rPr>
               <a:t>Clarity on what an operating model actually is and why it matters</a:t>
             </a:r>
-            <a:endParaRPr lang="en-US" sz="1600" dirty="0"/>
-          </a:p>
-        </p:txBody>
-      </p:sp>
-      <p:sp>
-        <p:nvSpPr>
-          <p:cNvPr id="5" name="Shape 3"/>
-          <p:cNvSpPr/>
-          <p:nvPr/>
-        </p:nvSpPr>
-        <p:spPr>
-          <a:xfrm>
-            <a:off x="457200" y="1828800"/>
-            <a:ext cx="73152" cy="548640"/>
-          </a:xfrm>
-          <a:prstGeom prst="rect">
-            <a:avLst/>
+            <a:endParaRPr lang="en-US" sz="1400" dirty="0"/>
+          </a:p>
+        </p:txBody>
+      </p:sp>
+      <p:sp>
+        <p:nvSpPr>
+          <p:cNvPr id="7" name="Shape 5"/>
+          <p:cNvSpPr/>
+          <p:nvPr/>
+        </p:nvSpPr>
+        <p:spPr>
+          <a:xfrm>
+            <a:off x="457200" y="1691640"/>
+            <a:ext cx="8229600" cy="685800"/>
+          </a:xfrm>
+          <a:prstGeom prst="roundRect">
+            <a:avLst>
+              <a:gd name="adj" fmla="val 8000"/>
+            </a:avLst>
           </a:prstGeom>
           <a:solidFill>
-            <a:srgbClr val="1A1A1A"/>
+            <a:srgbClr val="F7F5F0"/>
           </a:solidFill>
-          <a:ln/>
-        </p:spPr>
-      </p:sp>
-      <p:sp>
-        <p:nvSpPr>
-          <p:cNvPr id="6" name="Text 4"/>
-          <p:cNvSpPr/>
-          <p:nvPr/>
-        </p:nvSpPr>
-        <p:spPr>
-          <a:xfrm>
-            <a:off x="777240" y="1828800"/>
-            <a:ext cx="7772400" cy="548640"/>
-          </a:xfrm>
-          <a:prstGeom prst="rect">
-            <a:avLst/>
-          </a:prstGeom>
-          <a:noFill/>
-          <a:ln/>
-        </p:spPr>
-        <p:txBody>
-          <a:bodyPr wrap="square" lIns="0" tIns="0" rIns="0" bIns="0" rtlCol="0" anchor="ctr"/>
-          <a:lstStyle/>
-          <a:p>
-            <a:pPr indent="0" marL="0">
-              <a:buNone/>
-            </a:pPr>
-            <a:r>
-              <a:rPr lang="en-US" sz="1600" dirty="0">
-                <a:solidFill>
-                  <a:srgbClr val="1A1A1A"/>
+          <a:ln w="12700">
+            <a:solidFill>
+              <a:srgbClr val="F7F5F0"/>
+            </a:solidFill>
+            <a:prstDash val="solid"/>
+          </a:ln>
+        </p:spPr>
+      </p:sp>
+      <p:sp>
+        <p:nvSpPr>
+          <p:cNvPr id="8" name="Shape 6"/>
+          <p:cNvSpPr/>
+          <p:nvPr/>
+        </p:nvSpPr>
+        <p:spPr>
+          <a:xfrm>
+            <a:off x="457200" y="1691640"/>
+            <a:ext cx="73152" cy="685800"/>
+          </a:xfrm>
+          <a:prstGeom prst="rect">
+            <a:avLst/>
+          </a:prstGeom>
+          <a:solidFill>
+            <a:srgbClr val="C9A227"/>
+          </a:solidFill>
+          <a:ln w="12700">
+            <a:solidFill>
+              <a:srgbClr val="C9A227"/>
+            </a:solidFill>
+            <a:prstDash val="solid"/>
+          </a:ln>
+        </p:spPr>
+      </p:sp>
+      <p:sp>
+        <p:nvSpPr>
+          <p:cNvPr id="9" name="Text 7"/>
+          <p:cNvSpPr/>
+          <p:nvPr/>
+        </p:nvSpPr>
+        <p:spPr>
+          <a:xfrm>
+            <a:off x="731520" y="1856232"/>
+            <a:ext cx="7772400" cy="411480"/>
+          </a:xfrm>
+          <a:prstGeom prst="rect">
+            <a:avLst/>
+          </a:prstGeom>
+          <a:noFill/>
+          <a:ln/>
+        </p:spPr>
+        <p:txBody>
+          <a:bodyPr wrap="square" lIns="0" tIns="0" rIns="0" bIns="0" rtlCol="0" anchor="ctr"/>
+          <a:lstStyle/>
+          <a:p>
+            <a:pPr indent="0" marL="0">
+              <a:buNone/>
+            </a:pPr>
+            <a:r>
+              <a:rPr lang="en-US" sz="1400" dirty="0">
+                <a:solidFill>
+                  <a:srgbClr val="2A2A2A"/>
                 </a:solidFill>
                 <a:latin typeface="Arial" pitchFamily="34" charset="0"/>
                 <a:ea typeface="Arial" pitchFamily="34" charset="-122"/>
@@ -3202,58 +3434,90 @@
               </a:rPr>
               <a:t>A frame for redesigning work so AI and automation elevate American roles</a:t>
             </a:r>
-            <a:endParaRPr lang="en-US" sz="1600" dirty="0"/>
-          </a:p>
-        </p:txBody>
-      </p:sp>
-      <p:sp>
-        <p:nvSpPr>
-          <p:cNvPr id="7" name="Shape 5"/>
-          <p:cNvSpPr/>
-          <p:nvPr/>
-        </p:nvSpPr>
-        <p:spPr>
-          <a:xfrm>
-            <a:off x="457200" y="2606040"/>
-            <a:ext cx="73152" cy="548640"/>
-          </a:xfrm>
-          <a:prstGeom prst="rect">
-            <a:avLst/>
+            <a:endParaRPr lang="en-US" sz="1400" dirty="0"/>
+          </a:p>
+        </p:txBody>
+      </p:sp>
+      <p:sp>
+        <p:nvSpPr>
+          <p:cNvPr id="10" name="Shape 8"/>
+          <p:cNvSpPr/>
+          <p:nvPr/>
+        </p:nvSpPr>
+        <p:spPr>
+          <a:xfrm>
+            <a:off x="457200" y="2514600"/>
+            <a:ext cx="8229600" cy="685800"/>
+          </a:xfrm>
+          <a:prstGeom prst="roundRect">
+            <a:avLst>
+              <a:gd name="adj" fmla="val 8000"/>
+            </a:avLst>
           </a:prstGeom>
           <a:solidFill>
-            <a:srgbClr val="1A1A1A"/>
+            <a:srgbClr val="F7F5F0"/>
           </a:solidFill>
-          <a:ln/>
-        </p:spPr>
-      </p:sp>
-      <p:sp>
-        <p:nvSpPr>
-          <p:cNvPr id="8" name="Text 6"/>
-          <p:cNvSpPr/>
-          <p:nvPr/>
-        </p:nvSpPr>
-        <p:spPr>
-          <a:xfrm>
-            <a:off x="777240" y="2606040"/>
-            <a:ext cx="7772400" cy="548640"/>
-          </a:xfrm>
-          <a:prstGeom prst="rect">
-            <a:avLst/>
-          </a:prstGeom>
-          <a:noFill/>
-          <a:ln/>
-        </p:spPr>
-        <p:txBody>
-          <a:bodyPr wrap="square" lIns="0" tIns="0" rIns="0" bIns="0" rtlCol="0" anchor="ctr"/>
-          <a:lstStyle/>
-          <a:p>
-            <a:pPr indent="0" marL="0">
-              <a:buNone/>
-            </a:pPr>
-            <a:r>
-              <a:rPr lang="en-US" sz="1600" dirty="0">
-                <a:solidFill>
-                  <a:srgbClr val="1A1A1A"/>
+          <a:ln w="12700">
+            <a:solidFill>
+              <a:srgbClr val="F7F5F0"/>
+            </a:solidFill>
+            <a:prstDash val="solid"/>
+          </a:ln>
+        </p:spPr>
+      </p:sp>
+      <p:sp>
+        <p:nvSpPr>
+          <p:cNvPr id="11" name="Shape 9"/>
+          <p:cNvSpPr/>
+          <p:nvPr/>
+        </p:nvSpPr>
+        <p:spPr>
+          <a:xfrm>
+            <a:off x="457200" y="2514600"/>
+            <a:ext cx="73152" cy="685800"/>
+          </a:xfrm>
+          <a:prstGeom prst="rect">
+            <a:avLst/>
+          </a:prstGeom>
+          <a:solidFill>
+            <a:srgbClr val="C9A227"/>
+          </a:solidFill>
+          <a:ln w="12700">
+            <a:solidFill>
+              <a:srgbClr val="C9A227"/>
+            </a:solidFill>
+            <a:prstDash val="solid"/>
+          </a:ln>
+        </p:spPr>
+      </p:sp>
+      <p:sp>
+        <p:nvSpPr>
+          <p:cNvPr id="12" name="Text 10"/>
+          <p:cNvSpPr/>
+          <p:nvPr/>
+        </p:nvSpPr>
+        <p:spPr>
+          <a:xfrm>
+            <a:off x="731520" y="2679192"/>
+            <a:ext cx="7772400" cy="411480"/>
+          </a:xfrm>
+          <a:prstGeom prst="rect">
+            <a:avLst/>
+          </a:prstGeom>
+          <a:noFill/>
+          <a:ln/>
+        </p:spPr>
+        <p:txBody>
+          <a:bodyPr wrap="square" lIns="0" tIns="0" rIns="0" bIns="0" rtlCol="0" anchor="ctr"/>
+          <a:lstStyle/>
+          <a:p>
+            <a:pPr indent="0" marL="0">
+              <a:buNone/>
+            </a:pPr>
+            <a:r>
+              <a:rPr lang="en-US" sz="1400" dirty="0">
+                <a:solidFill>
+                  <a:srgbClr val="2A2A2A"/>
                 </a:solidFill>
                 <a:latin typeface="Arial" pitchFamily="34" charset="0"/>
                 <a:ea typeface="Arial" pitchFamily="34" charset="-122"/>
@@ -3261,58 +3525,90 @@
               </a:rPr>
               <a:t>Practical principles for capability-building vs. pure cost-out design</a:t>
             </a:r>
-            <a:endParaRPr lang="en-US" sz="1600" dirty="0"/>
-          </a:p>
-        </p:txBody>
-      </p:sp>
-      <p:sp>
-        <p:nvSpPr>
-          <p:cNvPr id="9" name="Shape 7"/>
-          <p:cNvSpPr/>
-          <p:nvPr/>
-        </p:nvSpPr>
-        <p:spPr>
-          <a:xfrm>
-            <a:off x="457200" y="3383280"/>
-            <a:ext cx="73152" cy="548640"/>
-          </a:xfrm>
-          <a:prstGeom prst="rect">
-            <a:avLst/>
+            <a:endParaRPr lang="en-US" sz="1400" dirty="0"/>
+          </a:p>
+        </p:txBody>
+      </p:sp>
+      <p:sp>
+        <p:nvSpPr>
+          <p:cNvPr id="13" name="Shape 11"/>
+          <p:cNvSpPr/>
+          <p:nvPr/>
+        </p:nvSpPr>
+        <p:spPr>
+          <a:xfrm>
+            <a:off x="457200" y="3337560"/>
+            <a:ext cx="8229600" cy="685800"/>
+          </a:xfrm>
+          <a:prstGeom prst="roundRect">
+            <a:avLst>
+              <a:gd name="adj" fmla="val 8000"/>
+            </a:avLst>
           </a:prstGeom>
           <a:solidFill>
-            <a:srgbClr val="1A1A1A"/>
+            <a:srgbClr val="F7F5F0"/>
           </a:solidFill>
-          <a:ln/>
-        </p:spPr>
-      </p:sp>
-      <p:sp>
-        <p:nvSpPr>
-          <p:cNvPr id="10" name="Text 8"/>
-          <p:cNvSpPr/>
-          <p:nvPr/>
-        </p:nvSpPr>
-        <p:spPr>
-          <a:xfrm>
-            <a:off x="777240" y="3383280"/>
-            <a:ext cx="7772400" cy="548640"/>
-          </a:xfrm>
-          <a:prstGeom prst="rect">
-            <a:avLst/>
-          </a:prstGeom>
-          <a:noFill/>
-          <a:ln/>
-        </p:spPr>
-        <p:txBody>
-          <a:bodyPr wrap="square" lIns="0" tIns="0" rIns="0" bIns="0" rtlCol="0" anchor="ctr"/>
-          <a:lstStyle/>
-          <a:p>
-            <a:pPr indent="0" marL="0">
-              <a:buNone/>
-            </a:pPr>
-            <a:r>
-              <a:rPr lang="en-US" sz="1600" dirty="0">
-                <a:solidFill>
-                  <a:srgbClr val="1A1A1A"/>
+          <a:ln w="12700">
+            <a:solidFill>
+              <a:srgbClr val="F7F5F0"/>
+            </a:solidFill>
+            <a:prstDash val="solid"/>
+          </a:ln>
+        </p:spPr>
+      </p:sp>
+      <p:sp>
+        <p:nvSpPr>
+          <p:cNvPr id="14" name="Shape 12"/>
+          <p:cNvSpPr/>
+          <p:nvPr/>
+        </p:nvSpPr>
+        <p:spPr>
+          <a:xfrm>
+            <a:off x="457200" y="3337560"/>
+            <a:ext cx="73152" cy="685800"/>
+          </a:xfrm>
+          <a:prstGeom prst="rect">
+            <a:avLst/>
+          </a:prstGeom>
+          <a:solidFill>
+            <a:srgbClr val="C9A227"/>
+          </a:solidFill>
+          <a:ln w="12700">
+            <a:solidFill>
+              <a:srgbClr val="C9A227"/>
+            </a:solidFill>
+            <a:prstDash val="solid"/>
+          </a:ln>
+        </p:spPr>
+      </p:sp>
+      <p:sp>
+        <p:nvSpPr>
+          <p:cNvPr id="15" name="Text 13"/>
+          <p:cNvSpPr/>
+          <p:nvPr/>
+        </p:nvSpPr>
+        <p:spPr>
+          <a:xfrm>
+            <a:off x="731520" y="3502152"/>
+            <a:ext cx="7772400" cy="411480"/>
+          </a:xfrm>
+          <a:prstGeom prst="rect">
+            <a:avLst/>
+          </a:prstGeom>
+          <a:noFill/>
+          <a:ln/>
+        </p:spPr>
+        <p:txBody>
+          <a:bodyPr wrap="square" lIns="0" tIns="0" rIns="0" bIns="0" rtlCol="0" anchor="ctr"/>
+          <a:lstStyle/>
+          <a:p>
+            <a:pPr indent="0" marL="0">
+              <a:buNone/>
+            </a:pPr>
+            <a:r>
+              <a:rPr lang="en-US" sz="1400" dirty="0">
+                <a:solidFill>
+                  <a:srgbClr val="2A2A2A"/>
                 </a:solidFill>
                 <a:latin typeface="Arial" pitchFamily="34" charset="0"/>
                 <a:ea typeface="Arial" pitchFamily="34" charset="-122"/>
@@ -3320,38 +3616,38 @@
               </a:rPr>
               <a:t>An exercise you can apply to one major workflow this week</a:t>
             </a:r>
-            <a:endParaRPr lang="en-US" sz="1600" dirty="0"/>
-          </a:p>
-        </p:txBody>
-      </p:sp>
-      <p:sp>
-        <p:nvSpPr>
-          <p:cNvPr id="11" name="Text 9"/>
+            <a:endParaRPr lang="en-US" sz="1400" dirty="0"/>
+          </a:p>
+        </p:txBody>
+      </p:sp>
+      <p:sp>
+        <p:nvSpPr>
+          <p:cNvPr id="16" name="Text 14"/>
           <p:cNvSpPr/>
           <p:nvPr/>
         </p:nvSpPr>
         <p:spPr>
           <a:xfrm>
             <a:off x="457200" y="4800600"/>
-            <a:ext cx="5943600" cy="228600"/>
-          </a:xfrm>
-          <a:prstGeom prst="rect">
-            <a:avLst/>
-          </a:prstGeom>
-          <a:noFill/>
-          <a:ln/>
-        </p:spPr>
-        <p:txBody>
-          <a:bodyPr wrap="square" lIns="0" tIns="0" rIns="0" bIns="0" rtlCol="0" anchor="ctr"/>
-          <a:lstStyle/>
-          <a:p>
-            <a:pPr indent="0" marL="0">
-              <a:buNone/>
-            </a:pPr>
-            <a:r>
-              <a:rPr lang="en-US" sz="1000" dirty="0">
-                <a:solidFill>
-                  <a:srgbClr val="555555"/>
+            <a:ext cx="5943600" cy="256032"/>
+          </a:xfrm>
+          <a:prstGeom prst="rect">
+            <a:avLst/>
+          </a:prstGeom>
+          <a:noFill/>
+          <a:ln/>
+        </p:spPr>
+        <p:txBody>
+          <a:bodyPr wrap="square" lIns="0" tIns="0" rIns="0" bIns="0" rtlCol="0" anchor="ctr"/>
+          <a:lstStyle/>
+          <a:p>
+            <a:pPr indent="0" marL="0">
+              <a:buNone/>
+            </a:pPr>
+            <a:r>
+              <a:rPr lang="en-US" sz="1100" dirty="0">
+                <a:solidFill>
+                  <a:srgbClr val="6A6A6A"/>
                 </a:solidFill>
                 <a:latin typeface="Arial" pitchFamily="34" charset="0"/>
                 <a:ea typeface="Arial" pitchFamily="34" charset="-122"/>
@@ -3359,20 +3655,20 @@
               </a:rPr>
               <a:t>Joshua Konkle  |  Chief of Staff Strategist</a:t>
             </a:r>
-            <a:endParaRPr lang="en-US" sz="1000" dirty="0"/>
-          </a:p>
-        </p:txBody>
-      </p:sp>
-      <p:sp>
-        <p:nvSpPr>
-          <p:cNvPr id="12" name="Text 10"/>
-          <p:cNvSpPr/>
-          <p:nvPr/>
-        </p:nvSpPr>
-        <p:spPr>
-          <a:xfrm>
-            <a:off x="7772400" y="4800600"/>
-            <a:ext cx="914400" cy="228600"/>
+            <a:endParaRPr lang="en-US" sz="1100" dirty="0"/>
+          </a:p>
+        </p:txBody>
+      </p:sp>
+      <p:sp>
+        <p:nvSpPr>
+          <p:cNvPr id="17" name="Text 15"/>
+          <p:cNvSpPr/>
+          <p:nvPr/>
+        </p:nvSpPr>
+        <p:spPr>
+          <a:xfrm>
+            <a:off x="7498080" y="4800600"/>
+            <a:ext cx="1188720" cy="256032"/>
           </a:xfrm>
           <a:prstGeom prst="rect">
             <a:avLst/>
@@ -3388,9 +3684,9 @@
               <a:buNone/>
             </a:pPr>
             <a:r>
-              <a:rPr lang="en-US" sz="1000" dirty="0">
-                <a:solidFill>
-                  <a:srgbClr val="555555"/>
+              <a:rPr lang="en-US" sz="1100" dirty="0">
+                <a:solidFill>
+                  <a:srgbClr val="6A6A6A"/>
                 </a:solidFill>
                 <a:latin typeface="Arial" pitchFamily="34" charset="0"/>
                 <a:ea typeface="Arial" pitchFamily="34" charset="-122"/>
@@ -3398,7 +3694,7 @@
               </a:rPr>
               <a:t>2 / 12</a:t>
             </a:r>
-            <a:endParaRPr lang="en-US" sz="1000" dirty="0"/>
+            <a:endParaRPr lang="en-US" sz="1100" dirty="0"/>
           </a:p>
         </p:txBody>
       </p:sp>
@@ -3413,13 +3709,6 @@
 <file path=ppt/slides/slide3.xml><?xml version="1.0" encoding="utf-8"?>
 <p:sld xmlns:a="http://schemas.openxmlformats.org/drawingml/2006/main" xmlns:r="http://schemas.openxmlformats.org/officeDocument/2006/relationships" xmlns:p="http://schemas.openxmlformats.org/presentationml/2006/main">
   <p:cSld name="Slide 3">
-    <p:bg>
-      <p:bgPr>
-        <a:solidFill>
-          <a:srgbClr val="FFFFFF"/>
-        </a:solidFill>
-      </p:bgPr>
-    </p:bg>
     <p:spTree>
       <p:nvGrpSpPr>
         <p:cNvPr id="1" name=""/>
@@ -3436,32 +3725,57 @@
       </p:grpSpPr>
       <p:sp>
         <p:nvSpPr>
-          <p:cNvPr id="2" name="Text 0"/>
-          <p:cNvSpPr/>
-          <p:nvPr/>
-        </p:nvSpPr>
-        <p:spPr>
-          <a:xfrm>
-            <a:off x="457200" y="320040"/>
-            <a:ext cx="8229600" cy="457200"/>
-          </a:xfrm>
-          <a:prstGeom prst="rect">
-            <a:avLst/>
-          </a:prstGeom>
-          <a:noFill/>
-          <a:ln/>
-        </p:spPr>
-        <p:txBody>
-          <a:bodyPr wrap="square" lIns="0" tIns="0" rIns="0" bIns="0" rtlCol="0" anchor="ctr"/>
-          <a:lstStyle/>
-          <a:p>
-            <a:pPr indent="0" marL="0">
-              <a:buNone/>
-            </a:pPr>
-            <a:r>
-              <a:rPr lang="en-US" sz="2600" b="1" dirty="0">
-                <a:solidFill>
-                  <a:srgbClr val="1A1A1A"/>
+          <p:cNvPr id="2" name="Shape 0"/>
+          <p:cNvSpPr/>
+          <p:nvPr/>
+        </p:nvSpPr>
+        <p:spPr>
+          <a:xfrm>
+            <a:off x="0" y="0"/>
+            <a:ext cx="9144000" cy="5143500"/>
+          </a:xfrm>
+          <a:prstGeom prst="rect">
+            <a:avLst/>
+          </a:prstGeom>
+          <a:solidFill>
+            <a:srgbClr val="FFFFFF"/>
+          </a:solidFill>
+          <a:ln w="12700">
+            <a:solidFill>
+              <a:srgbClr val="FFFFFF"/>
+            </a:solidFill>
+            <a:prstDash val="solid"/>
+          </a:ln>
+        </p:spPr>
+      </p:sp>
+      <p:sp>
+        <p:nvSpPr>
+          <p:cNvPr id="3" name="Text 1"/>
+          <p:cNvSpPr/>
+          <p:nvPr/>
+        </p:nvSpPr>
+        <p:spPr>
+          <a:xfrm>
+            <a:off x="457200" y="274320"/>
+            <a:ext cx="8229600" cy="365760"/>
+          </a:xfrm>
+          <a:prstGeom prst="rect">
+            <a:avLst/>
+          </a:prstGeom>
+          <a:noFill/>
+          <a:ln/>
+        </p:spPr>
+        <p:txBody>
+          <a:bodyPr wrap="square" lIns="0" tIns="0" rIns="0" bIns="0" rtlCol="0" anchor="ctr"/>
+          <a:lstStyle/>
+          <a:p>
+            <a:pPr indent="0" marL="0">
+              <a:buNone/>
+            </a:pPr>
+            <a:r>
+              <a:rPr lang="en-US" sz="2400" b="1" dirty="0">
+                <a:solidFill>
+                  <a:srgbClr val="1B2A4A"/>
                 </a:solidFill>
                 <a:latin typeface="Arial" pitchFamily="34" charset="0"/>
                 <a:ea typeface="Arial" pitchFamily="34" charset="-122"/>
@@ -3469,102 +3783,150 @@
               </a:rPr>
               <a:t>Why Operating Models Matter</a:t>
             </a:r>
-            <a:endParaRPr lang="en-US" sz="2600" dirty="0"/>
-          </a:p>
-        </p:txBody>
-      </p:sp>
-      <p:sp>
-        <p:nvSpPr>
-          <p:cNvPr id="3" name="Shape 1"/>
-          <p:cNvSpPr/>
-          <p:nvPr/>
-        </p:nvSpPr>
-        <p:spPr>
-          <a:xfrm>
-            <a:off x="457200" y="1051560"/>
-            <a:ext cx="8229600" cy="1463040"/>
-          </a:xfrm>
-          <a:prstGeom prst="rect">
-            <a:avLst/>
+            <a:endParaRPr lang="en-US" sz="2400" dirty="0"/>
+          </a:p>
+        </p:txBody>
+      </p:sp>
+      <p:sp>
+        <p:nvSpPr>
+          <p:cNvPr id="4" name="Text 2"/>
+          <p:cNvSpPr/>
+          <p:nvPr/>
+        </p:nvSpPr>
+        <p:spPr>
+          <a:xfrm>
+            <a:off x="457200" y="914400"/>
+            <a:ext cx="8229600" cy="640080"/>
+          </a:xfrm>
+          <a:prstGeom prst="rect">
+            <a:avLst/>
+          </a:prstGeom>
+          <a:noFill/>
+          <a:ln/>
+        </p:spPr>
+        <p:txBody>
+          <a:bodyPr wrap="square" lIns="0" tIns="0" rIns="0" bIns="0" rtlCol="0" anchor="ctr"/>
+          <a:lstStyle/>
+          <a:p>
+            <a:pPr indent="0" marL="0">
+              <a:buNone/>
+            </a:pPr>
+            <a:r>
+              <a:rPr lang="en-US" sz="1600" dirty="0">
+                <a:solidFill>
+                  <a:srgbClr val="2A2A2A"/>
+                </a:solidFill>
+                <a:latin typeface="Arial" pitchFamily="34" charset="0"/>
+                <a:ea typeface="Arial" pitchFamily="34" charset="-122"/>
+                <a:cs typeface="Arial" pitchFamily="34" charset="-120"/>
+              </a:rPr>
+              <a:t>An operating model defines how work is designed, how decisions are made, how performance is measured, and how improvement happens.</a:t>
+            </a:r>
+            <a:endParaRPr lang="en-US" sz="1600" dirty="0"/>
+          </a:p>
+        </p:txBody>
+      </p:sp>
+      <p:sp>
+        <p:nvSpPr>
+          <p:cNvPr id="5" name="Text 3"/>
+          <p:cNvSpPr/>
+          <p:nvPr/>
+        </p:nvSpPr>
+        <p:spPr>
+          <a:xfrm>
+            <a:off x="457200" y="1645920"/>
+            <a:ext cx="8229600" cy="365760"/>
+          </a:xfrm>
+          <a:prstGeom prst="rect">
+            <a:avLst/>
+          </a:prstGeom>
+          <a:noFill/>
+          <a:ln/>
+        </p:spPr>
+        <p:txBody>
+          <a:bodyPr wrap="square" lIns="0" tIns="0" rIns="0" bIns="0" rtlCol="0" anchor="ctr"/>
+          <a:lstStyle/>
+          <a:p>
+            <a:pPr indent="0" marL="0">
+              <a:buNone/>
+            </a:pPr>
+            <a:r>
+              <a:rPr lang="en-US" sz="1600" b="1" dirty="0">
+                <a:solidFill>
+                  <a:srgbClr val="1B2A4A"/>
+                </a:solidFill>
+                <a:latin typeface="Arial" pitchFamily="34" charset="0"/>
+                <a:ea typeface="Arial" pitchFamily="34" charset="-122"/>
+                <a:cs typeface="Arial" pitchFamily="34" charset="-120"/>
+              </a:rPr>
+              <a:t>It is the everyday system that either builds or erodes capability.</a:t>
+            </a:r>
+            <a:endParaRPr lang="en-US" sz="1600" dirty="0"/>
+          </a:p>
+        </p:txBody>
+      </p:sp>
+      <p:sp>
+        <p:nvSpPr>
+          <p:cNvPr id="6" name="Shape 4"/>
+          <p:cNvSpPr/>
+          <p:nvPr/>
+        </p:nvSpPr>
+        <p:spPr>
+          <a:xfrm>
+            <a:off x="457200" y="2286000"/>
+            <a:ext cx="8229600" cy="1828800"/>
+          </a:xfrm>
+          <a:prstGeom prst="roundRect">
+            <a:avLst>
+              <a:gd name="adj" fmla="val 4000"/>
+            </a:avLst>
           </a:prstGeom>
           <a:solidFill>
-            <a:srgbClr val="F7F7F7"/>
+            <a:srgbClr val="F7F5F0"/>
           </a:solidFill>
-          <a:ln/>
-        </p:spPr>
-      </p:sp>
-      <p:sp>
-        <p:nvSpPr>
-          <p:cNvPr id="4" name="Text 2"/>
-          <p:cNvSpPr/>
-          <p:nvPr/>
-        </p:nvSpPr>
-        <p:spPr>
-          <a:xfrm>
-            <a:off x="731520" y="1234440"/>
-            <a:ext cx="7680960" cy="1188720"/>
-          </a:xfrm>
-          <a:prstGeom prst="rect">
-            <a:avLst/>
-          </a:prstGeom>
-          <a:noFill/>
-          <a:ln/>
-        </p:spPr>
-        <p:txBody>
-          <a:bodyPr wrap="square" lIns="0" tIns="0" rIns="0" bIns="0" rtlCol="0" anchor="ctr"/>
-          <a:lstStyle/>
-          <a:p>
-            <a:pPr indent="0" marL="0">
-              <a:buNone/>
-            </a:pPr>
-            <a:r>
-              <a:rPr lang="en-US" sz="1600" dirty="0">
-                <a:solidFill>
-                  <a:srgbClr val="1A1A1A"/>
-                </a:solidFill>
-                <a:latin typeface="Arial" pitchFamily="34" charset="0"/>
-                <a:ea typeface="Arial" pitchFamily="34" charset="-122"/>
-                <a:cs typeface="Arial" pitchFamily="34" charset="-120"/>
-              </a:rPr>
-              <a:t>An operating model defines how work is designed, how decisions are made, how performance is measured, and how improvement happens.</a:t>
-            </a:r>
-            <a:endParaRPr lang="en-US" sz="1600" dirty="0"/>
-          </a:p>
-          <a:p>
-            <a:pPr indent="0" marL="0">
-              <a:buNone/>
-            </a:pPr>
-            <a:endParaRPr lang="en-US" sz="1600" dirty="0"/>
-          </a:p>
-          <a:p>
-            <a:pPr indent="0" marL="0">
-              <a:buNone/>
-            </a:pPr>
-            <a:r>
-              <a:rPr lang="en-US" sz="1600" dirty="0">
-                <a:solidFill>
-                  <a:srgbClr val="1A1A1A"/>
-                </a:solidFill>
-                <a:latin typeface="Arial" pitchFamily="34" charset="0"/>
-                <a:ea typeface="Arial" pitchFamily="34" charset="-122"/>
-                <a:cs typeface="Arial" pitchFamily="34" charset="-120"/>
-              </a:rPr>
-              <a:t>It is the everyday system that either builds or erodes capability.</a:t>
-            </a:r>
-            <a:endParaRPr lang="en-US" sz="1600" dirty="0"/>
-          </a:p>
-        </p:txBody>
-      </p:sp>
-      <p:sp>
-        <p:nvSpPr>
-          <p:cNvPr id="5" name="Text 3"/>
-          <p:cNvSpPr/>
-          <p:nvPr/>
-        </p:nvSpPr>
-        <p:spPr>
-          <a:xfrm>
-            <a:off x="457200" y="2834640"/>
-            <a:ext cx="8229600" cy="1097280"/>
+          <a:ln w="12700">
+            <a:solidFill>
+              <a:srgbClr val="F7F5F0"/>
+            </a:solidFill>
+            <a:prstDash val="solid"/>
+          </a:ln>
+        </p:spPr>
+      </p:sp>
+      <p:sp>
+        <p:nvSpPr>
+          <p:cNvPr id="7" name="Shape 5"/>
+          <p:cNvSpPr/>
+          <p:nvPr/>
+        </p:nvSpPr>
+        <p:spPr>
+          <a:xfrm>
+            <a:off x="457200" y="2286000"/>
+            <a:ext cx="91440" cy="1828800"/>
+          </a:xfrm>
+          <a:prstGeom prst="rect">
+            <a:avLst/>
+          </a:prstGeom>
+          <a:solidFill>
+            <a:srgbClr val="C9A227"/>
+          </a:solidFill>
+          <a:ln w="12700">
+            <a:solidFill>
+              <a:srgbClr val="C9A227"/>
+            </a:solidFill>
+            <a:prstDash val="solid"/>
+          </a:ln>
+        </p:spPr>
+      </p:sp>
+      <p:sp>
+        <p:nvSpPr>
+          <p:cNvPr id="8" name="Text 6"/>
+          <p:cNvSpPr/>
+          <p:nvPr/>
+        </p:nvSpPr>
+        <p:spPr>
+          <a:xfrm>
+            <a:off x="777240" y="2560320"/>
+            <a:ext cx="7680960" cy="1371600"/>
           </a:xfrm>
           <a:prstGeom prst="rect">
             <a:avLst/>
@@ -3582,7 +3944,7 @@
             <a:r>
               <a:rPr lang="en-US" sz="1500" dirty="0">
                 <a:solidFill>
-                  <a:srgbClr val="555555"/>
+                  <a:srgbClr val="2A2A2A"/>
                 </a:solidFill>
                 <a:latin typeface="Arial" pitchFamily="34" charset="0"/>
                 <a:ea typeface="Arial" pitchFamily="34" charset="-122"/>
@@ -3596,32 +3958,32 @@
       </p:sp>
       <p:sp>
         <p:nvSpPr>
-          <p:cNvPr id="6" name="Text 4"/>
+          <p:cNvPr id="9" name="Text 7"/>
           <p:cNvSpPr/>
           <p:nvPr/>
         </p:nvSpPr>
         <p:spPr>
           <a:xfrm>
             <a:off x="457200" y="4800600"/>
-            <a:ext cx="5943600" cy="228600"/>
-          </a:xfrm>
-          <a:prstGeom prst="rect">
-            <a:avLst/>
-          </a:prstGeom>
-          <a:noFill/>
-          <a:ln/>
-        </p:spPr>
-        <p:txBody>
-          <a:bodyPr wrap="square" lIns="0" tIns="0" rIns="0" bIns="0" rtlCol="0" anchor="ctr"/>
-          <a:lstStyle/>
-          <a:p>
-            <a:pPr indent="0" marL="0">
-              <a:buNone/>
-            </a:pPr>
-            <a:r>
-              <a:rPr lang="en-US" sz="1000" dirty="0">
-                <a:solidFill>
-                  <a:srgbClr val="555555"/>
+            <a:ext cx="5943600" cy="256032"/>
+          </a:xfrm>
+          <a:prstGeom prst="rect">
+            <a:avLst/>
+          </a:prstGeom>
+          <a:noFill/>
+          <a:ln/>
+        </p:spPr>
+        <p:txBody>
+          <a:bodyPr wrap="square" lIns="0" tIns="0" rIns="0" bIns="0" rtlCol="0" anchor="ctr"/>
+          <a:lstStyle/>
+          <a:p>
+            <a:pPr indent="0" marL="0">
+              <a:buNone/>
+            </a:pPr>
+            <a:r>
+              <a:rPr lang="en-US" sz="1100" dirty="0">
+                <a:solidFill>
+                  <a:srgbClr val="6A6A6A"/>
                 </a:solidFill>
                 <a:latin typeface="Arial" pitchFamily="34" charset="0"/>
                 <a:ea typeface="Arial" pitchFamily="34" charset="-122"/>
@@ -3629,20 +3991,20 @@
               </a:rPr>
               <a:t>Joshua Konkle  |  Chief of Staff Strategist</a:t>
             </a:r>
-            <a:endParaRPr lang="en-US" sz="1000" dirty="0"/>
-          </a:p>
-        </p:txBody>
-      </p:sp>
-      <p:sp>
-        <p:nvSpPr>
-          <p:cNvPr id="7" name="Text 5"/>
-          <p:cNvSpPr/>
-          <p:nvPr/>
-        </p:nvSpPr>
-        <p:spPr>
-          <a:xfrm>
-            <a:off x="7772400" y="4800600"/>
-            <a:ext cx="914400" cy="228600"/>
+            <a:endParaRPr lang="en-US" sz="1100" dirty="0"/>
+          </a:p>
+        </p:txBody>
+      </p:sp>
+      <p:sp>
+        <p:nvSpPr>
+          <p:cNvPr id="10" name="Text 8"/>
+          <p:cNvSpPr/>
+          <p:nvPr/>
+        </p:nvSpPr>
+        <p:spPr>
+          <a:xfrm>
+            <a:off x="7498080" y="4800600"/>
+            <a:ext cx="1188720" cy="256032"/>
           </a:xfrm>
           <a:prstGeom prst="rect">
             <a:avLst/>
@@ -3658,9 +4020,9 @@
               <a:buNone/>
             </a:pPr>
             <a:r>
-              <a:rPr lang="en-US" sz="1000" dirty="0">
-                <a:solidFill>
-                  <a:srgbClr val="555555"/>
+              <a:rPr lang="en-US" sz="1100" dirty="0">
+                <a:solidFill>
+                  <a:srgbClr val="6A6A6A"/>
                 </a:solidFill>
                 <a:latin typeface="Arial" pitchFamily="34" charset="0"/>
                 <a:ea typeface="Arial" pitchFamily="34" charset="-122"/>
@@ -3668,7 +4030,7 @@
               </a:rPr>
               <a:t>3 / 12</a:t>
             </a:r>
-            <a:endParaRPr lang="en-US" sz="1000" dirty="0"/>
+            <a:endParaRPr lang="en-US" sz="1100" dirty="0"/>
           </a:p>
         </p:txBody>
       </p:sp>
@@ -3683,13 +4045,6 @@
 <file path=ppt/slides/slide4.xml><?xml version="1.0" encoding="utf-8"?>
 <p:sld xmlns:a="http://schemas.openxmlformats.org/drawingml/2006/main" xmlns:r="http://schemas.openxmlformats.org/officeDocument/2006/relationships" xmlns:p="http://schemas.openxmlformats.org/presentationml/2006/main">
   <p:cSld name="Slide 4">
-    <p:bg>
-      <p:bgPr>
-        <a:solidFill>
-          <a:srgbClr val="FFFFFF"/>
-        </a:solidFill>
-      </p:bgPr>
-    </p:bg>
     <p:spTree>
       <p:nvGrpSpPr>
         <p:cNvPr id="1" name=""/>
@@ -3706,32 +4061,57 @@
       </p:grpSpPr>
       <p:sp>
         <p:nvSpPr>
-          <p:cNvPr id="2" name="Text 0"/>
-          <p:cNvSpPr/>
-          <p:nvPr/>
-        </p:nvSpPr>
-        <p:spPr>
-          <a:xfrm>
-            <a:off x="457200" y="274320"/>
-            <a:ext cx="8229600" cy="411480"/>
-          </a:xfrm>
-          <a:prstGeom prst="rect">
-            <a:avLst/>
-          </a:prstGeom>
-          <a:noFill/>
-          <a:ln/>
-        </p:spPr>
-        <p:txBody>
-          <a:bodyPr wrap="square" lIns="0" tIns="0" rIns="0" bIns="0" rtlCol="0" anchor="ctr"/>
-          <a:lstStyle/>
-          <a:p>
-            <a:pPr indent="0" marL="0">
-              <a:buNone/>
-            </a:pPr>
-            <a:r>
-              <a:rPr lang="en-US" sz="2600" b="1" dirty="0">
-                <a:solidFill>
-                  <a:srgbClr val="1A1A1A"/>
+          <p:cNvPr id="2" name="Shape 0"/>
+          <p:cNvSpPr/>
+          <p:nvPr/>
+        </p:nvSpPr>
+        <p:spPr>
+          <a:xfrm>
+            <a:off x="0" y="0"/>
+            <a:ext cx="9144000" cy="5143500"/>
+          </a:xfrm>
+          <a:prstGeom prst="rect">
+            <a:avLst/>
+          </a:prstGeom>
+          <a:solidFill>
+            <a:srgbClr val="FFFFFF"/>
+          </a:solidFill>
+          <a:ln w="12700">
+            <a:solidFill>
+              <a:srgbClr val="FFFFFF"/>
+            </a:solidFill>
+            <a:prstDash val="solid"/>
+          </a:ln>
+        </p:spPr>
+      </p:sp>
+      <p:sp>
+        <p:nvSpPr>
+          <p:cNvPr id="3" name="Text 1"/>
+          <p:cNvSpPr/>
+          <p:nvPr/>
+        </p:nvSpPr>
+        <p:spPr>
+          <a:xfrm>
+            <a:off x="457200" y="201168"/>
+            <a:ext cx="8229600" cy="320040"/>
+          </a:xfrm>
+          <a:prstGeom prst="rect">
+            <a:avLst/>
+          </a:prstGeom>
+          <a:noFill/>
+          <a:ln/>
+        </p:spPr>
+        <p:txBody>
+          <a:bodyPr wrap="square" lIns="0" tIns="0" rIns="0" bIns="0" rtlCol="0" anchor="ctr"/>
+          <a:lstStyle/>
+          <a:p>
+            <a:pPr indent="0" marL="0">
+              <a:buNone/>
+            </a:pPr>
+            <a:r>
+              <a:rPr lang="en-US" sz="2200" b="1" dirty="0">
+                <a:solidFill>
+                  <a:srgbClr val="1B2A4A"/>
                 </a:solidFill>
                 <a:latin typeface="Arial" pitchFamily="34" charset="0"/>
                 <a:ea typeface="Arial" pitchFamily="34" charset="-122"/>
@@ -3739,19 +4119,19 @@
               </a:rPr>
               <a:t>The Productive Pragmatism Frame</a:t>
             </a:r>
-            <a:endParaRPr lang="en-US" sz="2600" dirty="0"/>
-          </a:p>
-        </p:txBody>
-      </p:sp>
-      <p:sp>
-        <p:nvSpPr>
-          <p:cNvPr id="3" name="Text 1"/>
-          <p:cNvSpPr/>
-          <p:nvPr/>
-        </p:nvSpPr>
-        <p:spPr>
-          <a:xfrm>
-            <a:off x="457200" y="777240"/>
+            <a:endParaRPr lang="en-US" sz="2200" dirty="0"/>
+          </a:p>
+        </p:txBody>
+      </p:sp>
+      <p:sp>
+        <p:nvSpPr>
+          <p:cNvPr id="4" name="Text 2"/>
+          <p:cNvSpPr/>
+          <p:nvPr/>
+        </p:nvSpPr>
+        <p:spPr>
+          <a:xfrm>
+            <a:off x="457200" y="530352"/>
             <a:ext cx="8229600" cy="320040"/>
           </a:xfrm>
           <a:prstGeom prst="rect">
@@ -3768,9 +4148,9 @@
               <a:buNone/>
             </a:pPr>
             <a:r>
-              <a:rPr lang="en-US" sz="1400" dirty="0">
-                <a:solidFill>
-                  <a:srgbClr val="555555"/>
+              <a:rPr lang="en-US" sz="1300" dirty="0">
+                <a:solidFill>
+                  <a:srgbClr val="5A5A5A"/>
                 </a:solidFill>
                 <a:latin typeface="Arial" pitchFamily="34" charset="0"/>
                 <a:ea typeface="Arial" pitchFamily="34" charset="-122"/>
@@ -3778,20 +4158,20 @@
               </a:rPr>
               <a:t>The operating model is the system that either advances or undermines these principles every day</a:t>
             </a:r>
-            <a:endParaRPr lang="en-US" sz="1400" dirty="0"/>
-          </a:p>
-        </p:txBody>
-      </p:sp>
-      <p:sp>
-        <p:nvSpPr>
-          <p:cNvPr id="4" name="Text 2"/>
-          <p:cNvSpPr/>
-          <p:nvPr/>
-        </p:nvSpPr>
-        <p:spPr>
-          <a:xfrm>
-            <a:off x="457200" y="1280160"/>
-            <a:ext cx="640080" cy="594360"/>
+            <a:endParaRPr lang="en-US" sz="1300" dirty="0"/>
+          </a:p>
+        </p:txBody>
+      </p:sp>
+      <p:sp>
+        <p:nvSpPr>
+          <p:cNvPr id="5" name="Text 3"/>
+          <p:cNvSpPr/>
+          <p:nvPr/>
+        </p:nvSpPr>
+        <p:spPr>
+          <a:xfrm>
+            <a:off x="457200" y="1078992"/>
+            <a:ext cx="640080" cy="365760"/>
           </a:xfrm>
           <a:prstGeom prst="rect">
             <a:avLst/>
@@ -3809,7 +4189,7 @@
             <a:r>
               <a:rPr lang="en-US" sz="1800" b="1" dirty="0">
                 <a:solidFill>
-                  <a:srgbClr val="555555"/>
+                  <a:srgbClr val="C9A227"/>
                 </a:solidFill>
                 <a:latin typeface="Arial" pitchFamily="34" charset="0"/>
                 <a:ea typeface="Arial" pitchFamily="34" charset="-122"/>
@@ -3823,14 +4203,14 @@
       </p:sp>
       <p:sp>
         <p:nvSpPr>
-          <p:cNvPr id="5" name="Text 3"/>
-          <p:cNvSpPr/>
-          <p:nvPr/>
-        </p:nvSpPr>
-        <p:spPr>
-          <a:xfrm>
-            <a:off x="1280160" y="1280160"/>
-            <a:ext cx="7132320" cy="274320"/>
+          <p:cNvPr id="6" name="Text 4"/>
+          <p:cNvSpPr/>
+          <p:nvPr/>
+        </p:nvSpPr>
+        <p:spPr>
+          <a:xfrm>
+            <a:off x="1234440" y="1005840"/>
+            <a:ext cx="7132320" cy="256032"/>
           </a:xfrm>
           <a:prstGeom prst="rect">
             <a:avLst/>
@@ -3848,7 +4228,7 @@
             <a:r>
               <a:rPr lang="en-US" sz="1500" b="1" dirty="0">
                 <a:solidFill>
-                  <a:srgbClr val="1A1A1A"/>
+                  <a:srgbClr val="1B2A4A"/>
                 </a:solidFill>
                 <a:latin typeface="Arial" pitchFamily="34" charset="0"/>
                 <a:ea typeface="Arial" pitchFamily="34" charset="-122"/>
@@ -3862,14 +4242,14 @@
       </p:sp>
       <p:sp>
         <p:nvSpPr>
-          <p:cNvPr id="6" name="Text 4"/>
-          <p:cNvSpPr/>
-          <p:nvPr/>
-        </p:nvSpPr>
-        <p:spPr>
-          <a:xfrm>
-            <a:off x="1280160" y="1554480"/>
-            <a:ext cx="7132320" cy="274320"/>
+          <p:cNvPr id="7" name="Text 5"/>
+          <p:cNvSpPr/>
+          <p:nvPr/>
+        </p:nvSpPr>
+        <p:spPr>
+          <a:xfrm>
+            <a:off x="1234440" y="1280160"/>
+            <a:ext cx="7132320" cy="320040"/>
           </a:xfrm>
           <a:prstGeom prst="rect">
             <a:avLst/>
@@ -3887,7 +4267,7 @@
             <a:r>
               <a:rPr lang="en-US" sz="1300" dirty="0">
                 <a:solidFill>
-                  <a:srgbClr val="555555"/>
+                  <a:srgbClr val="2A2A2A"/>
                 </a:solidFill>
                 <a:latin typeface="Arial" pitchFamily="34" charset="0"/>
                 <a:ea typeface="Arial" pitchFamily="34" charset="-122"/>
@@ -3901,14 +4281,14 @@
       </p:sp>
       <p:sp>
         <p:nvSpPr>
-          <p:cNvPr id="7" name="Text 5"/>
-          <p:cNvSpPr/>
-          <p:nvPr/>
-        </p:nvSpPr>
-        <p:spPr>
-          <a:xfrm>
-            <a:off x="457200" y="2057400"/>
-            <a:ext cx="640080" cy="594360"/>
+          <p:cNvPr id="8" name="Text 6"/>
+          <p:cNvSpPr/>
+          <p:nvPr/>
+        </p:nvSpPr>
+        <p:spPr>
+          <a:xfrm>
+            <a:off x="457200" y="1901952"/>
+            <a:ext cx="640080" cy="365760"/>
           </a:xfrm>
           <a:prstGeom prst="rect">
             <a:avLst/>
@@ -3926,7 +4306,7 @@
             <a:r>
               <a:rPr lang="en-US" sz="1800" b="1" dirty="0">
                 <a:solidFill>
-                  <a:srgbClr val="555555"/>
+                  <a:srgbClr val="C9A227"/>
                 </a:solidFill>
                 <a:latin typeface="Arial" pitchFamily="34" charset="0"/>
                 <a:ea typeface="Arial" pitchFamily="34" charset="-122"/>
@@ -3940,14 +4320,14 @@
       </p:sp>
       <p:sp>
         <p:nvSpPr>
-          <p:cNvPr id="8" name="Text 6"/>
-          <p:cNvSpPr/>
-          <p:nvPr/>
-        </p:nvSpPr>
-        <p:spPr>
-          <a:xfrm>
-            <a:off x="1280160" y="2057400"/>
-            <a:ext cx="7132320" cy="274320"/>
+          <p:cNvPr id="9" name="Text 7"/>
+          <p:cNvSpPr/>
+          <p:nvPr/>
+        </p:nvSpPr>
+        <p:spPr>
+          <a:xfrm>
+            <a:off x="1234440" y="1828800"/>
+            <a:ext cx="7132320" cy="256032"/>
           </a:xfrm>
           <a:prstGeom prst="rect">
             <a:avLst/>
@@ -3965,7 +4345,7 @@
             <a:r>
               <a:rPr lang="en-US" sz="1500" b="1" dirty="0">
                 <a:solidFill>
-                  <a:srgbClr val="1A1A1A"/>
+                  <a:srgbClr val="1B2A4A"/>
                 </a:solidFill>
                 <a:latin typeface="Arial" pitchFamily="34" charset="0"/>
                 <a:ea typeface="Arial" pitchFamily="34" charset="-122"/>
@@ -3979,14 +4359,14 @@
       </p:sp>
       <p:sp>
         <p:nvSpPr>
-          <p:cNvPr id="9" name="Text 7"/>
-          <p:cNvSpPr/>
-          <p:nvPr/>
-        </p:nvSpPr>
-        <p:spPr>
-          <a:xfrm>
-            <a:off x="1280160" y="2331720"/>
-            <a:ext cx="7132320" cy="274320"/>
+          <p:cNvPr id="10" name="Text 8"/>
+          <p:cNvSpPr/>
+          <p:nvPr/>
+        </p:nvSpPr>
+        <p:spPr>
+          <a:xfrm>
+            <a:off x="1234440" y="2103120"/>
+            <a:ext cx="7132320" cy="320040"/>
           </a:xfrm>
           <a:prstGeom prst="rect">
             <a:avLst/>
@@ -4004,7 +4384,7 @@
             <a:r>
               <a:rPr lang="en-US" sz="1300" dirty="0">
                 <a:solidFill>
-                  <a:srgbClr val="555555"/>
+                  <a:srgbClr val="2A2A2A"/>
                 </a:solidFill>
                 <a:latin typeface="Arial" pitchFamily="34" charset="0"/>
                 <a:ea typeface="Arial" pitchFamily="34" charset="-122"/>
@@ -4018,14 +4398,14 @@
       </p:sp>
       <p:sp>
         <p:nvSpPr>
-          <p:cNvPr id="10" name="Text 8"/>
-          <p:cNvSpPr/>
-          <p:nvPr/>
-        </p:nvSpPr>
-        <p:spPr>
-          <a:xfrm>
-            <a:off x="457200" y="2834640"/>
-            <a:ext cx="640080" cy="594360"/>
+          <p:cNvPr id="11" name="Text 9"/>
+          <p:cNvSpPr/>
+          <p:nvPr/>
+        </p:nvSpPr>
+        <p:spPr>
+          <a:xfrm>
+            <a:off x="457200" y="2724912"/>
+            <a:ext cx="640080" cy="365760"/>
           </a:xfrm>
           <a:prstGeom prst="rect">
             <a:avLst/>
@@ -4043,7 +4423,7 @@
             <a:r>
               <a:rPr lang="en-US" sz="1800" b="1" dirty="0">
                 <a:solidFill>
-                  <a:srgbClr val="555555"/>
+                  <a:srgbClr val="C9A227"/>
                 </a:solidFill>
                 <a:latin typeface="Arial" pitchFamily="34" charset="0"/>
                 <a:ea typeface="Arial" pitchFamily="34" charset="-122"/>
@@ -4057,14 +4437,14 @@
       </p:sp>
       <p:sp>
         <p:nvSpPr>
-          <p:cNvPr id="11" name="Text 9"/>
-          <p:cNvSpPr/>
-          <p:nvPr/>
-        </p:nvSpPr>
-        <p:spPr>
-          <a:xfrm>
-            <a:off x="1280160" y="2834640"/>
-            <a:ext cx="7132320" cy="274320"/>
+          <p:cNvPr id="12" name="Text 10"/>
+          <p:cNvSpPr/>
+          <p:nvPr/>
+        </p:nvSpPr>
+        <p:spPr>
+          <a:xfrm>
+            <a:off x="1234440" y="2651760"/>
+            <a:ext cx="7132320" cy="256032"/>
           </a:xfrm>
           <a:prstGeom prst="rect">
             <a:avLst/>
@@ -4082,7 +4462,7 @@
             <a:r>
               <a:rPr lang="en-US" sz="1500" b="1" dirty="0">
                 <a:solidFill>
-                  <a:srgbClr val="1A1A1A"/>
+                  <a:srgbClr val="1B2A4A"/>
                 </a:solidFill>
                 <a:latin typeface="Arial" pitchFamily="34" charset="0"/>
                 <a:ea typeface="Arial" pitchFamily="34" charset="-122"/>
@@ -4096,14 +4476,14 @@
       </p:sp>
       <p:sp>
         <p:nvSpPr>
-          <p:cNvPr id="12" name="Text 10"/>
-          <p:cNvSpPr/>
-          <p:nvPr/>
-        </p:nvSpPr>
-        <p:spPr>
-          <a:xfrm>
-            <a:off x="1280160" y="3108960"/>
-            <a:ext cx="7132320" cy="274320"/>
+          <p:cNvPr id="13" name="Text 11"/>
+          <p:cNvSpPr/>
+          <p:nvPr/>
+        </p:nvSpPr>
+        <p:spPr>
+          <a:xfrm>
+            <a:off x="1234440" y="2926080"/>
+            <a:ext cx="7132320" cy="320040"/>
           </a:xfrm>
           <a:prstGeom prst="rect">
             <a:avLst/>
@@ -4121,13 +4501,13 @@
             <a:r>
               <a:rPr lang="en-US" sz="1300" dirty="0">
                 <a:solidFill>
-                  <a:srgbClr val="555555"/>
-                </a:solidFill>
-                <a:latin typeface="Arial" pitchFamily="34" charset="0"/>
-                <a:ea typeface="Arial" pitchFamily="34" charset="-122"/>
-                <a:cs typeface="Arial" pitchFamily="34" charset="-120"/>
-              </a:rPr>
-              <a:t>Capital and technology flow toward domestic capacity, not temporary labor extraction</a:t>
+                  <a:srgbClr val="2A2A2A"/>
+                </a:solidFill>
+                <a:latin typeface="Arial" pitchFamily="34" charset="0"/>
+                <a:ea typeface="Arial" pitchFamily="34" charset="-122"/>
+                <a:cs typeface="Arial" pitchFamily="34" charset="-120"/>
+              </a:rPr>
+              <a:t>Capital and effort flow toward domestic capacity, not temporary labor extraction</a:t>
             </a:r>
             <a:endParaRPr lang="en-US" sz="1300" dirty="0"/>
           </a:p>
@@ -4135,14 +4515,14 @@
       </p:sp>
       <p:sp>
         <p:nvSpPr>
-          <p:cNvPr id="13" name="Text 11"/>
-          <p:cNvSpPr/>
-          <p:nvPr/>
-        </p:nvSpPr>
-        <p:spPr>
-          <a:xfrm>
-            <a:off x="457200" y="3611880"/>
-            <a:ext cx="640080" cy="594360"/>
+          <p:cNvPr id="14" name="Text 12"/>
+          <p:cNvSpPr/>
+          <p:nvPr/>
+        </p:nvSpPr>
+        <p:spPr>
+          <a:xfrm>
+            <a:off x="457200" y="3547872"/>
+            <a:ext cx="640080" cy="365760"/>
           </a:xfrm>
           <a:prstGeom prst="rect">
             <a:avLst/>
@@ -4160,7 +4540,7 @@
             <a:r>
               <a:rPr lang="en-US" sz="1800" b="1" dirty="0">
                 <a:solidFill>
-                  <a:srgbClr val="555555"/>
+                  <a:srgbClr val="C9A227"/>
                 </a:solidFill>
                 <a:latin typeface="Arial" pitchFamily="34" charset="0"/>
                 <a:ea typeface="Arial" pitchFamily="34" charset="-122"/>
@@ -4174,14 +4554,14 @@
       </p:sp>
       <p:sp>
         <p:nvSpPr>
-          <p:cNvPr id="14" name="Text 12"/>
-          <p:cNvSpPr/>
-          <p:nvPr/>
-        </p:nvSpPr>
-        <p:spPr>
-          <a:xfrm>
-            <a:off x="1280160" y="3611880"/>
-            <a:ext cx="7132320" cy="274320"/>
+          <p:cNvPr id="15" name="Text 13"/>
+          <p:cNvSpPr/>
+          <p:nvPr/>
+        </p:nvSpPr>
+        <p:spPr>
+          <a:xfrm>
+            <a:off x="1234440" y="3474720"/>
+            <a:ext cx="7132320" cy="256032"/>
           </a:xfrm>
           <a:prstGeom prst="rect">
             <a:avLst/>
@@ -4199,7 +4579,7 @@
             <a:r>
               <a:rPr lang="en-US" sz="1500" b="1" dirty="0">
                 <a:solidFill>
-                  <a:srgbClr val="1A1A1A"/>
+                  <a:srgbClr val="1B2A4A"/>
                 </a:solidFill>
                 <a:latin typeface="Arial" pitchFamily="34" charset="0"/>
                 <a:ea typeface="Arial" pitchFamily="34" charset="-122"/>
@@ -4213,14 +4593,14 @@
       </p:sp>
       <p:sp>
         <p:nvSpPr>
-          <p:cNvPr id="15" name="Text 13"/>
-          <p:cNvSpPr/>
-          <p:nvPr/>
-        </p:nvSpPr>
-        <p:spPr>
-          <a:xfrm>
-            <a:off x="1280160" y="3886200"/>
-            <a:ext cx="7132320" cy="274320"/>
+          <p:cNvPr id="16" name="Text 14"/>
+          <p:cNvSpPr/>
+          <p:nvPr/>
+        </p:nvSpPr>
+        <p:spPr>
+          <a:xfrm>
+            <a:off x="1234440" y="3749040"/>
+            <a:ext cx="7132320" cy="320040"/>
           </a:xfrm>
           <a:prstGeom prst="rect">
             <a:avLst/>
@@ -4238,7 +4618,7 @@
             <a:r>
               <a:rPr lang="en-US" sz="1300" dirty="0">
                 <a:solidFill>
-                  <a:srgbClr val="555555"/>
+                  <a:srgbClr val="2A2A2A"/>
                 </a:solidFill>
                 <a:latin typeface="Arial" pitchFamily="34" charset="0"/>
                 <a:ea typeface="Arial" pitchFamily="34" charset="-122"/>
@@ -4252,32 +4632,32 @@
       </p:sp>
       <p:sp>
         <p:nvSpPr>
-          <p:cNvPr id="16" name="Text 14"/>
+          <p:cNvPr id="17" name="Text 15"/>
           <p:cNvSpPr/>
           <p:nvPr/>
         </p:nvSpPr>
         <p:spPr>
           <a:xfrm>
             <a:off x="457200" y="4800600"/>
-            <a:ext cx="5943600" cy="228600"/>
-          </a:xfrm>
-          <a:prstGeom prst="rect">
-            <a:avLst/>
-          </a:prstGeom>
-          <a:noFill/>
-          <a:ln/>
-        </p:spPr>
-        <p:txBody>
-          <a:bodyPr wrap="square" lIns="0" tIns="0" rIns="0" bIns="0" rtlCol="0" anchor="ctr"/>
-          <a:lstStyle/>
-          <a:p>
-            <a:pPr indent="0" marL="0">
-              <a:buNone/>
-            </a:pPr>
-            <a:r>
-              <a:rPr lang="en-US" sz="1000" dirty="0">
-                <a:solidFill>
-                  <a:srgbClr val="555555"/>
+            <a:ext cx="5943600" cy="256032"/>
+          </a:xfrm>
+          <a:prstGeom prst="rect">
+            <a:avLst/>
+          </a:prstGeom>
+          <a:noFill/>
+          <a:ln/>
+        </p:spPr>
+        <p:txBody>
+          <a:bodyPr wrap="square" lIns="0" tIns="0" rIns="0" bIns="0" rtlCol="0" anchor="ctr"/>
+          <a:lstStyle/>
+          <a:p>
+            <a:pPr indent="0" marL="0">
+              <a:buNone/>
+            </a:pPr>
+            <a:r>
+              <a:rPr lang="en-US" sz="1100" dirty="0">
+                <a:solidFill>
+                  <a:srgbClr val="6A6A6A"/>
                 </a:solidFill>
                 <a:latin typeface="Arial" pitchFamily="34" charset="0"/>
                 <a:ea typeface="Arial" pitchFamily="34" charset="-122"/>
@@ -4285,20 +4665,20 @@
               </a:rPr>
               <a:t>Joshua Konkle  |  Chief of Staff Strategist</a:t>
             </a:r>
-            <a:endParaRPr lang="en-US" sz="1000" dirty="0"/>
-          </a:p>
-        </p:txBody>
-      </p:sp>
-      <p:sp>
-        <p:nvSpPr>
-          <p:cNvPr id="17" name="Text 15"/>
-          <p:cNvSpPr/>
-          <p:nvPr/>
-        </p:nvSpPr>
-        <p:spPr>
-          <a:xfrm>
-            <a:off x="7772400" y="4800600"/>
-            <a:ext cx="914400" cy="228600"/>
+            <a:endParaRPr lang="en-US" sz="1100" dirty="0"/>
+          </a:p>
+        </p:txBody>
+      </p:sp>
+      <p:sp>
+        <p:nvSpPr>
+          <p:cNvPr id="18" name="Text 16"/>
+          <p:cNvSpPr/>
+          <p:nvPr/>
+        </p:nvSpPr>
+        <p:spPr>
+          <a:xfrm>
+            <a:off x="7498080" y="4800600"/>
+            <a:ext cx="1188720" cy="256032"/>
           </a:xfrm>
           <a:prstGeom prst="rect">
             <a:avLst/>
@@ -4314,9 +4694,9 @@
               <a:buNone/>
             </a:pPr>
             <a:r>
-              <a:rPr lang="en-US" sz="1000" dirty="0">
-                <a:solidFill>
-                  <a:srgbClr val="555555"/>
+              <a:rPr lang="en-US" sz="1100" dirty="0">
+                <a:solidFill>
+                  <a:srgbClr val="6A6A6A"/>
                 </a:solidFill>
                 <a:latin typeface="Arial" pitchFamily="34" charset="0"/>
                 <a:ea typeface="Arial" pitchFamily="34" charset="-122"/>
@@ -4324,7 +4704,7 @@
               </a:rPr>
               <a:t>4 / 12</a:t>
             </a:r>
-            <a:endParaRPr lang="en-US" sz="1000" dirty="0"/>
+            <a:endParaRPr lang="en-US" sz="1100" dirty="0"/>
           </a:p>
         </p:txBody>
       </p:sp>
@@ -4339,13 +4719,6 @@
 <file path=ppt/slides/slide5.xml><?xml version="1.0" encoding="utf-8"?>
 <p:sld xmlns:a="http://schemas.openxmlformats.org/drawingml/2006/main" xmlns:r="http://schemas.openxmlformats.org/officeDocument/2006/relationships" xmlns:p="http://schemas.openxmlformats.org/presentationml/2006/main">
   <p:cSld name="Slide 5">
-    <p:bg>
-      <p:bgPr>
-        <a:solidFill>
-          <a:srgbClr val="FFFFFF"/>
-        </a:solidFill>
-      </p:bgPr>
-    </p:bg>
     <p:spTree>
       <p:nvGrpSpPr>
         <p:cNvPr id="1" name=""/>
@@ -4362,13 +4735,182 @@
       </p:grpSpPr>
       <p:sp>
         <p:nvSpPr>
-          <p:cNvPr id="2" name="Text 0"/>
-          <p:cNvSpPr/>
-          <p:nvPr/>
-        </p:nvSpPr>
-        <p:spPr>
-          <a:xfrm>
-            <a:off x="457200" y="274320"/>
+          <p:cNvPr id="2" name="Shape 0"/>
+          <p:cNvSpPr/>
+          <p:nvPr/>
+        </p:nvSpPr>
+        <p:spPr>
+          <a:xfrm>
+            <a:off x="0" y="0"/>
+            <a:ext cx="9144000" cy="5143500"/>
+          </a:xfrm>
+          <a:prstGeom prst="rect">
+            <a:avLst/>
+          </a:prstGeom>
+          <a:solidFill>
+            <a:srgbClr val="FFFFFF"/>
+          </a:solidFill>
+          <a:ln w="12700">
+            <a:solidFill>
+              <a:srgbClr val="FFFFFF"/>
+            </a:solidFill>
+            <a:prstDash val="solid"/>
+          </a:ln>
+        </p:spPr>
+      </p:sp>
+      <p:sp>
+        <p:nvSpPr>
+          <p:cNvPr id="3" name="Text 1"/>
+          <p:cNvSpPr/>
+          <p:nvPr/>
+        </p:nvSpPr>
+        <p:spPr>
+          <a:xfrm>
+            <a:off x="457200" y="228600"/>
+            <a:ext cx="8229600" cy="320040"/>
+          </a:xfrm>
+          <a:prstGeom prst="rect">
+            <a:avLst/>
+          </a:prstGeom>
+          <a:noFill/>
+          <a:ln/>
+        </p:spPr>
+        <p:txBody>
+          <a:bodyPr wrap="square" lIns="0" tIns="0" rIns="0" bIns="0" rtlCol="0" anchor="ctr"/>
+          <a:lstStyle/>
+          <a:p>
+            <a:pPr indent="0" marL="0">
+              <a:buNone/>
+            </a:pPr>
+            <a:r>
+              <a:rPr lang="en-US" sz="2000" b="1" dirty="0">
+                <a:solidFill>
+                  <a:srgbClr val="1B2A4A"/>
+                </a:solidFill>
+                <a:latin typeface="Arial" pitchFamily="34" charset="0"/>
+                <a:ea typeface="Arial" pitchFamily="34" charset="-122"/>
+                <a:cs typeface="Arial" pitchFamily="34" charset="-120"/>
+              </a:rPr>
+              <a:t>Workforce Reality for Operating Design</a:t>
+            </a:r>
+            <a:endParaRPr lang="en-US" sz="2000" dirty="0"/>
+          </a:p>
+        </p:txBody>
+      </p:sp>
+      <p:sp>
+        <p:nvSpPr>
+          <p:cNvPr id="4" name="Shape 2"/>
+          <p:cNvSpPr/>
+          <p:nvPr/>
+        </p:nvSpPr>
+        <p:spPr>
+          <a:xfrm>
+            <a:off x="457200" y="685800"/>
+            <a:ext cx="8229600" cy="1005840"/>
+          </a:xfrm>
+          <a:prstGeom prst="roundRect">
+            <a:avLst>
+              <a:gd name="adj" fmla="val 5455"/>
+            </a:avLst>
+          </a:prstGeom>
+          <a:solidFill>
+            <a:srgbClr val="1B2A4A"/>
+          </a:solidFill>
+          <a:ln w="12700">
+            <a:solidFill>
+              <a:srgbClr val="1B2A4A"/>
+            </a:solidFill>
+            <a:prstDash val="solid"/>
+          </a:ln>
+        </p:spPr>
+      </p:sp>
+      <p:sp>
+        <p:nvSpPr>
+          <p:cNvPr id="5" name="Text 3"/>
+          <p:cNvSpPr/>
+          <p:nvPr/>
+        </p:nvSpPr>
+        <p:spPr>
+          <a:xfrm>
+            <a:off x="640080" y="822960"/>
+            <a:ext cx="7863840" cy="777240"/>
+          </a:xfrm>
+          <a:prstGeom prst="rect">
+            <a:avLst/>
+          </a:prstGeom>
+          <a:noFill/>
+          <a:ln/>
+        </p:spPr>
+        <p:txBody>
+          <a:bodyPr wrap="square" lIns="0" tIns="0" rIns="0" bIns="0" rtlCol="0" anchor="ctr"/>
+          <a:lstStyle/>
+          <a:p>
+            <a:pPr indent="0" marL="0">
+              <a:buNone/>
+            </a:pPr>
+            <a:r>
+              <a:rPr lang="en-US" sz="1400" dirty="0">
+                <a:solidFill>
+                  <a:srgbClr val="FFFFFF"/>
+                </a:solidFill>
+                <a:latin typeface="Arial" pitchFamily="34" charset="0"/>
+                <a:ea typeface="Arial" pitchFamily="34" charset="-122"/>
+                <a:cs typeface="Arial" pitchFamily="34" charset="-120"/>
+              </a:rPr>
+              <a:t>Heavy reliance on temporary or short-cycle non-sovereign labor for core roles embeds fragility into the operating model itself: knowledge walks out the door, continuous improvement stalls, and innovation capacity erodes.</a:t>
+            </a:r>
+            <a:endParaRPr lang="en-US" sz="1400" dirty="0"/>
+          </a:p>
+        </p:txBody>
+      </p:sp>
+      <p:sp>
+        <p:nvSpPr>
+          <p:cNvPr id="6" name="Text 4"/>
+          <p:cNvSpPr/>
+          <p:nvPr/>
+        </p:nvSpPr>
+        <p:spPr>
+          <a:xfrm>
+            <a:off x="457200" y="1920240"/>
+            <a:ext cx="8229600" cy="274320"/>
+          </a:xfrm>
+          <a:prstGeom prst="rect">
+            <a:avLst/>
+          </a:prstGeom>
+          <a:noFill/>
+          <a:ln/>
+        </p:spPr>
+        <p:txBody>
+          <a:bodyPr wrap="square" lIns="0" tIns="0" rIns="0" bIns="0" rtlCol="0" anchor="ctr"/>
+          <a:lstStyle/>
+          <a:p>
+            <a:pPr indent="0" marL="0">
+              <a:buNone/>
+            </a:pPr>
+            <a:r>
+              <a:rPr lang="en-US" sz="1400" b="1" dirty="0">
+                <a:solidFill>
+                  <a:srgbClr val="C9A227"/>
+                </a:solidFill>
+                <a:latin typeface="Arial" pitchFamily="34" charset="0"/>
+                <a:ea typeface="Arial" pitchFamily="34" charset="-122"/>
+                <a:cs typeface="Arial" pitchFamily="34" charset="-120"/>
+              </a:rPr>
+              <a:t>Diagnostic Questions</a:t>
+            </a:r>
+            <a:endParaRPr lang="en-US" sz="1400" dirty="0"/>
+          </a:p>
+        </p:txBody>
+      </p:sp>
+      <p:sp>
+        <p:nvSpPr>
+          <p:cNvPr id="7" name="Text 5"/>
+          <p:cNvSpPr/>
+          <p:nvPr/>
+        </p:nvSpPr>
+        <p:spPr>
+          <a:xfrm>
+            <a:off x="457200" y="2286000"/>
             <a:ext cx="8229600" cy="411480"/>
           </a:xfrm>
           <a:prstGeom prst="rect">
@@ -4385,54 +4927,15 @@
               <a:buNone/>
             </a:pPr>
             <a:r>
-              <a:rPr lang="en-US" sz="2400" b="1" dirty="0">
-                <a:solidFill>
-                  <a:srgbClr val="1A1A1A"/>
-                </a:solidFill>
-                <a:latin typeface="Arial" pitchFamily="34" charset="0"/>
-                <a:ea typeface="Arial" pitchFamily="34" charset="-122"/>
-                <a:cs typeface="Arial" pitchFamily="34" charset="-120"/>
-              </a:rPr>
-              <a:t>Workforce Reality for Operating Design</a:t>
-            </a:r>
-            <a:endParaRPr lang="en-US" sz="2400" dirty="0"/>
-          </a:p>
-        </p:txBody>
-      </p:sp>
-      <p:sp>
-        <p:nvSpPr>
-          <p:cNvPr id="3" name="Text 1"/>
-          <p:cNvSpPr/>
-          <p:nvPr/>
-        </p:nvSpPr>
-        <p:spPr>
-          <a:xfrm>
-            <a:off x="457200" y="822960"/>
-            <a:ext cx="8229600" cy="640080"/>
-          </a:xfrm>
-          <a:prstGeom prst="rect">
-            <a:avLst/>
-          </a:prstGeom>
-          <a:noFill/>
-          <a:ln/>
-        </p:spPr>
-        <p:txBody>
-          <a:bodyPr wrap="square" lIns="0" tIns="0" rIns="0" bIns="0" rtlCol="0" anchor="ctr"/>
-          <a:lstStyle/>
-          <a:p>
-            <a:pPr indent="0" marL="0">
-              <a:buNone/>
-            </a:pPr>
-            <a:r>
               <a:rPr lang="en-US" sz="1400" dirty="0">
                 <a:solidFill>
-                  <a:srgbClr val="555555"/>
-                </a:solidFill>
-                <a:latin typeface="Arial" pitchFamily="34" charset="0"/>
-                <a:ea typeface="Arial" pitchFamily="34" charset="-122"/>
-                <a:cs typeface="Arial" pitchFamily="34" charset="-120"/>
-              </a:rPr>
-              <a:t>Heavy reliance on temporary or short-cycle non-sovereign labor for core roles embeds fragility into the operating model itself: knowledge walks out the door, continuous improvement stalls, and innovation capacity erodes.</a:t>
+                  <a:srgbClr val="2A2A2A"/>
+                </a:solidFill>
+                <a:latin typeface="Arial" pitchFamily="34" charset="0"/>
+                <a:ea typeface="Arial" pitchFamily="34" charset="-122"/>
+                <a:cs typeface="Arial" pitchFamily="34" charset="-120"/>
+              </a:rPr>
+              <a:t>1.  Which roles and workflows are truly critical to productive capacity over the next 3–5 years?</a:t>
             </a:r>
             <a:endParaRPr lang="en-US" sz="1400" dirty="0"/>
           </a:p>
@@ -4440,53 +4943,14 @@
       </p:sp>
       <p:sp>
         <p:nvSpPr>
-          <p:cNvPr id="4" name="Text 2"/>
-          <p:cNvSpPr/>
-          <p:nvPr/>
-        </p:nvSpPr>
-        <p:spPr>
-          <a:xfrm>
-            <a:off x="457200" y="1645920"/>
-            <a:ext cx="8229600" cy="320040"/>
-          </a:xfrm>
-          <a:prstGeom prst="rect">
-            <a:avLst/>
-          </a:prstGeom>
-          <a:noFill/>
-          <a:ln/>
-        </p:spPr>
-        <p:txBody>
-          <a:bodyPr wrap="square" lIns="0" tIns="0" rIns="0" bIns="0" rtlCol="0" anchor="ctr"/>
-          <a:lstStyle/>
-          <a:p>
-            <a:pPr indent="0" marL="0">
-              <a:buNone/>
-            </a:pPr>
-            <a:r>
-              <a:rPr lang="en-US" sz="1600" b="1" dirty="0">
-                <a:solidFill>
-                  <a:srgbClr val="1A1A1A"/>
-                </a:solidFill>
-                <a:latin typeface="Arial" pitchFamily="34" charset="0"/>
-                <a:ea typeface="Arial" pitchFamily="34" charset="-122"/>
-                <a:cs typeface="Arial" pitchFamily="34" charset="-120"/>
-              </a:rPr>
-              <a:t>Diagnostic Questions</a:t>
-            </a:r>
-            <a:endParaRPr lang="en-US" sz="1600" dirty="0"/>
-          </a:p>
-        </p:txBody>
-      </p:sp>
-      <p:sp>
-        <p:nvSpPr>
-          <p:cNvPr id="5" name="Text 3"/>
-          <p:cNvSpPr/>
-          <p:nvPr/>
-        </p:nvSpPr>
-        <p:spPr>
-          <a:xfrm>
-            <a:off x="457200" y="2103120"/>
-            <a:ext cx="8229600" cy="457200"/>
+          <p:cNvPr id="8" name="Text 6"/>
+          <p:cNvSpPr/>
+          <p:nvPr/>
+        </p:nvSpPr>
+        <p:spPr>
+          <a:xfrm>
+            <a:off x="457200" y="2743200"/>
+            <a:ext cx="8229600" cy="411480"/>
           </a:xfrm>
           <a:prstGeom prst="rect">
             <a:avLst/>
@@ -4504,13 +4968,13 @@
             <a:r>
               <a:rPr lang="en-US" sz="1400" dirty="0">
                 <a:solidFill>
-                  <a:srgbClr val="1A1A1A"/>
-                </a:solidFill>
-                <a:latin typeface="Arial" pitchFamily="34" charset="0"/>
-                <a:ea typeface="Arial" pitchFamily="34" charset="-122"/>
-                <a:cs typeface="Arial" pitchFamily="34" charset="-120"/>
-              </a:rPr>
-              <a:t>1.  Which roles and workflows are truly critical to productive capacity over the next 3–5 years?</a:t>
+                  <a:srgbClr val="2A2A2A"/>
+                </a:solidFill>
+                <a:latin typeface="Arial" pitchFamily="34" charset="0"/>
+                <a:ea typeface="Arial" pitchFamily="34" charset="-122"/>
+                <a:cs typeface="Arial" pitchFamily="34" charset="-120"/>
+              </a:rPr>
+              <a:t>2.  Does our current operating model depend on short-cycle non-sovereign labor for those workflows?</a:t>
             </a:r>
             <a:endParaRPr lang="en-US" sz="1400" dirty="0"/>
           </a:p>
@@ -4518,14 +4982,14 @@
       </p:sp>
       <p:sp>
         <p:nvSpPr>
-          <p:cNvPr id="6" name="Text 4"/>
-          <p:cNvSpPr/>
-          <p:nvPr/>
-        </p:nvSpPr>
-        <p:spPr>
-          <a:xfrm>
-            <a:off x="457200" y="2606040"/>
-            <a:ext cx="8229600" cy="457200"/>
+          <p:cNvPr id="9" name="Text 7"/>
+          <p:cNvSpPr/>
+          <p:nvPr/>
+        </p:nvSpPr>
+        <p:spPr>
+          <a:xfrm>
+            <a:off x="457200" y="3200400"/>
+            <a:ext cx="8229600" cy="411480"/>
           </a:xfrm>
           <a:prstGeom prst="rect">
             <a:avLst/>
@@ -4543,13 +5007,13 @@
             <a:r>
               <a:rPr lang="en-US" sz="1400" dirty="0">
                 <a:solidFill>
-                  <a:srgbClr val="1A1A1A"/>
-                </a:solidFill>
-                <a:latin typeface="Arial" pitchFamily="34" charset="0"/>
-                <a:ea typeface="Arial" pitchFamily="34" charset="-122"/>
-                <a:cs typeface="Arial" pitchFamily="34" charset="-120"/>
-              </a:rPr>
-              <a:t>2.  Does our current operating model depend on short-cycle non-sovereign labor for those workflows?</a:t>
+                  <a:srgbClr val="2A2A2A"/>
+                </a:solidFill>
+                <a:latin typeface="Arial" pitchFamily="34" charset="0"/>
+                <a:ea typeface="Arial" pitchFamily="34" charset="-122"/>
+                <a:cs typeface="Arial" pitchFamily="34" charset="-120"/>
+              </a:rPr>
+              <a:t>3.  Are we designing work so that American talent can grow into higher-skill roles?</a:t>
             </a:r>
             <a:endParaRPr lang="en-US" sz="1400" dirty="0"/>
           </a:p>
@@ -4557,14 +5021,14 @@
       </p:sp>
       <p:sp>
         <p:nvSpPr>
-          <p:cNvPr id="7" name="Text 5"/>
-          <p:cNvSpPr/>
-          <p:nvPr/>
-        </p:nvSpPr>
-        <p:spPr>
-          <a:xfrm>
-            <a:off x="457200" y="3108960"/>
-            <a:ext cx="8229600" cy="457200"/>
+          <p:cNvPr id="10" name="Text 8"/>
+          <p:cNvSpPr/>
+          <p:nvPr/>
+        </p:nvSpPr>
+        <p:spPr>
+          <a:xfrm>
+            <a:off x="457200" y="3657600"/>
+            <a:ext cx="8229600" cy="411480"/>
           </a:xfrm>
           <a:prstGeom prst="rect">
             <a:avLst/>
@@ -4582,13 +5046,13 @@
             <a:r>
               <a:rPr lang="en-US" sz="1400" dirty="0">
                 <a:solidFill>
-                  <a:srgbClr val="1A1A1A"/>
-                </a:solidFill>
-                <a:latin typeface="Arial" pitchFamily="34" charset="0"/>
-                <a:ea typeface="Arial" pitchFamily="34" charset="-122"/>
-                <a:cs typeface="Arial" pitchFamily="34" charset="-120"/>
-              </a:rPr>
-              <a:t>3.  Are we designing work so that American talent can grow into higher-skill roles?</a:t>
+                  <a:srgbClr val="2A2A2A"/>
+                </a:solidFill>
+                <a:latin typeface="Arial" pitchFamily="34" charset="0"/>
+                <a:ea typeface="Arial" pitchFamily="34" charset="-122"/>
+                <a:cs typeface="Arial" pitchFamily="34" charset="-120"/>
+              </a:rPr>
+              <a:t>4.  Or are we designing work that assumes continuous low-skill churn?</a:t>
             </a:r>
             <a:endParaRPr lang="en-US" sz="1400" dirty="0"/>
           </a:p>
@@ -4596,71 +5060,32 @@
       </p:sp>
       <p:sp>
         <p:nvSpPr>
-          <p:cNvPr id="8" name="Text 6"/>
-          <p:cNvSpPr/>
-          <p:nvPr/>
-        </p:nvSpPr>
-        <p:spPr>
-          <a:xfrm>
-            <a:off x="457200" y="3611880"/>
-            <a:ext cx="8229600" cy="457200"/>
-          </a:xfrm>
-          <a:prstGeom prst="rect">
-            <a:avLst/>
-          </a:prstGeom>
-          <a:noFill/>
-          <a:ln/>
-        </p:spPr>
-        <p:txBody>
-          <a:bodyPr wrap="square" lIns="0" tIns="0" rIns="0" bIns="0" rtlCol="0" anchor="ctr"/>
-          <a:lstStyle/>
-          <a:p>
-            <a:pPr indent="0" marL="0">
-              <a:buNone/>
-            </a:pPr>
-            <a:r>
-              <a:rPr lang="en-US" sz="1400" dirty="0">
-                <a:solidFill>
-                  <a:srgbClr val="1A1A1A"/>
-                </a:solidFill>
-                <a:latin typeface="Arial" pitchFamily="34" charset="0"/>
-                <a:ea typeface="Arial" pitchFamily="34" charset="-122"/>
-                <a:cs typeface="Arial" pitchFamily="34" charset="-120"/>
-              </a:rPr>
-              <a:t>4.  Or are we designing work that assumes continuous low-skill churn?</a:t>
-            </a:r>
-            <a:endParaRPr lang="en-US" sz="1400" dirty="0"/>
-          </a:p>
-        </p:txBody>
-      </p:sp>
-      <p:sp>
-        <p:nvSpPr>
-          <p:cNvPr id="9" name="Text 7"/>
+          <p:cNvPr id="11" name="Text 9"/>
           <p:cNvSpPr/>
           <p:nvPr/>
         </p:nvSpPr>
         <p:spPr>
           <a:xfrm>
             <a:off x="457200" y="4800600"/>
-            <a:ext cx="5943600" cy="228600"/>
-          </a:xfrm>
-          <a:prstGeom prst="rect">
-            <a:avLst/>
-          </a:prstGeom>
-          <a:noFill/>
-          <a:ln/>
-        </p:spPr>
-        <p:txBody>
-          <a:bodyPr wrap="square" lIns="0" tIns="0" rIns="0" bIns="0" rtlCol="0" anchor="ctr"/>
-          <a:lstStyle/>
-          <a:p>
-            <a:pPr indent="0" marL="0">
-              <a:buNone/>
-            </a:pPr>
-            <a:r>
-              <a:rPr lang="en-US" sz="1000" dirty="0">
-                <a:solidFill>
-                  <a:srgbClr val="555555"/>
+            <a:ext cx="5943600" cy="256032"/>
+          </a:xfrm>
+          <a:prstGeom prst="rect">
+            <a:avLst/>
+          </a:prstGeom>
+          <a:noFill/>
+          <a:ln/>
+        </p:spPr>
+        <p:txBody>
+          <a:bodyPr wrap="square" lIns="0" tIns="0" rIns="0" bIns="0" rtlCol="0" anchor="ctr"/>
+          <a:lstStyle/>
+          <a:p>
+            <a:pPr indent="0" marL="0">
+              <a:buNone/>
+            </a:pPr>
+            <a:r>
+              <a:rPr lang="en-US" sz="1100" dirty="0">
+                <a:solidFill>
+                  <a:srgbClr val="6A6A6A"/>
                 </a:solidFill>
                 <a:latin typeface="Arial" pitchFamily="34" charset="0"/>
                 <a:ea typeface="Arial" pitchFamily="34" charset="-122"/>
@@ -4668,20 +5093,20 @@
               </a:rPr>
               <a:t>Joshua Konkle  |  Chief of Staff Strategist</a:t>
             </a:r>
-            <a:endParaRPr lang="en-US" sz="1000" dirty="0"/>
-          </a:p>
-        </p:txBody>
-      </p:sp>
-      <p:sp>
-        <p:nvSpPr>
-          <p:cNvPr id="10" name="Text 8"/>
-          <p:cNvSpPr/>
-          <p:nvPr/>
-        </p:nvSpPr>
-        <p:spPr>
-          <a:xfrm>
-            <a:off x="7772400" y="4800600"/>
-            <a:ext cx="914400" cy="228600"/>
+            <a:endParaRPr lang="en-US" sz="1100" dirty="0"/>
+          </a:p>
+        </p:txBody>
+      </p:sp>
+      <p:sp>
+        <p:nvSpPr>
+          <p:cNvPr id="12" name="Text 10"/>
+          <p:cNvSpPr/>
+          <p:nvPr/>
+        </p:nvSpPr>
+        <p:spPr>
+          <a:xfrm>
+            <a:off x="7498080" y="4800600"/>
+            <a:ext cx="1188720" cy="256032"/>
           </a:xfrm>
           <a:prstGeom prst="rect">
             <a:avLst/>
@@ -4697,9 +5122,9 @@
               <a:buNone/>
             </a:pPr>
             <a:r>
-              <a:rPr lang="en-US" sz="1000" dirty="0">
-                <a:solidFill>
-                  <a:srgbClr val="555555"/>
+              <a:rPr lang="en-US" sz="1100" dirty="0">
+                <a:solidFill>
+                  <a:srgbClr val="6A6A6A"/>
                 </a:solidFill>
                 <a:latin typeface="Arial" pitchFamily="34" charset="0"/>
                 <a:ea typeface="Arial" pitchFamily="34" charset="-122"/>
@@ -4707,7 +5132,7 @@
               </a:rPr>
               <a:t>5 / 12</a:t>
             </a:r>
-            <a:endParaRPr lang="en-US" sz="1000" dirty="0"/>
+            <a:endParaRPr lang="en-US" sz="1100" dirty="0"/>
           </a:p>
         </p:txBody>
       </p:sp>
@@ -4722,13 +5147,6 @@
 <file path=ppt/slides/slide6.xml><?xml version="1.0" encoding="utf-8"?>
 <p:sld xmlns:a="http://schemas.openxmlformats.org/drawingml/2006/main" xmlns:r="http://schemas.openxmlformats.org/officeDocument/2006/relationships" xmlns:p="http://schemas.openxmlformats.org/presentationml/2006/main">
   <p:cSld name="Slide 6">
-    <p:bg>
-      <p:bgPr>
-        <a:solidFill>
-          <a:srgbClr val="FFFFFF"/>
-        </a:solidFill>
-      </p:bgPr>
-    </p:bg>
     <p:spTree>
       <p:nvGrpSpPr>
         <p:cNvPr id="1" name=""/>
@@ -4745,62 +5163,67 @@
       </p:grpSpPr>
       <p:sp>
         <p:nvSpPr>
-          <p:cNvPr id="2" name="Text 0"/>
-          <p:cNvSpPr/>
-          <p:nvPr/>
-        </p:nvSpPr>
-        <p:spPr>
-          <a:xfrm>
-            <a:off x="457200" y="320040"/>
-            <a:ext cx="8229600" cy="457200"/>
-          </a:xfrm>
-          <a:prstGeom prst="rect">
-            <a:avLst/>
-          </a:prstGeom>
-          <a:noFill/>
-          <a:ln/>
-        </p:spPr>
-        <p:txBody>
-          <a:bodyPr wrap="square" lIns="0" tIns="0" rIns="0" bIns="0" rtlCol="0" anchor="ctr"/>
-          <a:lstStyle/>
-          <a:p>
-            <a:pPr indent="0" marL="0">
-              <a:buNone/>
-            </a:pPr>
-            <a:r>
-              <a:rPr lang="en-US" sz="2400" b="1" dirty="0">
-                <a:solidFill>
-                  <a:srgbClr val="1A1A1A"/>
-                </a:solidFill>
-                <a:latin typeface="Arial" pitchFamily="34" charset="0"/>
-                <a:ea typeface="Arial" pitchFamily="34" charset="-122"/>
-                <a:cs typeface="Arial" pitchFamily="34" charset="-120"/>
-              </a:rPr>
-              <a:t>Location &amp; Operating Model Must Align</a:t>
-            </a:r>
-            <a:endParaRPr lang="en-US" sz="2400" dirty="0"/>
-          </a:p>
-        </p:txBody>
-      </p:sp>
-      <p:sp>
-        <p:nvSpPr>
-          <p:cNvPr id="3" name="Shape 1"/>
-          <p:cNvSpPr/>
-          <p:nvPr/>
-        </p:nvSpPr>
-        <p:spPr>
-          <a:xfrm>
-            <a:off x="457200" y="1097280"/>
-            <a:ext cx="8229600" cy="3017520"/>
+          <p:cNvPr id="2" name="Shape 0"/>
+          <p:cNvSpPr/>
+          <p:nvPr/>
+        </p:nvSpPr>
+        <p:spPr>
+          <a:xfrm>
+            <a:off x="0" y="0"/>
+            <a:ext cx="9144000" cy="5143500"/>
           </a:xfrm>
           <a:prstGeom prst="rect">
             <a:avLst/>
           </a:prstGeom>
           <a:solidFill>
-            <a:srgbClr val="F7F7F7"/>
+            <a:srgbClr val="FFFFFF"/>
           </a:solidFill>
-          <a:ln/>
-        </p:spPr>
+          <a:ln w="12700">
+            <a:solidFill>
+              <a:srgbClr val="FFFFFF"/>
+            </a:solidFill>
+            <a:prstDash val="solid"/>
+          </a:ln>
+        </p:spPr>
+      </p:sp>
+      <p:sp>
+        <p:nvSpPr>
+          <p:cNvPr id="3" name="Text 1"/>
+          <p:cNvSpPr/>
+          <p:nvPr/>
+        </p:nvSpPr>
+        <p:spPr>
+          <a:xfrm>
+            <a:off x="457200" y="274320"/>
+            <a:ext cx="8229600" cy="365760"/>
+          </a:xfrm>
+          <a:prstGeom prst="rect">
+            <a:avLst/>
+          </a:prstGeom>
+          <a:noFill/>
+          <a:ln/>
+        </p:spPr>
+        <p:txBody>
+          <a:bodyPr wrap="square" lIns="0" tIns="0" rIns="0" bIns="0" rtlCol="0" anchor="ctr"/>
+          <a:lstStyle/>
+          <a:p>
+            <a:pPr indent="0" marL="0">
+              <a:buNone/>
+            </a:pPr>
+            <a:r>
+              <a:rPr lang="en-US" sz="2000" b="1" dirty="0">
+                <a:solidFill>
+                  <a:srgbClr val="1B2A4A"/>
+                </a:solidFill>
+                <a:latin typeface="Arial" pitchFamily="34" charset="0"/>
+                <a:ea typeface="Arial" pitchFamily="34" charset="-122"/>
+                <a:cs typeface="Arial" pitchFamily="34" charset="-120"/>
+              </a:rPr>
+              <a:t>Location &amp; Capability in the Operating Model</a:t>
+            </a:r>
+            <a:endParaRPr lang="en-US" sz="2000" dirty="0"/>
+          </a:p>
+        </p:txBody>
       </p:sp>
       <p:sp>
         <p:nvSpPr>
@@ -4810,111 +5233,156 @@
         </p:nvSpPr>
         <p:spPr>
           <a:xfrm>
-            <a:off x="731520" y="1371600"/>
-            <a:ext cx="7680960" cy="2377440"/>
-          </a:xfrm>
-          <a:prstGeom prst="rect">
-            <a:avLst/>
-          </a:prstGeom>
-          <a:noFill/>
-          <a:ln/>
-        </p:spPr>
-        <p:txBody>
-          <a:bodyPr wrap="square" lIns="0" tIns="0" rIns="0" bIns="0" rtlCol="0" anchor="ctr"/>
-          <a:lstStyle/>
-          <a:p>
-            <a:pPr indent="0" marL="0">
-              <a:buNone/>
-            </a:pPr>
-            <a:r>
-              <a:rPr lang="en-US" sz="1600" dirty="0">
-                <a:solidFill>
-                  <a:srgbClr val="1A1A1A"/>
-                </a:solidFill>
-                <a:latin typeface="Arial" pitchFamily="34" charset="0"/>
-                <a:ea typeface="Arial" pitchFamily="34" charset="-122"/>
-                <a:cs typeface="Arial" pitchFamily="34" charset="-120"/>
-              </a:rPr>
-              <a:t>A domestic production footprint paired with an operating model still built for labor arbitrage will underperform.</a:t>
-            </a:r>
-            <a:endParaRPr lang="en-US" sz="1600" dirty="0"/>
-          </a:p>
-          <a:p>
-            <a:pPr indent="0" marL="0">
-              <a:buNone/>
-            </a:pPr>
-            <a:endParaRPr lang="en-US" sz="1600" dirty="0"/>
-          </a:p>
-          <a:p>
-            <a:pPr indent="0" marL="0">
-              <a:buNone/>
-            </a:pPr>
-            <a:r>
-              <a:rPr lang="en-US" sz="1600" dirty="0">
-                <a:solidFill>
-                  <a:srgbClr val="1A1A1A"/>
-                </a:solidFill>
-                <a:latin typeface="Arial" pitchFamily="34" charset="0"/>
-                <a:ea typeface="Arial" pitchFamily="34" charset="-122"/>
-                <a:cs typeface="Arial" pitchFamily="34" charset="-120"/>
-              </a:rPr>
-              <a:t>Conversely, an operating model designed for high-capability American work supports the case for domestic capacity and a more secure supply chain.</a:t>
-            </a:r>
-            <a:endParaRPr lang="en-US" sz="1600" dirty="0"/>
-          </a:p>
-          <a:p>
-            <a:pPr indent="0" marL="0">
-              <a:buNone/>
-            </a:pPr>
-            <a:endParaRPr lang="en-US" sz="1600" dirty="0"/>
-          </a:p>
-          <a:p>
-            <a:pPr indent="0" marL="0">
-              <a:buNone/>
-            </a:pPr>
-            <a:r>
-              <a:rPr lang="en-US" sz="1600" dirty="0">
-                <a:solidFill>
-                  <a:srgbClr val="1A1A1A"/>
-                </a:solidFill>
-                <a:latin typeface="Arial" pitchFamily="34" charset="0"/>
-                <a:ea typeface="Arial" pitchFamily="34" charset="-122"/>
-                <a:cs typeface="Arial" pitchFamily="34" charset="-120"/>
-              </a:rPr>
-              <a:t>The two decisions reinforce each other — or quietly undermine each other.</a:t>
-            </a:r>
-            <a:endParaRPr lang="en-US" sz="1600" dirty="0"/>
-          </a:p>
-        </p:txBody>
-      </p:sp>
-      <p:sp>
-        <p:nvSpPr>
-          <p:cNvPr id="5" name="Text 3"/>
+            <a:off x="457200" y="914400"/>
+            <a:ext cx="8229600" cy="914400"/>
+          </a:xfrm>
+          <a:prstGeom prst="rect">
+            <a:avLst/>
+          </a:prstGeom>
+          <a:noFill/>
+          <a:ln/>
+        </p:spPr>
+        <p:txBody>
+          <a:bodyPr wrap="square" lIns="0" tIns="0" rIns="0" bIns="0" rtlCol="0" anchor="ctr"/>
+          <a:lstStyle/>
+          <a:p>
+            <a:pPr indent="0" marL="0">
+              <a:buNone/>
+            </a:pPr>
+            <a:r>
+              <a:rPr lang="en-US" sz="1500" dirty="0">
+                <a:solidFill>
+                  <a:srgbClr val="2A2A2A"/>
+                </a:solidFill>
+                <a:latin typeface="Arial" pitchFamily="34" charset="0"/>
+                <a:ea typeface="Arial" pitchFamily="34" charset="-122"/>
+                <a:cs typeface="Arial" pitchFamily="34" charset="-120"/>
+              </a:rPr>
+              <a:t>Where work sits shapes who can own it, improve it, and carry institutional knowledge forward. Offshored or temporary-heavy designs make continuous improvement harder and raise strategic risk.</a:t>
+            </a:r>
+            <a:endParaRPr lang="en-US" sz="1500" dirty="0"/>
+          </a:p>
+        </p:txBody>
+      </p:sp>
+      <p:sp>
+        <p:nvSpPr>
+          <p:cNvPr id="5" name="Shape 3"/>
+          <p:cNvSpPr/>
+          <p:nvPr/>
+        </p:nvSpPr>
+        <p:spPr>
+          <a:xfrm>
+            <a:off x="457200" y="2103120"/>
+            <a:ext cx="8229600" cy="2011680"/>
+          </a:xfrm>
+          <a:prstGeom prst="roundRect">
+            <a:avLst>
+              <a:gd name="adj" fmla="val 3636"/>
+            </a:avLst>
+          </a:prstGeom>
+          <a:solidFill>
+            <a:srgbClr val="F7F5F0"/>
+          </a:solidFill>
+          <a:ln w="12700">
+            <a:solidFill>
+              <a:srgbClr val="F7F5F0"/>
+            </a:solidFill>
+            <a:prstDash val="solid"/>
+          </a:ln>
+        </p:spPr>
+      </p:sp>
+      <p:sp>
+        <p:nvSpPr>
+          <p:cNvPr id="6" name="Shape 4"/>
+          <p:cNvSpPr/>
+          <p:nvPr/>
+        </p:nvSpPr>
+        <p:spPr>
+          <a:xfrm>
+            <a:off x="457200" y="2103120"/>
+            <a:ext cx="91440" cy="2011680"/>
+          </a:xfrm>
+          <a:prstGeom prst="rect">
+            <a:avLst/>
+          </a:prstGeom>
+          <a:solidFill>
+            <a:srgbClr val="C9A227"/>
+          </a:solidFill>
+          <a:ln w="12700">
+            <a:solidFill>
+              <a:srgbClr val="C9A227"/>
+            </a:solidFill>
+            <a:prstDash val="solid"/>
+          </a:ln>
+        </p:spPr>
+      </p:sp>
+      <p:sp>
+        <p:nvSpPr>
+          <p:cNvPr id="7" name="Text 5"/>
+          <p:cNvSpPr/>
+          <p:nvPr/>
+        </p:nvSpPr>
+        <p:spPr>
+          <a:xfrm>
+            <a:off x="777240" y="2468880"/>
+            <a:ext cx="7680960" cy="1371600"/>
+          </a:xfrm>
+          <a:prstGeom prst="rect">
+            <a:avLst/>
+          </a:prstGeom>
+          <a:noFill/>
+          <a:ln/>
+        </p:spPr>
+        <p:txBody>
+          <a:bodyPr wrap="square" lIns="0" tIns="0" rIns="0" bIns="0" rtlCol="0" anchor="ctr"/>
+          <a:lstStyle/>
+          <a:p>
+            <a:pPr indent="0" marL="0">
+              <a:buNone/>
+            </a:pPr>
+            <a:r>
+              <a:rPr lang="en-US" sz="1500" dirty="0">
+                <a:solidFill>
+                  <a:srgbClr val="2A2A2A"/>
+                </a:solidFill>
+                <a:latin typeface="Arial" pitchFamily="34" charset="0"/>
+                <a:ea typeface="Arial" pitchFamily="34" charset="-122"/>
+                <a:cs typeface="Arial" pitchFamily="34" charset="-120"/>
+              </a:rPr>
+              <a:t>Hamiltonian test: Does this location and staffing pattern strengthen domestic productive capacity and high-skill American roles — or does it lock in permanent dependence on short-cycle non-sovereign labor?</a:t>
+            </a:r>
+            <a:endParaRPr lang="en-US" sz="1500" dirty="0"/>
+          </a:p>
+        </p:txBody>
+      </p:sp>
+      <p:sp>
+        <p:nvSpPr>
+          <p:cNvPr id="8" name="Text 6"/>
           <p:cNvSpPr/>
           <p:nvPr/>
         </p:nvSpPr>
         <p:spPr>
           <a:xfrm>
             <a:off x="457200" y="4800600"/>
-            <a:ext cx="5943600" cy="228600"/>
-          </a:xfrm>
-          <a:prstGeom prst="rect">
-            <a:avLst/>
-          </a:prstGeom>
-          <a:noFill/>
-          <a:ln/>
-        </p:spPr>
-        <p:txBody>
-          <a:bodyPr wrap="square" lIns="0" tIns="0" rIns="0" bIns="0" rtlCol="0" anchor="ctr"/>
-          <a:lstStyle/>
-          <a:p>
-            <a:pPr indent="0" marL="0">
-              <a:buNone/>
-            </a:pPr>
-            <a:r>
-              <a:rPr lang="en-US" sz="1000" dirty="0">
-                <a:solidFill>
-                  <a:srgbClr val="555555"/>
+            <a:ext cx="5943600" cy="256032"/>
+          </a:xfrm>
+          <a:prstGeom prst="rect">
+            <a:avLst/>
+          </a:prstGeom>
+          <a:noFill/>
+          <a:ln/>
+        </p:spPr>
+        <p:txBody>
+          <a:bodyPr wrap="square" lIns="0" tIns="0" rIns="0" bIns="0" rtlCol="0" anchor="ctr"/>
+          <a:lstStyle/>
+          <a:p>
+            <a:pPr indent="0" marL="0">
+              <a:buNone/>
+            </a:pPr>
+            <a:r>
+              <a:rPr lang="en-US" sz="1100" dirty="0">
+                <a:solidFill>
+                  <a:srgbClr val="6A6A6A"/>
                 </a:solidFill>
                 <a:latin typeface="Arial" pitchFamily="34" charset="0"/>
                 <a:ea typeface="Arial" pitchFamily="34" charset="-122"/>
@@ -4922,20 +5390,20 @@
               </a:rPr>
               <a:t>Joshua Konkle  |  Chief of Staff Strategist</a:t>
             </a:r>
-            <a:endParaRPr lang="en-US" sz="1000" dirty="0"/>
-          </a:p>
-        </p:txBody>
-      </p:sp>
-      <p:sp>
-        <p:nvSpPr>
-          <p:cNvPr id="6" name="Text 4"/>
-          <p:cNvSpPr/>
-          <p:nvPr/>
-        </p:nvSpPr>
-        <p:spPr>
-          <a:xfrm>
-            <a:off x="7772400" y="4800600"/>
-            <a:ext cx="914400" cy="228600"/>
+            <a:endParaRPr lang="en-US" sz="1100" dirty="0"/>
+          </a:p>
+        </p:txBody>
+      </p:sp>
+      <p:sp>
+        <p:nvSpPr>
+          <p:cNvPr id="9" name="Text 7"/>
+          <p:cNvSpPr/>
+          <p:nvPr/>
+        </p:nvSpPr>
+        <p:spPr>
+          <a:xfrm>
+            <a:off x="7498080" y="4800600"/>
+            <a:ext cx="1188720" cy="256032"/>
           </a:xfrm>
           <a:prstGeom prst="rect">
             <a:avLst/>
@@ -4951,9 +5419,9 @@
               <a:buNone/>
             </a:pPr>
             <a:r>
-              <a:rPr lang="en-US" sz="1000" dirty="0">
-                <a:solidFill>
-                  <a:srgbClr val="555555"/>
+              <a:rPr lang="en-US" sz="1100" dirty="0">
+                <a:solidFill>
+                  <a:srgbClr val="6A6A6A"/>
                 </a:solidFill>
                 <a:latin typeface="Arial" pitchFamily="34" charset="0"/>
                 <a:ea typeface="Arial" pitchFamily="34" charset="-122"/>
@@ -4961,7 +5429,7 @@
               </a:rPr>
               <a:t>6 / 12</a:t>
             </a:r>
-            <a:endParaRPr lang="en-US" sz="1000" dirty="0"/>
+            <a:endParaRPr lang="en-US" sz="1100" dirty="0"/>
           </a:p>
         </p:txBody>
       </p:sp>
@@ -4976,13 +5444,6 @@
 <file path=ppt/slides/slide7.xml><?xml version="1.0" encoding="utf-8"?>
 <p:sld xmlns:a="http://schemas.openxmlformats.org/drawingml/2006/main" xmlns:r="http://schemas.openxmlformats.org/officeDocument/2006/relationships" xmlns:p="http://schemas.openxmlformats.org/presentationml/2006/main">
   <p:cSld name="Slide 7">
-    <p:bg>
-      <p:bgPr>
-        <a:solidFill>
-          <a:srgbClr val="FFFFFF"/>
-        </a:solidFill>
-      </p:bgPr>
-    </p:bg>
     <p:spTree>
       <p:nvGrpSpPr>
         <p:cNvPr id="1" name=""/>
@@ -4999,62 +5460,67 @@
       </p:grpSpPr>
       <p:sp>
         <p:nvSpPr>
-          <p:cNvPr id="2" name="Text 0"/>
-          <p:cNvSpPr/>
-          <p:nvPr/>
-        </p:nvSpPr>
-        <p:spPr>
-          <a:xfrm>
-            <a:off x="457200" y="274320"/>
-            <a:ext cx="8229600" cy="411480"/>
-          </a:xfrm>
-          <a:prstGeom prst="rect">
-            <a:avLst/>
-          </a:prstGeom>
-          <a:noFill/>
-          <a:ln/>
-        </p:spPr>
-        <p:txBody>
-          <a:bodyPr wrap="square" lIns="0" tIns="0" rIns="0" bIns="0" rtlCol="0" anchor="ctr"/>
-          <a:lstStyle/>
-          <a:p>
-            <a:pPr indent="0" marL="0">
-              <a:buNone/>
-            </a:pPr>
-            <a:r>
-              <a:rPr lang="en-US" sz="2400" b="1" dirty="0">
-                <a:solidFill>
-                  <a:srgbClr val="1A1A1A"/>
-                </a:solidFill>
-                <a:latin typeface="Arial" pitchFamily="34" charset="0"/>
-                <a:ea typeface="Arial" pitchFamily="34" charset="-122"/>
-                <a:cs typeface="Arial" pitchFamily="34" charset="-120"/>
-              </a:rPr>
-              <a:t>Hamiltonian Redesign Principles</a:t>
-            </a:r>
-            <a:endParaRPr lang="en-US" sz="2400" dirty="0"/>
-          </a:p>
-        </p:txBody>
-      </p:sp>
-      <p:sp>
-        <p:nvSpPr>
-          <p:cNvPr id="3" name="Shape 1"/>
-          <p:cNvSpPr/>
-          <p:nvPr/>
-        </p:nvSpPr>
-        <p:spPr>
-          <a:xfrm>
-            <a:off x="457200" y="914400"/>
-            <a:ext cx="73152" cy="914400"/>
+          <p:cNvPr id="2" name="Shape 0"/>
+          <p:cNvSpPr/>
+          <p:nvPr/>
+        </p:nvSpPr>
+        <p:spPr>
+          <a:xfrm>
+            <a:off x="0" y="0"/>
+            <a:ext cx="9144000" cy="5143500"/>
           </a:xfrm>
           <a:prstGeom prst="rect">
             <a:avLst/>
           </a:prstGeom>
           <a:solidFill>
-            <a:srgbClr val="1A1A1A"/>
+            <a:srgbClr val="FFFFFF"/>
           </a:solidFill>
-          <a:ln/>
-        </p:spPr>
+          <a:ln w="12700">
+            <a:solidFill>
+              <a:srgbClr val="FFFFFF"/>
+            </a:solidFill>
+            <a:prstDash val="solid"/>
+          </a:ln>
+        </p:spPr>
+      </p:sp>
+      <p:sp>
+        <p:nvSpPr>
+          <p:cNvPr id="3" name="Text 1"/>
+          <p:cNvSpPr/>
+          <p:nvPr/>
+        </p:nvSpPr>
+        <p:spPr>
+          <a:xfrm>
+            <a:off x="457200" y="228600"/>
+            <a:ext cx="8229600" cy="365760"/>
+          </a:xfrm>
+          <a:prstGeom prst="rect">
+            <a:avLst/>
+          </a:prstGeom>
+          <a:noFill/>
+          <a:ln/>
+        </p:spPr>
+        <p:txBody>
+          <a:bodyPr wrap="square" lIns="0" tIns="0" rIns="0" bIns="0" rtlCol="0" anchor="ctr"/>
+          <a:lstStyle/>
+          <a:p>
+            <a:pPr indent="0" marL="0">
+              <a:buNone/>
+            </a:pPr>
+            <a:r>
+              <a:rPr lang="en-US" sz="2000" b="1" dirty="0">
+                <a:solidFill>
+                  <a:srgbClr val="1B2A4A"/>
+                </a:solidFill>
+                <a:latin typeface="Arial" pitchFamily="34" charset="0"/>
+                <a:ea typeface="Arial" pitchFamily="34" charset="-122"/>
+                <a:cs typeface="Arial" pitchFamily="34" charset="-120"/>
+              </a:rPr>
+              <a:t>AI-Enabled Work — Elevate, Don’t Only Eliminate</a:t>
+            </a:r>
+            <a:endParaRPr lang="en-US" sz="2000" dirty="0"/>
+          </a:p>
+        </p:txBody>
       </p:sp>
       <p:sp>
         <p:nvSpPr>
@@ -5064,47 +5530,8 @@
         </p:nvSpPr>
         <p:spPr>
           <a:xfrm>
-            <a:off x="777240" y="914400"/>
-            <a:ext cx="7772400" cy="320040"/>
-          </a:xfrm>
-          <a:prstGeom prst="rect">
-            <a:avLst/>
-          </a:prstGeom>
-          <a:noFill/>
-          <a:ln/>
-        </p:spPr>
-        <p:txBody>
-          <a:bodyPr wrap="square" lIns="0" tIns="0" rIns="0" bIns="0" rtlCol="0" anchor="ctr"/>
-          <a:lstStyle/>
-          <a:p>
-            <a:pPr indent="0" marL="0">
-              <a:buNone/>
-            </a:pPr>
-            <a:r>
-              <a:rPr lang="en-US" sz="1600" b="1" dirty="0">
-                <a:solidFill>
-                  <a:srgbClr val="1A1A1A"/>
-                </a:solidFill>
-                <a:latin typeface="Arial" pitchFamily="34" charset="0"/>
-                <a:ea typeface="Arial" pitchFamily="34" charset="-122"/>
-                <a:cs typeface="Arial" pitchFamily="34" charset="-120"/>
-              </a:rPr>
-              <a:t>Elevate American Roles</a:t>
-            </a:r>
-            <a:endParaRPr lang="en-US" sz="1600" dirty="0"/>
-          </a:p>
-        </p:txBody>
-      </p:sp>
-      <p:sp>
-        <p:nvSpPr>
-          <p:cNvPr id="5" name="Text 3"/>
-          <p:cNvSpPr/>
-          <p:nvPr/>
-        </p:nvSpPr>
-        <p:spPr>
-          <a:xfrm>
-            <a:off x="777240" y="1280160"/>
-            <a:ext cx="7772400" cy="502920"/>
+            <a:off x="457200" y="777240"/>
+            <a:ext cx="8229600" cy="1005840"/>
           </a:xfrm>
           <a:prstGeom prst="rect">
             <a:avLst/>
@@ -5122,13 +5549,13 @@
             <a:r>
               <a:rPr lang="en-US" sz="1400" dirty="0">
                 <a:solidFill>
-                  <a:srgbClr val="555555"/>
-                </a:solidFill>
-                <a:latin typeface="Arial" pitchFamily="34" charset="0"/>
-                <a:ea typeface="Arial" pitchFamily="34" charset="-122"/>
-                <a:cs typeface="Arial" pitchFamily="34" charset="-120"/>
-              </a:rPr>
-              <a:t>Design work so AI and automation remove low-value activity and shift people into higher-skill roles (engineering, systems integration, maintenance, continuous improvement, oversight).</a:t>
+                  <a:srgbClr val="2A2A2A"/>
+                </a:solidFill>
+                <a:latin typeface="Arial" pitchFamily="34" charset="0"/>
+                <a:ea typeface="Arial" pitchFamily="34" charset="-122"/>
+                <a:cs typeface="Arial" pitchFamily="34" charset="-120"/>
+              </a:rPr>
+              <a:t>An AI-native team structures roles around high-leverage human judgment, rapid iteration, and clear ownership of outcomes. Technology handles volume and repetition; people concentrate on direction, quality, integration, and improvement.</a:t>
             </a:r>
             <a:endParaRPr lang="en-US" sz="1400" dirty="0"/>
           </a:p>
@@ -5136,23 +5563,69 @@
       </p:sp>
       <p:sp>
         <p:nvSpPr>
-          <p:cNvPr id="6" name="Shape 4"/>
-          <p:cNvSpPr/>
-          <p:nvPr/>
-        </p:nvSpPr>
-        <p:spPr>
-          <a:xfrm>
-            <a:off x="457200" y="2057400"/>
-            <a:ext cx="73152" cy="914400"/>
-          </a:xfrm>
-          <a:prstGeom prst="rect">
-            <a:avLst/>
+          <p:cNvPr id="5" name="Shape 3"/>
+          <p:cNvSpPr/>
+          <p:nvPr/>
+        </p:nvSpPr>
+        <p:spPr>
+          <a:xfrm>
+            <a:off x="457200" y="2011680"/>
+            <a:ext cx="8229600" cy="2194560"/>
+          </a:xfrm>
+          <a:prstGeom prst="roundRect">
+            <a:avLst>
+              <a:gd name="adj" fmla="val 3333"/>
+            </a:avLst>
           </a:prstGeom>
           <a:solidFill>
-            <a:srgbClr val="1A1A1A"/>
+            <a:srgbClr val="1B2A4A"/>
           </a:solidFill>
-          <a:ln/>
-        </p:spPr>
+          <a:ln w="12700">
+            <a:solidFill>
+              <a:srgbClr val="1B2A4A"/>
+            </a:solidFill>
+            <a:prstDash val="solid"/>
+          </a:ln>
+        </p:spPr>
+      </p:sp>
+      <p:sp>
+        <p:nvSpPr>
+          <p:cNvPr id="6" name="Text 4"/>
+          <p:cNvSpPr/>
+          <p:nvPr/>
+        </p:nvSpPr>
+        <p:spPr>
+          <a:xfrm>
+            <a:off x="731520" y="2377440"/>
+            <a:ext cx="7680960" cy="1554480"/>
+          </a:xfrm>
+          <a:prstGeom prst="rect">
+            <a:avLst/>
+          </a:prstGeom>
+          <a:noFill/>
+          <a:ln/>
+        </p:spPr>
+        <p:txBody>
+          <a:bodyPr wrap="square" lIns="0" tIns="0" rIns="0" bIns="0" rtlCol="0" anchor="ctr"/>
+          <a:lstStyle/>
+          <a:p>
+            <a:pPr indent="0" marL="0">
+              <a:buNone/>
+            </a:pPr>
+            <a:r>
+              <a:rPr lang="en-US" sz="1500" dirty="0">
+                <a:solidFill>
+                  <a:srgbClr val="FFFFFF"/>
+                </a:solidFill>
+                <a:latin typeface="Arial" pitchFamily="34" charset="0"/>
+                <a:ea typeface="Arial" pitchFamily="34" charset="-122"/>
+                <a:cs typeface="Arial" pitchFamily="34" charset="-120"/>
+              </a:rPr>
+              <a:t>The same logic applies inside manufacturing, supply chain, and technical operations: use AI and automation to eliminate low-value work while expanding the number of high-skill American roles that design, maintain, and continuously improve the system.</a:t>
+            </a:r>
+            <a:endParaRPr lang="en-US" sz="1500" dirty="0"/>
+          </a:p>
+        </p:txBody>
       </p:sp>
       <p:sp>
         <p:nvSpPr>
@@ -5162,34 +5635,34 @@
         </p:nvSpPr>
         <p:spPr>
           <a:xfrm>
-            <a:off x="777240" y="2057400"/>
-            <a:ext cx="7772400" cy="320040"/>
-          </a:xfrm>
-          <a:prstGeom prst="rect">
-            <a:avLst/>
-          </a:prstGeom>
-          <a:noFill/>
-          <a:ln/>
-        </p:spPr>
-        <p:txBody>
-          <a:bodyPr wrap="square" lIns="0" tIns="0" rIns="0" bIns="0" rtlCol="0" anchor="ctr"/>
-          <a:lstStyle/>
-          <a:p>
-            <a:pPr indent="0" marL="0">
-              <a:buNone/>
-            </a:pPr>
-            <a:r>
-              <a:rPr lang="en-US" sz="1600" b="1" dirty="0">
-                <a:solidFill>
-                  <a:srgbClr val="1A1A1A"/>
-                </a:solidFill>
-                <a:latin typeface="Arial" pitchFamily="34" charset="0"/>
-                <a:ea typeface="Arial" pitchFamily="34" charset="-122"/>
-                <a:cs typeface="Arial" pitchFamily="34" charset="-120"/>
-              </a:rPr>
-              <a:t>Make Capability Explicit</a:t>
-            </a:r>
-            <a:endParaRPr lang="en-US" sz="1600" dirty="0"/>
+            <a:off x="457200" y="4800600"/>
+            <a:ext cx="5943600" cy="256032"/>
+          </a:xfrm>
+          <a:prstGeom prst="rect">
+            <a:avLst/>
+          </a:prstGeom>
+          <a:noFill/>
+          <a:ln/>
+        </p:spPr>
+        <p:txBody>
+          <a:bodyPr wrap="square" lIns="0" tIns="0" rIns="0" bIns="0" rtlCol="0" anchor="ctr"/>
+          <a:lstStyle/>
+          <a:p>
+            <a:pPr indent="0" marL="0">
+              <a:buNone/>
+            </a:pPr>
+            <a:r>
+              <a:rPr lang="en-US" sz="1100" dirty="0">
+                <a:solidFill>
+                  <a:srgbClr val="6A6A6A"/>
+                </a:solidFill>
+                <a:latin typeface="Arial" pitchFamily="34" charset="0"/>
+                <a:ea typeface="Arial" pitchFamily="34" charset="-122"/>
+                <a:cs typeface="Arial" pitchFamily="34" charset="-120"/>
+              </a:rPr>
+              <a:t>Joshua Konkle  |  Chief of Staff Strategist</a:t>
+            </a:r>
+            <a:endParaRPr lang="en-US" sz="1100" dirty="0"/>
           </a:p>
         </p:txBody>
       </p:sp>
@@ -5201,184 +5674,8 @@
         </p:nvSpPr>
         <p:spPr>
           <a:xfrm>
-            <a:off x="777240" y="2423160"/>
-            <a:ext cx="7772400" cy="502920"/>
-          </a:xfrm>
-          <a:prstGeom prst="rect">
-            <a:avLst/>
-          </a:prstGeom>
-          <a:noFill/>
-          <a:ln/>
-        </p:spPr>
-        <p:txBody>
-          <a:bodyPr wrap="square" lIns="0" tIns="0" rIns="0" bIns="0" rtlCol="0" anchor="ctr"/>
-          <a:lstStyle/>
-          <a:p>
-            <a:pPr indent="0" marL="0">
-              <a:buNone/>
-            </a:pPr>
-            <a:r>
-              <a:rPr lang="en-US" sz="1400" dirty="0">
-                <a:solidFill>
-                  <a:srgbClr val="555555"/>
-                </a:solidFill>
-                <a:latin typeface="Arial" pitchFamily="34" charset="0"/>
-                <a:ea typeface="Arial" pitchFamily="34" charset="-122"/>
-                <a:cs typeface="Arial" pitchFamily="34" charset="-120"/>
-              </a:rPr>
-              <a:t>Treat capability growth and domestic productive strength as design criteria, not afterthoughts.</a:t>
-            </a:r>
-            <a:endParaRPr lang="en-US" sz="1400" dirty="0"/>
-          </a:p>
-        </p:txBody>
-      </p:sp>
-      <p:sp>
-        <p:nvSpPr>
-          <p:cNvPr id="9" name="Shape 7"/>
-          <p:cNvSpPr/>
-          <p:nvPr/>
-        </p:nvSpPr>
-        <p:spPr>
-          <a:xfrm>
-            <a:off x="457200" y="3200400"/>
-            <a:ext cx="73152" cy="914400"/>
-          </a:xfrm>
-          <a:prstGeom prst="rect">
-            <a:avLst/>
-          </a:prstGeom>
-          <a:solidFill>
-            <a:srgbClr val="1A1A1A"/>
-          </a:solidFill>
-          <a:ln/>
-        </p:spPr>
-      </p:sp>
-      <p:sp>
-        <p:nvSpPr>
-          <p:cNvPr id="10" name="Text 8"/>
-          <p:cNvSpPr/>
-          <p:nvPr/>
-        </p:nvSpPr>
-        <p:spPr>
-          <a:xfrm>
-            <a:off x="777240" y="3200400"/>
-            <a:ext cx="7772400" cy="320040"/>
-          </a:xfrm>
-          <a:prstGeom prst="rect">
-            <a:avLst/>
-          </a:prstGeom>
-          <a:noFill/>
-          <a:ln/>
-        </p:spPr>
-        <p:txBody>
-          <a:bodyPr wrap="square" lIns="0" tIns="0" rIns="0" bIns="0" rtlCol="0" anchor="ctr"/>
-          <a:lstStyle/>
-          <a:p>
-            <a:pPr indent="0" marL="0">
-              <a:buNone/>
-            </a:pPr>
-            <a:r>
-              <a:rPr lang="en-US" sz="1600" b="1" dirty="0">
-                <a:solidFill>
-                  <a:srgbClr val="1A1A1A"/>
-                </a:solidFill>
-                <a:latin typeface="Arial" pitchFamily="34" charset="0"/>
-                <a:ea typeface="Arial" pitchFamily="34" charset="-122"/>
-                <a:cs typeface="Arial" pitchFamily="34" charset="-120"/>
-              </a:rPr>
-              <a:t>Align Governance &amp; Metrics</a:t>
-            </a:r>
-            <a:endParaRPr lang="en-US" sz="1600" dirty="0"/>
-          </a:p>
-        </p:txBody>
-      </p:sp>
-      <p:sp>
-        <p:nvSpPr>
-          <p:cNvPr id="11" name="Text 9"/>
-          <p:cNvSpPr/>
-          <p:nvPr/>
-        </p:nvSpPr>
-        <p:spPr>
-          <a:xfrm>
-            <a:off x="777240" y="3566160"/>
-            <a:ext cx="7772400" cy="502920"/>
-          </a:xfrm>
-          <a:prstGeom prst="rect">
-            <a:avLst/>
-          </a:prstGeom>
-          <a:noFill/>
-          <a:ln/>
-        </p:spPr>
-        <p:txBody>
-          <a:bodyPr wrap="square" lIns="0" tIns="0" rIns="0" bIns="0" rtlCol="0" anchor="ctr"/>
-          <a:lstStyle/>
-          <a:p>
-            <a:pPr indent="0" marL="0">
-              <a:buNone/>
-            </a:pPr>
-            <a:r>
-              <a:rPr lang="en-US" sz="1400" dirty="0">
-                <a:solidFill>
-                  <a:srgbClr val="555555"/>
-                </a:solidFill>
-                <a:latin typeface="Arial" pitchFamily="34" charset="0"/>
-                <a:ea typeface="Arial" pitchFamily="34" charset="-122"/>
-                <a:cs typeface="Arial" pitchFamily="34" charset="-120"/>
-              </a:rPr>
-              <a:t>Governance, metrics, and improvement loops should reward productive sovereignty rather than pure cost extraction.</a:t>
-            </a:r>
-            <a:endParaRPr lang="en-US" sz="1400" dirty="0"/>
-          </a:p>
-        </p:txBody>
-      </p:sp>
-      <p:sp>
-        <p:nvSpPr>
-          <p:cNvPr id="12" name="Text 10"/>
-          <p:cNvSpPr/>
-          <p:nvPr/>
-        </p:nvSpPr>
-        <p:spPr>
-          <a:xfrm>
-            <a:off x="457200" y="4800600"/>
-            <a:ext cx="5943600" cy="228600"/>
-          </a:xfrm>
-          <a:prstGeom prst="rect">
-            <a:avLst/>
-          </a:prstGeom>
-          <a:noFill/>
-          <a:ln/>
-        </p:spPr>
-        <p:txBody>
-          <a:bodyPr wrap="square" lIns="0" tIns="0" rIns="0" bIns="0" rtlCol="0" anchor="ctr"/>
-          <a:lstStyle/>
-          <a:p>
-            <a:pPr indent="0" marL="0">
-              <a:buNone/>
-            </a:pPr>
-            <a:r>
-              <a:rPr lang="en-US" sz="1000" dirty="0">
-                <a:solidFill>
-                  <a:srgbClr val="555555"/>
-                </a:solidFill>
-                <a:latin typeface="Arial" pitchFamily="34" charset="0"/>
-                <a:ea typeface="Arial" pitchFamily="34" charset="-122"/>
-                <a:cs typeface="Arial" pitchFamily="34" charset="-120"/>
-              </a:rPr>
-              <a:t>Joshua Konkle  |  Chief of Staff Strategist</a:t>
-            </a:r>
-            <a:endParaRPr lang="en-US" sz="1000" dirty="0"/>
-          </a:p>
-        </p:txBody>
-      </p:sp>
-      <p:sp>
-        <p:nvSpPr>
-          <p:cNvPr id="13" name="Text 11"/>
-          <p:cNvSpPr/>
-          <p:nvPr/>
-        </p:nvSpPr>
-        <p:spPr>
-          <a:xfrm>
-            <a:off x="7772400" y="4800600"/>
-            <a:ext cx="914400" cy="228600"/>
+            <a:off x="7498080" y="4800600"/>
+            <a:ext cx="1188720" cy="256032"/>
           </a:xfrm>
           <a:prstGeom prst="rect">
             <a:avLst/>
@@ -5394,9 +5691,9 @@
               <a:buNone/>
             </a:pPr>
             <a:r>
-              <a:rPr lang="en-US" sz="1000" dirty="0">
-                <a:solidFill>
-                  <a:srgbClr val="555555"/>
+              <a:rPr lang="en-US" sz="1100" dirty="0">
+                <a:solidFill>
+                  <a:srgbClr val="6A6A6A"/>
                 </a:solidFill>
                 <a:latin typeface="Arial" pitchFamily="34" charset="0"/>
                 <a:ea typeface="Arial" pitchFamily="34" charset="-122"/>
@@ -5404,7 +5701,7 @@
               </a:rPr>
               <a:t>7 / 12</a:t>
             </a:r>
-            <a:endParaRPr lang="en-US" sz="1000" dirty="0"/>
+            <a:endParaRPr lang="en-US" sz="1100" dirty="0"/>
           </a:p>
         </p:txBody>
       </p:sp>
@@ -5419,13 +5716,6 @@
 <file path=ppt/slides/slide8.xml><?xml version="1.0" encoding="utf-8"?>
 <p:sld xmlns:a="http://schemas.openxmlformats.org/drawingml/2006/main" xmlns:r="http://schemas.openxmlformats.org/officeDocument/2006/relationships" xmlns:p="http://schemas.openxmlformats.org/presentationml/2006/main">
   <p:cSld name="Slide 8">
-    <p:bg>
-      <p:bgPr>
-        <a:solidFill>
-          <a:srgbClr val="FFFFFF"/>
-        </a:solidFill>
-      </p:bgPr>
-    </p:bg>
     <p:spTree>
       <p:nvGrpSpPr>
         <p:cNvPr id="1" name=""/>
@@ -5442,62 +5732,67 @@
       </p:grpSpPr>
       <p:sp>
         <p:nvSpPr>
-          <p:cNvPr id="2" name="Text 0"/>
-          <p:cNvSpPr/>
-          <p:nvPr/>
-        </p:nvSpPr>
-        <p:spPr>
-          <a:xfrm>
-            <a:off x="457200" y="274320"/>
-            <a:ext cx="8229600" cy="411480"/>
-          </a:xfrm>
-          <a:prstGeom prst="rect">
-            <a:avLst/>
-          </a:prstGeom>
-          <a:noFill/>
-          <a:ln/>
-        </p:spPr>
-        <p:txBody>
-          <a:bodyPr wrap="square" lIns="0" tIns="0" rIns="0" bIns="0" rtlCol="0" anchor="ctr"/>
-          <a:lstStyle/>
-          <a:p>
-            <a:pPr indent="0" marL="0">
-              <a:buNone/>
-            </a:pPr>
-            <a:r>
-              <a:rPr lang="en-US" sz="2400" b="1" dirty="0">
-                <a:solidFill>
-                  <a:srgbClr val="1A1A1A"/>
-                </a:solidFill>
-                <a:latin typeface="Arial" pitchFamily="34" charset="0"/>
-                <a:ea typeface="Arial" pitchFamily="34" charset="-122"/>
-                <a:cs typeface="Arial" pitchFamily="34" charset="-120"/>
-              </a:rPr>
-              <a:t>AI-Native Ways of Working</a:t>
-            </a:r>
-            <a:endParaRPr lang="en-US" sz="2400" dirty="0"/>
-          </a:p>
-        </p:txBody>
-      </p:sp>
-      <p:sp>
-        <p:nvSpPr>
-          <p:cNvPr id="3" name="Shape 1"/>
-          <p:cNvSpPr/>
-          <p:nvPr/>
-        </p:nvSpPr>
-        <p:spPr>
-          <a:xfrm>
-            <a:off x="457200" y="914400"/>
-            <a:ext cx="8229600" cy="3200400"/>
+          <p:cNvPr id="2" name="Shape 0"/>
+          <p:cNvSpPr/>
+          <p:nvPr/>
+        </p:nvSpPr>
+        <p:spPr>
+          <a:xfrm>
+            <a:off x="0" y="0"/>
+            <a:ext cx="9144000" cy="5143500"/>
           </a:xfrm>
           <a:prstGeom prst="rect">
             <a:avLst/>
           </a:prstGeom>
           <a:solidFill>
-            <a:srgbClr val="F7F7F7"/>
+            <a:srgbClr val="FFFFFF"/>
           </a:solidFill>
-          <a:ln/>
-        </p:spPr>
+          <a:ln w="12700">
+            <a:solidFill>
+              <a:srgbClr val="FFFFFF"/>
+            </a:solidFill>
+            <a:prstDash val="solid"/>
+          </a:ln>
+        </p:spPr>
+      </p:sp>
+      <p:sp>
+        <p:nvSpPr>
+          <p:cNvPr id="3" name="Text 1"/>
+          <p:cNvSpPr/>
+          <p:nvPr/>
+        </p:nvSpPr>
+        <p:spPr>
+          <a:xfrm>
+            <a:off x="457200" y="228600"/>
+            <a:ext cx="8229600" cy="365760"/>
+          </a:xfrm>
+          <a:prstGeom prst="rect">
+            <a:avLst/>
+          </a:prstGeom>
+          <a:noFill/>
+          <a:ln/>
+        </p:spPr>
+        <p:txBody>
+          <a:bodyPr wrap="square" lIns="0" tIns="0" rIns="0" bIns="0" rtlCol="0" anchor="ctr"/>
+          <a:lstStyle/>
+          <a:p>
+            <a:pPr indent="0" marL="0">
+              <a:buNone/>
+            </a:pPr>
+            <a:r>
+              <a:rPr lang="en-US" sz="2000" b="1" dirty="0">
+                <a:solidFill>
+                  <a:srgbClr val="1B2A4A"/>
+                </a:solidFill>
+                <a:latin typeface="Arial" pitchFamily="34" charset="0"/>
+                <a:ea typeface="Arial" pitchFamily="34" charset="-122"/>
+                <a:cs typeface="Arial" pitchFamily="34" charset="-120"/>
+              </a:rPr>
+              <a:t>How We Structure High-Leverage Work</a:t>
+            </a:r>
+            <a:endParaRPr lang="en-US" sz="2000" dirty="0"/>
+          </a:p>
+        </p:txBody>
       </p:sp>
       <p:sp>
         <p:nvSpPr>
@@ -5507,8 +5802,99 @@
         </p:nvSpPr>
         <p:spPr>
           <a:xfrm>
-            <a:off x="731520" y="1143000"/>
-            <a:ext cx="7680960" cy="2743200"/>
+            <a:off x="457200" y="822960"/>
+            <a:ext cx="8229600" cy="1280160"/>
+          </a:xfrm>
+          <a:prstGeom prst="rect">
+            <a:avLst/>
+          </a:prstGeom>
+          <a:noFill/>
+          <a:ln/>
+        </p:spPr>
+        <p:txBody>
+          <a:bodyPr wrap="square" lIns="0" tIns="0" rIns="0" bIns="0" rtlCol="0" anchor="ctr"/>
+          <a:lstStyle/>
+          <a:p>
+            <a:pPr indent="0" marL="0">
+              <a:buNone/>
+            </a:pPr>
+            <a:r>
+              <a:rPr lang="en-US" sz="1500" dirty="0">
+                <a:solidFill>
+                  <a:srgbClr val="2A2A2A"/>
+                </a:solidFill>
+                <a:latin typeface="Arial" pitchFamily="34" charset="0"/>
+                <a:ea typeface="Arial" pitchFamily="34" charset="-122"/>
+                <a:cs typeface="Arial" pitchFamily="34" charset="-120"/>
+              </a:rPr>
+              <a:t>The human sets direction, makes judgment calls, and integrates the work. Specialized agents handle depth, volume, and rapid iteration across research, drafting, and analysis — producing integrated outputs far faster than traditional methods while keeping strategic control firmly human.</a:t>
+            </a:r>
+            <a:endParaRPr lang="en-US" sz="1500" dirty="0"/>
+          </a:p>
+        </p:txBody>
+      </p:sp>
+      <p:sp>
+        <p:nvSpPr>
+          <p:cNvPr id="5" name="Shape 3"/>
+          <p:cNvSpPr/>
+          <p:nvPr/>
+        </p:nvSpPr>
+        <p:spPr>
+          <a:xfrm>
+            <a:off x="457200" y="2377440"/>
+            <a:ext cx="8229600" cy="1737360"/>
+          </a:xfrm>
+          <a:prstGeom prst="roundRect">
+            <a:avLst>
+              <a:gd name="adj" fmla="val 4211"/>
+            </a:avLst>
+          </a:prstGeom>
+          <a:solidFill>
+            <a:srgbClr val="F7F5F0"/>
+          </a:solidFill>
+          <a:ln w="12700">
+            <a:solidFill>
+              <a:srgbClr val="F7F5F0"/>
+            </a:solidFill>
+            <a:prstDash val="solid"/>
+          </a:ln>
+        </p:spPr>
+      </p:sp>
+      <p:sp>
+        <p:nvSpPr>
+          <p:cNvPr id="6" name="Shape 4"/>
+          <p:cNvSpPr/>
+          <p:nvPr/>
+        </p:nvSpPr>
+        <p:spPr>
+          <a:xfrm>
+            <a:off x="457200" y="2377440"/>
+            <a:ext cx="91440" cy="1737360"/>
+          </a:xfrm>
+          <a:prstGeom prst="rect">
+            <a:avLst/>
+          </a:prstGeom>
+          <a:solidFill>
+            <a:srgbClr val="C9A227"/>
+          </a:solidFill>
+          <a:ln w="12700">
+            <a:solidFill>
+              <a:srgbClr val="C9A227"/>
+            </a:solidFill>
+            <a:prstDash val="solid"/>
+          </a:ln>
+        </p:spPr>
+      </p:sp>
+      <p:sp>
+        <p:nvSpPr>
+          <p:cNvPr id="7" name="Text 5"/>
+          <p:cNvSpPr/>
+          <p:nvPr/>
+        </p:nvSpPr>
+        <p:spPr>
+          <a:xfrm>
+            <a:off x="777240" y="2651760"/>
+            <a:ext cx="7680960" cy="1280160"/>
           </a:xfrm>
           <a:prstGeom prst="rect">
             <a:avLst/>
@@ -5526,92 +5912,46 @@
             <a:r>
               <a:rPr lang="en-US" sz="1400" dirty="0">
                 <a:solidFill>
-                  <a:srgbClr val="1A1A1A"/>
-                </a:solidFill>
-                <a:latin typeface="Arial" pitchFamily="34" charset="0"/>
-                <a:ea typeface="Arial" pitchFamily="34" charset="-122"/>
-                <a:cs typeface="Arial" pitchFamily="34" charset="-120"/>
-              </a:rPr>
-              <a:t>An effective AI-native approach pairs a high-capacity human operator with a coordinated team of specialized agents.</a:t>
+                  <a:srgbClr val="2A2A2A"/>
+                </a:solidFill>
+                <a:latin typeface="Arial" pitchFamily="34" charset="0"/>
+                <a:ea typeface="Arial" pitchFamily="34" charset="-122"/>
+                <a:cs typeface="Arial" pitchFamily="34" charset="-120"/>
+              </a:rPr>
+              <a:t>This is a practical pattern, not a product pitch: technology absorbs volume; people own direction, standards, and final release — the same split that should govern how operating models use AI on the shop floor and in the office.</a:t>
             </a:r>
             <a:endParaRPr lang="en-US" sz="1400" dirty="0"/>
           </a:p>
-          <a:p>
-            <a:pPr indent="0" marL="0">
-              <a:buNone/>
-            </a:pPr>
-            <a:endParaRPr lang="en-US" sz="1400" dirty="0"/>
-          </a:p>
-          <a:p>
-            <a:pPr indent="0" marL="0">
-              <a:buNone/>
-            </a:pPr>
-            <a:r>
-              <a:rPr lang="en-US" sz="1400" dirty="0">
-                <a:solidFill>
-                  <a:srgbClr val="1A1A1A"/>
-                </a:solidFill>
-                <a:latin typeface="Arial" pitchFamily="34" charset="0"/>
-                <a:ea typeface="Arial" pitchFamily="34" charset="-122"/>
-                <a:cs typeface="Arial" pitchFamily="34" charset="-120"/>
-              </a:rPr>
-              <a:t>The human sets direction, makes judgment calls, and integrates the work. The agents handle depth, volume, and rapid iteration across research, drafting, and analysis — producing integrated outputs far faster than traditional methods while keeping strategic control firmly human.</a:t>
-            </a:r>
-            <a:endParaRPr lang="en-US" sz="1400" dirty="0"/>
-          </a:p>
-          <a:p>
-            <a:pPr indent="0" marL="0">
-              <a:buNone/>
-            </a:pPr>
-            <a:endParaRPr lang="en-US" sz="1400" dirty="0"/>
-          </a:p>
-          <a:p>
-            <a:pPr indent="0" marL="0">
-              <a:buNone/>
-            </a:pPr>
-            <a:r>
-              <a:rPr lang="en-US" sz="1400" dirty="0">
-                <a:solidFill>
-                  <a:srgbClr val="1A1A1A"/>
-                </a:solidFill>
-                <a:latin typeface="Arial" pitchFamily="34" charset="0"/>
-                <a:ea typeface="Arial" pitchFamily="34" charset="-122"/>
-                <a:cs typeface="Arial" pitchFamily="34" charset="-120"/>
-              </a:rPr>
-              <a:t>The same logic applies inside manufacturing, supply chain, and technical operations: use AI and automation to eliminate low-value work while expanding the number of high-skill American roles that design, maintain, and continuously improve the system.</a:t>
-            </a:r>
-            <a:endParaRPr lang="en-US" sz="1400" dirty="0"/>
-          </a:p>
-        </p:txBody>
-      </p:sp>
-      <p:sp>
-        <p:nvSpPr>
-          <p:cNvPr id="5" name="Text 3"/>
+        </p:txBody>
+      </p:sp>
+      <p:sp>
+        <p:nvSpPr>
+          <p:cNvPr id="8" name="Text 6"/>
           <p:cNvSpPr/>
           <p:nvPr/>
         </p:nvSpPr>
         <p:spPr>
           <a:xfrm>
             <a:off x="457200" y="4800600"/>
-            <a:ext cx="5943600" cy="228600"/>
-          </a:xfrm>
-          <a:prstGeom prst="rect">
-            <a:avLst/>
-          </a:prstGeom>
-          <a:noFill/>
-          <a:ln/>
-        </p:spPr>
-        <p:txBody>
-          <a:bodyPr wrap="square" lIns="0" tIns="0" rIns="0" bIns="0" rtlCol="0" anchor="ctr"/>
-          <a:lstStyle/>
-          <a:p>
-            <a:pPr indent="0" marL="0">
-              <a:buNone/>
-            </a:pPr>
-            <a:r>
-              <a:rPr lang="en-US" sz="1000" dirty="0">
-                <a:solidFill>
-                  <a:srgbClr val="555555"/>
+            <a:ext cx="5943600" cy="256032"/>
+          </a:xfrm>
+          <a:prstGeom prst="rect">
+            <a:avLst/>
+          </a:prstGeom>
+          <a:noFill/>
+          <a:ln/>
+        </p:spPr>
+        <p:txBody>
+          <a:bodyPr wrap="square" lIns="0" tIns="0" rIns="0" bIns="0" rtlCol="0" anchor="ctr"/>
+          <a:lstStyle/>
+          <a:p>
+            <a:pPr indent="0" marL="0">
+              <a:buNone/>
+            </a:pPr>
+            <a:r>
+              <a:rPr lang="en-US" sz="1100" dirty="0">
+                <a:solidFill>
+                  <a:srgbClr val="6A6A6A"/>
                 </a:solidFill>
                 <a:latin typeface="Arial" pitchFamily="34" charset="0"/>
                 <a:ea typeface="Arial" pitchFamily="34" charset="-122"/>
@@ -5619,20 +5959,20 @@
               </a:rPr>
               <a:t>Joshua Konkle  |  Chief of Staff Strategist</a:t>
             </a:r>
-            <a:endParaRPr lang="en-US" sz="1000" dirty="0"/>
-          </a:p>
-        </p:txBody>
-      </p:sp>
-      <p:sp>
-        <p:nvSpPr>
-          <p:cNvPr id="6" name="Text 4"/>
-          <p:cNvSpPr/>
-          <p:nvPr/>
-        </p:nvSpPr>
-        <p:spPr>
-          <a:xfrm>
-            <a:off x="7772400" y="4800600"/>
-            <a:ext cx="914400" cy="228600"/>
+            <a:endParaRPr lang="en-US" sz="1100" dirty="0"/>
+          </a:p>
+        </p:txBody>
+      </p:sp>
+      <p:sp>
+        <p:nvSpPr>
+          <p:cNvPr id="9" name="Text 7"/>
+          <p:cNvSpPr/>
+          <p:nvPr/>
+        </p:nvSpPr>
+        <p:spPr>
+          <a:xfrm>
+            <a:off x="7498080" y="4800600"/>
+            <a:ext cx="1188720" cy="256032"/>
           </a:xfrm>
           <a:prstGeom prst="rect">
             <a:avLst/>
@@ -5648,9 +5988,9 @@
               <a:buNone/>
             </a:pPr>
             <a:r>
-              <a:rPr lang="en-US" sz="1000" dirty="0">
-                <a:solidFill>
-                  <a:srgbClr val="555555"/>
+              <a:rPr lang="en-US" sz="1100" dirty="0">
+                <a:solidFill>
+                  <a:srgbClr val="6A6A6A"/>
                 </a:solidFill>
                 <a:latin typeface="Arial" pitchFamily="34" charset="0"/>
                 <a:ea typeface="Arial" pitchFamily="34" charset="-122"/>
@@ -5658,7 +5998,7 @@
               </a:rPr>
               <a:t>8 / 12</a:t>
             </a:r>
-            <a:endParaRPr lang="en-US" sz="1000" dirty="0"/>
+            <a:endParaRPr lang="en-US" sz="1100" dirty="0"/>
           </a:p>
         </p:txBody>
       </p:sp>
@@ -5673,13 +6013,6 @@
 <file path=ppt/slides/slide9.xml><?xml version="1.0" encoding="utf-8"?>
 <p:sld xmlns:a="http://schemas.openxmlformats.org/drawingml/2006/main" xmlns:r="http://schemas.openxmlformats.org/officeDocument/2006/relationships" xmlns:p="http://schemas.openxmlformats.org/presentationml/2006/main">
   <p:cSld name="Slide 9">
-    <p:bg>
-      <p:bgPr>
-        <a:solidFill>
-          <a:srgbClr val="FFFFFF"/>
-        </a:solidFill>
-      </p:bgPr>
-    </p:bg>
     <p:spTree>
       <p:nvGrpSpPr>
         <p:cNvPr id="1" name=""/>
@@ -5696,32 +6029,57 @@
       </p:grpSpPr>
       <p:sp>
         <p:nvSpPr>
-          <p:cNvPr id="2" name="Text 0"/>
+          <p:cNvPr id="2" name="Shape 0"/>
+          <p:cNvSpPr/>
+          <p:nvPr/>
+        </p:nvSpPr>
+        <p:spPr>
+          <a:xfrm>
+            <a:off x="0" y="0"/>
+            <a:ext cx="9144000" cy="5143500"/>
+          </a:xfrm>
+          <a:prstGeom prst="rect">
+            <a:avLst/>
+          </a:prstGeom>
+          <a:solidFill>
+            <a:srgbClr val="FFFFFF"/>
+          </a:solidFill>
+          <a:ln w="12700">
+            <a:solidFill>
+              <a:srgbClr val="FFFFFF"/>
+            </a:solidFill>
+            <a:prstDash val="solid"/>
+          </a:ln>
+        </p:spPr>
+      </p:sp>
+      <p:sp>
+        <p:nvSpPr>
+          <p:cNvPr id="3" name="Text 1"/>
           <p:cNvSpPr/>
           <p:nvPr/>
         </p:nvSpPr>
         <p:spPr>
           <a:xfrm>
             <a:off x="457200" y="274320"/>
-            <a:ext cx="8229600" cy="411480"/>
-          </a:xfrm>
-          <a:prstGeom prst="rect">
-            <a:avLst/>
-          </a:prstGeom>
-          <a:noFill/>
-          <a:ln/>
-        </p:spPr>
-        <p:txBody>
-          <a:bodyPr wrap="square" lIns="0" tIns="0" rIns="0" bIns="0" rtlCol="0" anchor="ctr"/>
-          <a:lstStyle/>
-          <a:p>
-            <a:pPr indent="0" marL="0">
-              <a:buNone/>
-            </a:pPr>
-            <a:r>
-              <a:rPr lang="en-US" sz="2400" b="1" dirty="0">
-                <a:solidFill>
-                  <a:srgbClr val="1A1A1A"/>
+            <a:ext cx="8229600" cy="365760"/>
+          </a:xfrm>
+          <a:prstGeom prst="rect">
+            <a:avLst/>
+          </a:prstGeom>
+          <a:noFill/>
+          <a:ln/>
+        </p:spPr>
+        <p:txBody>
+          <a:bodyPr wrap="square" lIns="0" tIns="0" rIns="0" bIns="0" rtlCol="0" anchor="ctr"/>
+          <a:lstStyle/>
+          <a:p>
+            <a:pPr indent="0" marL="0">
+              <a:buNone/>
+            </a:pPr>
+            <a:r>
+              <a:rPr lang="en-US" sz="2200" b="1" dirty="0">
+                <a:solidFill>
+                  <a:srgbClr val="1B2A4A"/>
                 </a:solidFill>
                 <a:latin typeface="Arial" pitchFamily="34" charset="0"/>
                 <a:ea typeface="Arial" pitchFamily="34" charset="-122"/>
@@ -5729,20 +6087,20 @@
               </a:rPr>
               <a:t>Innovation Example</a:t>
             </a:r>
-            <a:endParaRPr lang="en-US" sz="2400" dirty="0"/>
-          </a:p>
-        </p:txBody>
-      </p:sp>
-      <p:sp>
-        <p:nvSpPr>
-          <p:cNvPr id="3" name="Text 1"/>
+            <a:endParaRPr lang="en-US" sz="2200" dirty="0"/>
+          </a:p>
+        </p:txBody>
+      </p:sp>
+      <p:sp>
+        <p:nvSpPr>
+          <p:cNvPr id="4" name="Text 2"/>
           <p:cNvSpPr/>
           <p:nvPr/>
         </p:nvSpPr>
         <p:spPr>
           <a:xfrm>
             <a:off x="457200" y="868680"/>
-            <a:ext cx="8229600" cy="822960"/>
+            <a:ext cx="8229600" cy="1097280"/>
           </a:xfrm>
           <a:prstGeom prst="rect">
             <a:avLst/>
@@ -5760,7 +6118,7 @@
             <a:r>
               <a:rPr lang="en-US" sz="1500" dirty="0">
                 <a:solidFill>
-                  <a:srgbClr val="1A1A1A"/>
+                  <a:srgbClr val="2A2A2A"/>
                 </a:solidFill>
                 <a:latin typeface="Arial" pitchFamily="34" charset="0"/>
                 <a:ea typeface="Arial" pitchFamily="34" charset="-122"/>
@@ -5774,52 +6132,59 @@
       </p:sp>
       <p:sp>
         <p:nvSpPr>
-          <p:cNvPr id="4" name="Shape 2"/>
-          <p:cNvSpPr/>
-          <p:nvPr/>
-        </p:nvSpPr>
-        <p:spPr>
-          <a:xfrm>
-            <a:off x="457200" y="1920240"/>
-            <a:ext cx="8229600" cy="2103120"/>
-          </a:xfrm>
-          <a:prstGeom prst="rect">
-            <a:avLst/>
+          <p:cNvPr id="5" name="Shape 3"/>
+          <p:cNvSpPr/>
+          <p:nvPr/>
+        </p:nvSpPr>
+        <p:spPr>
+          <a:xfrm>
+            <a:off x="457200" y="2194560"/>
+            <a:ext cx="8229600" cy="1920240"/>
+          </a:xfrm>
+          <a:prstGeom prst="roundRect">
+            <a:avLst>
+              <a:gd name="adj" fmla="val 3810"/>
+            </a:avLst>
           </a:prstGeom>
           <a:solidFill>
-            <a:srgbClr val="F7F7F7"/>
+            <a:srgbClr val="1B2A4A"/>
           </a:solidFill>
-          <a:ln/>
-        </p:spPr>
-      </p:sp>
-      <p:sp>
-        <p:nvSpPr>
-          <p:cNvPr id="5" name="Text 3"/>
-          <p:cNvSpPr/>
-          <p:nvPr/>
-        </p:nvSpPr>
-        <p:spPr>
-          <a:xfrm>
-            <a:off x="731520" y="2194560"/>
-            <a:ext cx="7680960" cy="640080"/>
-          </a:xfrm>
-          <a:prstGeom prst="rect">
-            <a:avLst/>
-          </a:prstGeom>
-          <a:noFill/>
-          <a:ln/>
-        </p:spPr>
-        <p:txBody>
-          <a:bodyPr wrap="square" lIns="0" tIns="0" rIns="0" bIns="0" rtlCol="0" anchor="ctr"/>
-          <a:lstStyle/>
-          <a:p>
-            <a:pPr indent="0" marL="0">
-              <a:buNone/>
-            </a:pPr>
-            <a:r>
-              <a:rPr lang="en-US" sz="1600" b="1" dirty="0">
-                <a:solidFill>
-                  <a:srgbClr val="1A1A1A"/>
+          <a:ln w="12700">
+            <a:solidFill>
+              <a:srgbClr val="1B2A4A"/>
+            </a:solidFill>
+            <a:prstDash val="solid"/>
+          </a:ln>
+        </p:spPr>
+      </p:sp>
+      <p:sp>
+        <p:nvSpPr>
+          <p:cNvPr id="6" name="Text 4"/>
+          <p:cNvSpPr/>
+          <p:nvPr/>
+        </p:nvSpPr>
+        <p:spPr>
+          <a:xfrm>
+            <a:off x="731520" y="2468880"/>
+            <a:ext cx="7680960" cy="1463040"/>
+          </a:xfrm>
+          <a:prstGeom prst="rect">
+            <a:avLst/>
+          </a:prstGeom>
+          <a:noFill/>
+          <a:ln/>
+        </p:spPr>
+        <p:txBody>
+          <a:bodyPr wrap="square" lIns="0" tIns="0" rIns="0" bIns="0" rtlCol="0" anchor="ctr"/>
+          <a:lstStyle/>
+          <a:p>
+            <a:pPr indent="0" marL="0">
+              <a:buNone/>
+            </a:pPr>
+            <a:r>
+              <a:rPr lang="en-US" sz="1500" dirty="0">
+                <a:solidFill>
+                  <a:srgbClr val="FFFFFF"/>
                 </a:solidFill>
                 <a:latin typeface="Arial" pitchFamily="34" charset="0"/>
                 <a:ea typeface="Arial" pitchFamily="34" charset="-122"/>
@@ -5827,30 +6192,14 @@
               </a:rPr>
               <a:t>The operating model should be designed to capture that higher-skill work rather than simply bank the labor-cost reduction.</a:t>
             </a:r>
-            <a:endParaRPr lang="en-US" sz="1600" dirty="0"/>
-          </a:p>
-        </p:txBody>
-      </p:sp>
-      <p:sp>
-        <p:nvSpPr>
-          <p:cNvPr id="6" name="Text 4"/>
-          <p:cNvSpPr/>
-          <p:nvPr/>
-        </p:nvSpPr>
-        <p:spPr>
-          <a:xfrm>
-            <a:off x="731520" y="3017520"/>
-            <a:ext cx="7680960" cy="640080"/>
-          </a:xfrm>
-          <a:prstGeom prst="rect">
-            <a:avLst/>
-          </a:prstGeom>
-          <a:noFill/>
-          <a:ln/>
-        </p:spPr>
-        <p:txBody>
-          <a:bodyPr wrap="square" lIns="0" tIns="0" rIns="0" bIns="0" rtlCol="0" anchor="ctr"/>
-          <a:lstStyle/>
+            <a:endParaRPr lang="en-US" sz="1500" dirty="0"/>
+          </a:p>
+          <a:p>
+            <a:pPr indent="0" marL="0">
+              <a:buNone/>
+            </a:pPr>
+            <a:endParaRPr lang="en-US" sz="1500" dirty="0"/>
+          </a:p>
           <a:p>
             <a:pPr indent="0" marL="0">
               <a:buNone/>
@@ -5858,7 +6207,7 @@
             <a:r>
               <a:rPr lang="en-US" sz="1500" dirty="0">
                 <a:solidFill>
-                  <a:srgbClr val="555555"/>
+                  <a:srgbClr val="FFFFFF"/>
                 </a:solidFill>
                 <a:latin typeface="Arial" pitchFamily="34" charset="0"/>
                 <a:ea typeface="Arial" pitchFamily="34" charset="-122"/>
@@ -5879,25 +6228,25 @@
         <p:spPr>
           <a:xfrm>
             <a:off x="457200" y="4800600"/>
-            <a:ext cx="5943600" cy="228600"/>
-          </a:xfrm>
-          <a:prstGeom prst="rect">
-            <a:avLst/>
-          </a:prstGeom>
-          <a:noFill/>
-          <a:ln/>
-        </p:spPr>
-        <p:txBody>
-          <a:bodyPr wrap="square" lIns="0" tIns="0" rIns="0" bIns="0" rtlCol="0" anchor="ctr"/>
-          <a:lstStyle/>
-          <a:p>
-            <a:pPr indent="0" marL="0">
-              <a:buNone/>
-            </a:pPr>
-            <a:r>
-              <a:rPr lang="en-US" sz="1000" dirty="0">
-                <a:solidFill>
-                  <a:srgbClr val="555555"/>
+            <a:ext cx="5943600" cy="256032"/>
+          </a:xfrm>
+          <a:prstGeom prst="rect">
+            <a:avLst/>
+          </a:prstGeom>
+          <a:noFill/>
+          <a:ln/>
+        </p:spPr>
+        <p:txBody>
+          <a:bodyPr wrap="square" lIns="0" tIns="0" rIns="0" bIns="0" rtlCol="0" anchor="ctr"/>
+          <a:lstStyle/>
+          <a:p>
+            <a:pPr indent="0" marL="0">
+              <a:buNone/>
+            </a:pPr>
+            <a:r>
+              <a:rPr lang="en-US" sz="1100" dirty="0">
+                <a:solidFill>
+                  <a:srgbClr val="6A6A6A"/>
                 </a:solidFill>
                 <a:latin typeface="Arial" pitchFamily="34" charset="0"/>
                 <a:ea typeface="Arial" pitchFamily="34" charset="-122"/>
@@ -5905,7 +6254,7 @@
               </a:rPr>
               <a:t>Joshua Konkle  |  Chief of Staff Strategist</a:t>
             </a:r>
-            <a:endParaRPr lang="en-US" sz="1000" dirty="0"/>
+            <a:endParaRPr lang="en-US" sz="1100" dirty="0"/>
           </a:p>
         </p:txBody>
       </p:sp>
@@ -5917,8 +6266,8 @@
         </p:nvSpPr>
         <p:spPr>
           <a:xfrm>
-            <a:off x="7772400" y="4800600"/>
-            <a:ext cx="914400" cy="228600"/>
+            <a:off x="7498080" y="4800600"/>
+            <a:ext cx="1188720" cy="256032"/>
           </a:xfrm>
           <a:prstGeom prst="rect">
             <a:avLst/>
@@ -5934,9 +6283,9 @@
               <a:buNone/>
             </a:pPr>
             <a:r>
-              <a:rPr lang="en-US" sz="1000" dirty="0">
-                <a:solidFill>
-                  <a:srgbClr val="555555"/>
+              <a:rPr lang="en-US" sz="1100" dirty="0">
+                <a:solidFill>
+                  <a:srgbClr val="6A6A6A"/>
                 </a:solidFill>
                 <a:latin typeface="Arial" pitchFamily="34" charset="0"/>
                 <a:ea typeface="Arial" pitchFamily="34" charset="-122"/>
@@ -5944,7 +6293,7 @@
               </a:rPr>
               <a:t>9 / 12</a:t>
             </a:r>
-            <a:endParaRPr lang="en-US" sz="1000" dirty="0"/>
+            <a:endParaRPr lang="en-US" sz="1100" dirty="0"/>
           </a:p>
         </p:txBody>
       </p:sp>
